--- a/temp/k2-extraction/K2추출.pptx
+++ b/temp/k2-extraction/K2추출.pptx
@@ -4,13 +4,13 @@
   <p:sldMasterIdLst>
     <p:sldMasterId id="2147483648" r:id="rId1"/>
   </p:sldMasterIdLst>
-  <p:notesMasterIdLst>
-    <p:notesMasterId r:id="rId4"/>
-  </p:notesMasterIdLst>
   <p:sldIdLst>
     <p:sldId id="256" r:id="rId2"/>
     <p:sldId id="257" r:id="rId3"/>
   </p:sldIdLst>
+  <p:notesMasterIdLst>
+    <p:notesMasterId r:id="rId4"/>
+  </p:notesMasterIdLst>
   <p:sldSz cx="14630400" cy="8229600"/>
   <p:notesSz cx="8229600" cy="14630400"/>
   <p:defaultTextStyle>
@@ -105,11 +105,6 @@
       </a:defRPr>
     </a:lvl9pPr>
   </p:defaultTextStyle>
-  <p:extLst>
-    <p:ext uri="{EFAFB233-063F-42B5-8137-9DF3F51BA10A}">
-      <p15:sldGuideLst xmlns:p15="http://schemas.microsoft.com/office/powerpoint/2012/main"/>
-    </p:ext>
-  </p:extLst>
 </p:presentation>
 </file>
 
@@ -135,16 +130,240 @@
           <a:chExt cx="0" cy="0"/>
         </a:xfrm>
       </p:grpSpPr>
+      <p:sp>
+        <p:nvSpPr>
+          <p:cNvPr id="2" name="Header Placeholder 1"/>
+          <p:cNvSpPr>
+            <a:spLocks noGrp="1"/>
+          </p:cNvSpPr>
+          <p:nvPr>
+            <p:ph type="hdr" sz="quarter"/>
+          </p:nvPr>
+        </p:nvSpPr>
+        <p:spPr>
+          <a:xfrm>
+            <a:off x="0" y="0"/>
+            <a:ext cx="2971800" cy="458788"/>
+          </a:xfrm>
+          <a:prstGeom prst="rect">
+            <a:avLst/>
+          </a:prstGeom>
+        </p:spPr>
+        <p:txBody>
+          <a:bodyPr vert="horz" lIns="91440" tIns="45720" rIns="91440" bIns="45720" rtlCol="0"/>
+          <a:lstStyle>
+            <a:lvl1pPr algn="l">
+              <a:defRPr sz="1200"/>
+            </a:lvl1pPr>
+          </a:lstStyle>
+          <a:p>
+            <a:endParaRPr lang="en-US"/>
+          </a:p>
+        </p:txBody>
+      </p:sp>
+      <p:sp>
+        <p:nvSpPr>
+          <p:cNvPr id="3" name="Date Placeholder 2"/>
+          <p:cNvSpPr>
+            <a:spLocks noGrp="1"/>
+          </p:cNvSpPr>
+          <p:nvPr>
+            <p:ph type="dt" idx="1"/>
+          </p:nvPr>
+        </p:nvSpPr>
+        <p:spPr>
+          <a:xfrm>
+            <a:off x="3884613" y="0"/>
+            <a:ext cx="2971800" cy="458788"/>
+          </a:xfrm>
+          <a:prstGeom prst="rect">
+            <a:avLst/>
+          </a:prstGeom>
+        </p:spPr>
+        <p:txBody>
+          <a:bodyPr vert="horz" lIns="91440" tIns="45720" rIns="91440" bIns="45720" rtlCol="0"/>
+          <a:lstStyle>
+            <a:lvl1pPr algn="r">
+              <a:defRPr sz="1200"/>
+            </a:lvl1pPr>
+          </a:lstStyle>
+          <a:p>
+            <a:fld id="{5282F153-3F37-0F45-9E97-73ACFA13230C}" type="datetimeFigureOut">
+              <a:rPr lang="en-US"/>
+              <a:t>7/23/19</a:t>
+            </a:fld>
+            <a:endParaRPr lang="en-US"/>
+          </a:p>
+        </p:txBody>
+      </p:sp>
+      <p:sp>
+        <p:nvSpPr>
+          <p:cNvPr id="4" name="Slide Image Placeholder 3"/>
+          <p:cNvSpPr>
+            <a:spLocks noGrp="1" noRot="1" noChangeAspect="1"/>
+          </p:cNvSpPr>
+          <p:nvPr>
+            <p:ph type="sldImg" idx="2"/>
+          </p:nvPr>
+        </p:nvSpPr>
+        <p:spPr>
+          <a:xfrm>
+            <a:off x="685800" y="1143000"/>
+            <a:ext cx="5486400" cy="3086100"/>
+          </a:xfrm>
+          <a:prstGeom prst="rect">
+            <a:avLst/>
+          </a:prstGeom>
+          <a:noFill/>
+          <a:ln w="12700">
+            <a:solidFill>
+              <a:prstClr val="black"/>
+            </a:solidFill>
+          </a:ln>
+        </p:spPr>
+        <p:txBody>
+          <a:bodyPr vert="horz" lIns="91440" tIns="45720" rIns="91440" bIns="45720" rtlCol="0" anchor="ctr"/>
+          <a:lstStyle/>
+          <a:p>
+            <a:endParaRPr lang="en-US"/>
+          </a:p>
+        </p:txBody>
+      </p:sp>
+      <p:sp>
+        <p:nvSpPr>
+          <p:cNvPr id="5" name="Notes Placeholder 4"/>
+          <p:cNvSpPr>
+            <a:spLocks noGrp="1"/>
+          </p:cNvSpPr>
+          <p:nvPr>
+            <p:ph type="body" sz="quarter" idx="3"/>
+          </p:nvPr>
+        </p:nvSpPr>
+        <p:spPr>
+          <a:xfrm>
+            <a:off x="685800" y="4400550"/>
+            <a:ext cx="5486400" cy="3600450"/>
+          </a:xfrm>
+          <a:prstGeom prst="rect">
+            <a:avLst/>
+          </a:prstGeom>
+        </p:spPr>
+        <p:txBody>
+          <a:bodyPr vert="horz" lIns="91440" tIns="45720" rIns="91440" bIns="45720" rtlCol="0"/>
+          <a:lstStyle/>
+          <a:p>
+            <a:pPr lvl="0"/>
+            <a:r>
+              <a:rPr lang="en-US"/>
+              <a:t>Click to edit Master text styles</a:t>
+            </a:r>
+          </a:p>
+          <a:p>
+            <a:pPr lvl="1"/>
+            <a:r>
+              <a:rPr lang="en-US"/>
+              <a:t>Second level</a:t>
+            </a:r>
+          </a:p>
+          <a:p>
+            <a:pPr lvl="2"/>
+            <a:r>
+              <a:rPr lang="en-US"/>
+              <a:t>Third level</a:t>
+            </a:r>
+          </a:p>
+          <a:p>
+            <a:pPr lvl="3"/>
+            <a:r>
+              <a:rPr lang="en-US"/>
+              <a:t>Fourth level</a:t>
+            </a:r>
+          </a:p>
+          <a:p>
+            <a:pPr lvl="4"/>
+            <a:r>
+              <a:rPr lang="en-US"/>
+              <a:t>Fifth level</a:t>
+            </a:r>
+          </a:p>
+        </p:txBody>
+      </p:sp>
+      <p:sp>
+        <p:nvSpPr>
+          <p:cNvPr id="6" name="Footer Placeholder 5"/>
+          <p:cNvSpPr>
+            <a:spLocks noGrp="1"/>
+          </p:cNvSpPr>
+          <p:nvPr>
+            <p:ph type="ftr" sz="quarter" idx="4"/>
+          </p:nvPr>
+        </p:nvSpPr>
+        <p:spPr>
+          <a:xfrm>
+            <a:off x="0" y="8685213"/>
+            <a:ext cx="2971800" cy="458787"/>
+          </a:xfrm>
+          <a:prstGeom prst="rect">
+            <a:avLst/>
+          </a:prstGeom>
+        </p:spPr>
+        <p:txBody>
+          <a:bodyPr vert="horz" lIns="91440" tIns="45720" rIns="91440" bIns="45720" rtlCol="0" anchor="b"/>
+          <a:lstStyle>
+            <a:lvl1pPr algn="l">
+              <a:defRPr sz="1200"/>
+            </a:lvl1pPr>
+          </a:lstStyle>
+          <a:p>
+            <a:endParaRPr lang="en-US"/>
+          </a:p>
+        </p:txBody>
+      </p:sp>
+      <p:sp>
+        <p:nvSpPr>
+          <p:cNvPr id="7" name="Slide Number Placeholder 6"/>
+          <p:cNvSpPr>
+            <a:spLocks noGrp="1"/>
+          </p:cNvSpPr>
+          <p:nvPr>
+            <p:ph type="sldNum" sz="quarter" idx="5"/>
+          </p:nvPr>
+        </p:nvSpPr>
+        <p:spPr>
+          <a:xfrm>
+            <a:off x="3884613" y="8685213"/>
+            <a:ext cx="2971800" cy="458787"/>
+          </a:xfrm>
+          <a:prstGeom prst="rect">
+            <a:avLst/>
+          </a:prstGeom>
+        </p:spPr>
+        <p:txBody>
+          <a:bodyPr vert="horz" lIns="91440" tIns="45720" rIns="91440" bIns="45720" rtlCol="0" anchor="b"/>
+          <a:lstStyle>
+            <a:lvl1pPr algn="r">
+              <a:defRPr sz="1200"/>
+            </a:lvl1pPr>
+          </a:lstStyle>
+          <a:p>
+            <a:fld id="{CE5E9CC1-C706-0F49-92D6-E571CC5EEA8F}" type="slidenum">
+              <a:rPr lang="en-US"/>
+              <a:t>‹#›</a:t>
+            </a:fld>
+            <a:endParaRPr lang="en-US"/>
+          </a:p>
+        </p:txBody>
+      </p:sp>
     </p:spTree>
     <p:extLst>
       <p:ext uri="{BB962C8B-B14F-4D97-AF65-F5344CB8AC3E}">
-        <p14:creationId xmlns:p14="http://schemas.microsoft.com/office/powerpoint/2010/main" val="2354365776"/>
+        <p14:creationId xmlns:p14="http://schemas.microsoft.com/office/powerpoint/2010/main" val="1024086991"/>
       </p:ext>
     </p:extLst>
   </p:cSld>
   <p:clrMap bg1="lt1" tx1="dk1" bg2="lt2" tx2="dk2" accent1="accent1" accent2="accent2" accent3="accent3" accent4="accent4" accent5="accent5" accent6="accent6" hlink="hlink" folHlink="folHlink"/>
   <p:notesStyle>
-    <a:lvl1pPr marL="0" algn="l" defTabSz="914400" rtl="0" eaLnBrk="1" latinLnBrk="1" hangingPunct="1">
+    <a:lvl1pPr marL="0" algn="l" defTabSz="914400" rtl="0" eaLnBrk="1" latinLnBrk="0" hangingPunct="1">
       <a:defRPr sz="1200" kern="1200">
         <a:solidFill>
           <a:schemeClr val="tx1"/>
@@ -154,7 +373,7 @@
         <a:cs typeface="+mn-cs"/>
       </a:defRPr>
     </a:lvl1pPr>
-    <a:lvl2pPr marL="457200" algn="l" defTabSz="914400" rtl="0" eaLnBrk="1" latinLnBrk="1" hangingPunct="1">
+    <a:lvl2pPr marL="457200" algn="l" defTabSz="914400" rtl="0" eaLnBrk="1" latinLnBrk="0" hangingPunct="1">
       <a:defRPr sz="1200" kern="1200">
         <a:solidFill>
           <a:schemeClr val="tx1"/>
@@ -164,7 +383,7 @@
         <a:cs typeface="+mn-cs"/>
       </a:defRPr>
     </a:lvl2pPr>
-    <a:lvl3pPr marL="914400" algn="l" defTabSz="914400" rtl="0" eaLnBrk="1" latinLnBrk="1" hangingPunct="1">
+    <a:lvl3pPr marL="914400" algn="l" defTabSz="914400" rtl="0" eaLnBrk="1" latinLnBrk="0" hangingPunct="1">
       <a:defRPr sz="1200" kern="1200">
         <a:solidFill>
           <a:schemeClr val="tx1"/>
@@ -174,7 +393,7 @@
         <a:cs typeface="+mn-cs"/>
       </a:defRPr>
     </a:lvl3pPr>
-    <a:lvl4pPr marL="1371600" algn="l" defTabSz="914400" rtl="0" eaLnBrk="1" latinLnBrk="1" hangingPunct="1">
+    <a:lvl4pPr marL="1371600" algn="l" defTabSz="914400" rtl="0" eaLnBrk="1" latinLnBrk="0" hangingPunct="1">
       <a:defRPr sz="1200" kern="1200">
         <a:solidFill>
           <a:schemeClr val="tx1"/>
@@ -184,7 +403,7 @@
         <a:cs typeface="+mn-cs"/>
       </a:defRPr>
     </a:lvl4pPr>
-    <a:lvl5pPr marL="1828800" algn="l" defTabSz="914400" rtl="0" eaLnBrk="1" latinLnBrk="1" hangingPunct="1">
+    <a:lvl5pPr marL="1828800" algn="l" defTabSz="914400" rtl="0" eaLnBrk="1" latinLnBrk="0" hangingPunct="1">
       <a:defRPr sz="1200" kern="1200">
         <a:solidFill>
           <a:schemeClr val="tx1"/>
@@ -194,7 +413,7 @@
         <a:cs typeface="+mn-cs"/>
       </a:defRPr>
     </a:lvl5pPr>
-    <a:lvl6pPr marL="2286000" algn="l" defTabSz="914400" rtl="0" eaLnBrk="1" latinLnBrk="1" hangingPunct="1">
+    <a:lvl6pPr marL="2286000" algn="l" defTabSz="914400" rtl="0" eaLnBrk="1" latinLnBrk="0" hangingPunct="1">
       <a:defRPr sz="1200" kern="1200">
         <a:solidFill>
           <a:schemeClr val="tx1"/>
@@ -204,7 +423,7 @@
         <a:cs typeface="+mn-cs"/>
       </a:defRPr>
     </a:lvl6pPr>
-    <a:lvl7pPr marL="2743200" algn="l" defTabSz="914400" rtl="0" eaLnBrk="1" latinLnBrk="1" hangingPunct="1">
+    <a:lvl7pPr marL="2743200" algn="l" defTabSz="914400" rtl="0" eaLnBrk="1" latinLnBrk="0" hangingPunct="1">
       <a:defRPr sz="1200" kern="1200">
         <a:solidFill>
           <a:schemeClr val="tx1"/>
@@ -214,7 +433,7 @@
         <a:cs typeface="+mn-cs"/>
       </a:defRPr>
     </a:lvl7pPr>
-    <a:lvl8pPr marL="3200400" algn="l" defTabSz="914400" rtl="0" eaLnBrk="1" latinLnBrk="1" hangingPunct="1">
+    <a:lvl8pPr marL="3200400" algn="l" defTabSz="914400" rtl="0" eaLnBrk="1" latinLnBrk="0" hangingPunct="1">
       <a:defRPr sz="1200" kern="1200">
         <a:solidFill>
           <a:schemeClr val="tx1"/>
@@ -224,7 +443,7 @@
         <a:cs typeface="+mn-cs"/>
       </a:defRPr>
     </a:lvl8pPr>
-    <a:lvl9pPr marL="3657600" algn="l" defTabSz="914400" rtl="0" eaLnBrk="1" latinLnBrk="1" hangingPunct="1">
+    <a:lvl9pPr marL="3657600" algn="l" defTabSz="914400" rtl="0" eaLnBrk="1" latinLnBrk="0" hangingPunct="1">
       <a:defRPr sz="1200" kern="1200">
         <a:solidFill>
           <a:schemeClr val="tx1"/>
@@ -284,9 +503,11 @@
           <a:p>
             <a:r>
               <a:rPr lang="en-US" dirty="0"/>
-              <a:t>K2는 추출 단위 하나를 LLM에 넣어 노드와 관계를 받는 단계입니다. LLM에는 네 가지가 들어갑니다. 승인된 그래프 스키마, 메타데이터 머리줄, 추출 단위 본문, 그리고 라이브러리의 기본 추출 지시입니다. 스키마의 설명에는 해당하는 것과 해당하지 않는 것을 함께 적어서 LLM이 경계를 판단하게 합니다. 머리줄은 상담 번호나 날짜처럼 본문에 잘 드러나지 않는 키 속성을 채우려고 붙입니다.
-예시 상담에서 LLM은 상담사가 권한 두 가지 방법을 제안 노드로, 고객이 말한 다시 문의할 조건을 재검토 조건 노드로 뽑고, 본문에 적힌 앞 상담 번호로 이전 상담과 이었습니다. 응답 형식이 깨지면 같은 입력으로 두 번까지 다시 묻고, 그래도 안 되면 그 단위만 실패로 기록하고 나머지를 계속합니다. 노드 ID 앞에는 단위 ID가 붙어서 K4에서 검색용 청크와 이을 수 있습니다.</a:t>
-            </a:r>
+              <a:t>K2는 추출 단위 하나를 LLM에 넣어 노드와 관계를 받는 단계입니다. LLM에는 네 가지가 들어갑니다. 그 문서 유형의 graph_schema.json, 메타데이터 머리줄, 추출 단위 본문, 그리고 라이브러리의 기본 추출 지시입니다. 머리줄은 상담 번호나 날짜처럼 본문에 잘 드러나지 않는 키 속성을 채우려고 붙입니다.
+예시 상담에서 LLM은 상담사가 권한 두 방법을 제안 노드로, 고객이 말한 다시 문의할 조건을 재검토 조건 노드로 뽑고, 본문에 적힌 앞 상담 번호로 이전 상담과 이었습니다. 다만 같은 원문을 한 번 더 넣었더니 재검토 조건이 제안의 이유 속성으로 들어갔습니다. LLM은 부를 때마다 결과가 조금씩 다릅니다. 그래서 본문과 스키마가 그대로인 단위는 다시 묻지 않고 앞 결과를 씁니다.
+노드 ID 앞에 붙는 단위 ID는 단위끼리 ID가 겹치지 않게 하는 임시 표시입니다. 검색용 청크와 잇는 일은 K4에서 추출 단위 노드와 FROM_CHUNK 관계가 맡습니다.</a:t>
+            </a:r>
+            <a:endParaRPr lang="en-US" dirty="0"/>
           </a:p>
         </p:txBody>
       </p:sp>
@@ -372,8 +593,10 @@
           <a:p>
             <a:r>
               <a:rPr lang="en-US" dirty="0"/>
-              <a:t>추출기는 한 번만 만듭니다. LLM, 그리고 검색용 청크 노드는 만들지 않는다는 설정, 오류가 나면 예외로 올린다는 설정을 줍니다. 단위마다 머리줄을 붙인 글을 TextChunk 하나로 감싸 넣는데, 이때 uid에 단위 ID를 줍니다. 그래서 돌려받은 노드 ID 앞에 단위 ID가 붙습니다. 형식 오류는 같은 입력으로 두 번까지 다시 묻고, 받은 그래프는 다음 단계인 가지치기로 넘깁니다.</a:t>
-            </a:r>
+              <a:t>추출기는 한 번만 만듭니다. 검색용 청크 노드는 만들지 않고, 오류가 나면 예외로 올리게 설정합니다. 단위마다 머리줄을 붙인 글을 TextChunk 하나로 감싸 넣는데, uid에 단위 ID를 줍니다. 그래서 돌려받은 노드 ID 앞에 단위 ID가 붙습니다.
+형식 오류는 같은 입력으로 두 번까지 다시 묻고, 그래도 안 되면 오류를 돌려줘 실패 목록에 남깁니다. 받은 그래프는 같은 함수에서 바로 가지치기를 하고, 결과를 kg_prepared.json에 보관합니다. 다음 실행에서는 본문 해시와 스키마 지문이 같으면 이 보관 결과를 그대로 씁니다.</a:t>
+            </a:r>
+            <a:endParaRPr lang="en-US" dirty="0"/>
           </a:p>
         </p:txBody>
       </p:sp>
@@ -451,7 +674,6 @@
         <a:solidFill>
           <a:srgbClr val="FFFFFF"/>
         </a:solidFill>
-        <a:effectLst/>
       </p:bgPr>
     </p:bg>
     <p:spTree>
@@ -490,13 +712,6 @@
             <a:prstDash val="solid"/>
           </a:ln>
         </p:spPr>
-        <p:txBody>
-          <a:bodyPr/>
-          <a:lstStyle/>
-          <a:p>
-            <a:endParaRPr lang="ko-KR" altLang="en-US"/>
-          </a:p>
-        </p:txBody>
       </p:sp>
       <p:sp>
         <p:nvSpPr>
@@ -519,7 +734,7 @@
           <a:bodyPr wrap="square" lIns="0" tIns="0" rIns="0" bIns="0" rtlCol="0" anchor="ctr"/>
           <a:lstStyle/>
           <a:p>
-            <a:pPr marL="0" indent="0">
+            <a:pPr indent="0" marL="0">
               <a:buNone/>
             </a:pPr>
             <a:r>
@@ -540,9 +755,7 @@
       <p:sp>
         <p:nvSpPr>
           <p:cNvPr id="4" name="Text 2"/>
-          <p:cNvSpPr>
-            <a:spLocks noGrp="1"/>
-          </p:cNvSpPr>
+          <p:cNvSpPr/>
           <p:nvPr>
             <p:ph type="title"/>
           </p:nvPr>
@@ -561,7 +774,7 @@
         <p:txBody>
           <a:bodyPr wrap="square" rtlCol="0"/>
           <a:lstStyle>
-            <a:lvl1pPr marL="0" indent="0" algn="l">
+            <a:lvl1pPr algn="l" indent="0" marL="0">
               <a:buNone/>
               <a:defRPr lang="en-US" sz="3200" b="1" dirty="0">
                 <a:solidFill>
@@ -574,7 +787,7 @@
             </a:lvl1pPr>
           </a:lstStyle>
           <a:p>
-            <a:pPr marL="0" indent="0" algn="l">
+            <a:pPr algn="l" indent="0" marL="0">
               <a:buNone/>
             </a:pPr>
             <a:endParaRPr lang="en-US" sz="3200" dirty="0"/>
@@ -601,7 +814,7 @@
           </a:prstGeom>
           <a:extLst>
             <a:ext uri="{C572A759-6A51-4108-AA02-DFA0A04FC94B}">
-              <ma14:wrappingTextBoxFlag xmlns:ma14="http://schemas.microsoft.com/office/mac/drawingml/2011/main" xmlns="" val="0"/>
+              <ma14:wrappingTextBoxFlag xmlns:ma14="http://schemas.microsoft.com/office/mac/drawingml/2011/main" val="0"/>
             </a:ext>
           </a:extLst>
         </p:spPr>
@@ -622,8 +835,8 @@
           <a:p>
             <a:pPr algn="r"/>
             <a:fld id="{F7021451-1387-4CA6-816F-3879F97B5CBC}" type="slidenum">
-              <a:rPr lang="en-US" b="0"/>
-              <a:t>‹#›</a:t>
+              <a:rPr b="0" lang="en-US"/>
+              <a:t>1002</a:t>
             </a:fld>
             <a:endParaRPr lang="en-US"/>
           </a:p>
@@ -640,11 +853,6 @@
 <file path=ppt/slideMasters/slideMaster1.xml><?xml version="1.0" encoding="utf-8"?>
 <p:sldMaster xmlns:a="http://schemas.openxmlformats.org/drawingml/2006/main" xmlns:r="http://schemas.openxmlformats.org/officeDocument/2006/relationships" xmlns:p="http://schemas.openxmlformats.org/presentationml/2006/main">
   <p:cSld>
-    <p:bg>
-      <p:bgRef idx="1001">
-        <a:schemeClr val="bg1"/>
-      </p:bgRef>
-    </p:bg>
     <p:spTree>
       <p:nvGrpSpPr>
         <p:cNvPr id="1" name=""/>
@@ -679,7 +887,7 @@
           </a:prstGeom>
           <a:extLst>
             <a:ext uri="{C572A759-6A51-4108-AA02-DFA0A04FC94B}">
-              <ma14:wrappingTextBoxFlag xmlns:ma14="http://schemas.microsoft.com/office/mac/drawingml/2011/main" xmlns="" val="0"/>
+              <ma14:wrappingTextBoxFlag xmlns:ma14="http://schemas.microsoft.com/office/mac/drawingml/2011/main" val="0"/>
             </a:ext>
           </a:extLst>
         </p:spPr>
@@ -700,8 +908,8 @@
           <a:p>
             <a:pPr algn="r"/>
             <a:fld id="{F7021451-1387-4CA6-816F-3879F97B5CBC}" type="slidenum">
-              <a:rPr lang="en-US" b="0"/>
-              <a:t>‹#›</a:t>
+              <a:rPr b="0" lang="en-US"/>
+              <a:t>null</a:t>
             </a:fld>
             <a:endParaRPr lang="en-US"/>
           </a:p>
@@ -988,9 +1196,7 @@
       <p:sp>
         <p:nvSpPr>
           <p:cNvPr id="2" name="Text 2"/>
-          <p:cNvSpPr>
-            <a:spLocks noGrp="1"/>
-          </p:cNvSpPr>
+          <p:cNvSpPr/>
           <p:nvPr>
             <p:ph type="title"/>
           </p:nvPr>
@@ -1010,7 +1216,7 @@
           <a:bodyPr wrap="square" lIns="0" tIns="0" rIns="0" bIns="0" rtlCol="0" anchor="ctr"/>
           <a:lstStyle/>
           <a:p>
-            <a:pPr marL="0" indent="0" algn="l">
+            <a:pPr algn="l" indent="0" marL="0">
               <a:buNone/>
             </a:pPr>
             <a:r>
@@ -1049,7 +1255,7 @@
           <a:bodyPr wrap="square" lIns="0" tIns="0" rIns="0" bIns="0" rtlCol="0" anchor="ctr"/>
           <a:lstStyle/>
           <a:p>
-            <a:pPr marL="0" indent="0">
+            <a:pPr indent="0" marL="0">
               <a:buNone/>
             </a:pPr>
             <a:r>
@@ -1061,7 +1267,7 @@
                 <a:ea typeface="Pretendard SemiBold" pitchFamily="34" charset="-122"/>
                 <a:cs typeface="Pretendard SemiBold" pitchFamily="34" charset="-120"/>
               </a:rPr>
-              <a:t>추출 단위 하나와 승인된 그래프 스키마를 LLM에 넣어, 스키마 모양대로 노드와 관계를 JSON으로 받음</a:t>
+              <a:t>추출 단위 하나와 그 문서 유형의 그래프 스키마를 LLM에 넣어, 스키마 모양대로 노드와 관계를 JSON으로 받음</a:t>
             </a:r>
             <a:endParaRPr lang="en-US" sz="1800" dirty="0"/>
           </a:p>
@@ -1088,13 +1294,6 @@
           </a:solidFill>
           <a:ln/>
         </p:spPr>
-        <p:txBody>
-          <a:bodyPr/>
-          <a:lstStyle/>
-          <a:p>
-            <a:endParaRPr lang="ko-KR" altLang="en-US"/>
-          </a:p>
-        </p:txBody>
       </p:sp>
       <p:sp>
         <p:nvSpPr>
@@ -1117,7 +1316,7 @@
           <a:bodyPr wrap="square" lIns="1016" tIns="1016" rIns="1016" bIns="1016" rtlCol="0" anchor="ctr"/>
           <a:lstStyle/>
           <a:p>
-            <a:pPr marL="0" indent="0" algn="ctr">
+            <a:pPr algn="ctr" indent="0" marL="0">
               <a:buNone/>
             </a:pPr>
             <a:r>
@@ -1161,13 +1360,6 @@
             <a:prstDash val="solid"/>
           </a:ln>
         </p:spPr>
-        <p:txBody>
-          <a:bodyPr/>
-          <a:lstStyle/>
-          <a:p>
-            <a:endParaRPr lang="ko-KR" altLang="en-US"/>
-          </a:p>
-        </p:txBody>
       </p:sp>
       <p:sp>
         <p:nvSpPr>
@@ -1190,7 +1382,7 @@
           <a:bodyPr wrap="square" lIns="127000" tIns="38100" rIns="127000" bIns="38100" rtlCol="0" anchor="ctr"/>
           <a:lstStyle/>
           <a:p>
-            <a:pPr marL="0" indent="0" algn="l">
+            <a:pPr algn="l" indent="0" marL="0">
               <a:spcAft>
                 <a:spcPts val="100"/>
               </a:spcAft>
@@ -1205,74 +1397,19 @@
                 <a:ea typeface="Pretendard" pitchFamily="34" charset="-122"/>
                 <a:cs typeface="Pretendard" pitchFamily="34" charset="-120"/>
               </a:rPr>
-              <a:t>① </a:t>
-            </a:r>
-            <a:r>
-              <a:rPr lang="en-US" sz="1500" b="1" dirty="0" err="1">
-                <a:solidFill>
-                  <a:srgbClr val="1E2A5C"/>
-                </a:solidFill>
-                <a:latin typeface="Pretendard" pitchFamily="34" charset="0"/>
-                <a:ea typeface="Pretendard" pitchFamily="34" charset="-122"/>
-                <a:cs typeface="Pretendard" pitchFamily="34" charset="-120"/>
-              </a:rPr>
-              <a:t>그래프</a:t>
-            </a:r>
-            <a:r>
-              <a:rPr lang="en-US" sz="1500" b="1" dirty="0">
-                <a:solidFill>
-                  <a:srgbClr val="1E2A5C"/>
-                </a:solidFill>
-                <a:latin typeface="Pretendard" pitchFamily="34" charset="0"/>
-                <a:ea typeface="Pretendard" pitchFamily="34" charset="-122"/>
-                <a:cs typeface="Pretendard" pitchFamily="34" charset="-120"/>
-              </a:rPr>
-              <a:t> </a:t>
-            </a:r>
-            <a:r>
-              <a:rPr lang="en-US" sz="1500" b="1" dirty="0" err="1">
-                <a:solidFill>
-                  <a:srgbClr val="1E2A5C"/>
-                </a:solidFill>
-                <a:latin typeface="Pretendard" pitchFamily="34" charset="0"/>
-                <a:ea typeface="Pretendard" pitchFamily="34" charset="-122"/>
-                <a:cs typeface="Pretendard" pitchFamily="34" charset="-120"/>
-              </a:rPr>
-              <a:t>스키마</a:t>
-            </a:r>
-            <a:r>
-              <a:rPr lang="en-US" sz="1500" b="1" dirty="0">
-                <a:solidFill>
-                  <a:srgbClr val="1E2A5C"/>
-                </a:solidFill>
-                <a:latin typeface="Pretendard" pitchFamily="34" charset="0"/>
-                <a:ea typeface="Pretendard" pitchFamily="34" charset="-122"/>
-                <a:cs typeface="Pretendard" pitchFamily="34" charset="-120"/>
-              </a:rPr>
-              <a:t> </a:t>
-            </a:r>
-            <a:r>
-              <a:rPr lang="ko-KR" altLang="en-US" sz="1500" b="1" dirty="0">
-                <a:solidFill>
-                  <a:srgbClr val="1E2A5C"/>
-                </a:solidFill>
-                <a:latin typeface="Pretendard" pitchFamily="34" charset="0"/>
-                <a:ea typeface="Pretendard" pitchFamily="34" charset="-122"/>
-                <a:cs typeface="Pretendard" pitchFamily="34" charset="-120"/>
-              </a:rPr>
-              <a:t>설계</a:t>
+              <a:t>① 문서 유형별 graph_schema.json</a:t>
             </a:r>
             <a:endParaRPr lang="en-US" sz="1500" dirty="0"/>
           </a:p>
           <a:p>
-            <a:pPr marL="0" indent="0" algn="l">
+            <a:pPr algn="l" indent="0" marL="0">
               <a:spcAft>
                 <a:spcPts val="100"/>
               </a:spcAft>
               <a:buNone/>
             </a:pPr>
             <a:r>
-              <a:rPr lang="ko-KR" altLang="en-US" sz="1400" dirty="0">
+              <a:rPr lang="en-US" sz="1400" dirty="0">
                 <a:solidFill>
                   <a:srgbClr val="1E2A5C"/>
                 </a:solidFill>
@@ -1280,7 +1417,7 @@
                 <a:ea typeface="Pretendard" pitchFamily="34" charset="-122"/>
                 <a:cs typeface="Pretendard" pitchFamily="34" charset="-120"/>
               </a:rPr>
-              <a:t>문서유형별로 사전에 정의</a:t>
+              <a:t>상담 기록: 노드 4, 관계 4와 해당, 비해당 설명</a:t>
             </a:r>
             <a:endParaRPr lang="en-US" sz="1500" dirty="0"/>
           </a:p>
@@ -1312,13 +1449,6 @@
             <a:prstDash val="solid"/>
           </a:ln>
         </p:spPr>
-        <p:txBody>
-          <a:bodyPr/>
-          <a:lstStyle/>
-          <a:p>
-            <a:endParaRPr lang="ko-KR" altLang="en-US"/>
-          </a:p>
-        </p:txBody>
       </p:sp>
       <p:sp>
         <p:nvSpPr>
@@ -1341,7 +1471,7 @@
           <a:bodyPr wrap="square" lIns="127000" tIns="38100" rIns="127000" bIns="38100" rtlCol="0" anchor="ctr"/>
           <a:lstStyle/>
           <a:p>
-            <a:pPr marL="0" indent="0" algn="l">
+            <a:pPr algn="l" indent="0" marL="0">
               <a:spcAft>
                 <a:spcPts val="100"/>
               </a:spcAft>
@@ -1356,30 +1486,19 @@
                 <a:ea typeface="Pretendard" pitchFamily="34" charset="-122"/>
                 <a:cs typeface="Pretendard" pitchFamily="34" charset="-120"/>
               </a:rPr>
-              <a:t>② </a:t>
-            </a:r>
-            <a:r>
-              <a:rPr lang="en-US" sz="1500" b="1" dirty="0" err="1">
-                <a:solidFill>
-                  <a:srgbClr val="2B3242"/>
-                </a:solidFill>
-                <a:latin typeface="Pretendard" pitchFamily="34" charset="0"/>
-                <a:ea typeface="Pretendard" pitchFamily="34" charset="-122"/>
-                <a:cs typeface="Pretendard" pitchFamily="34" charset="-120"/>
-              </a:rPr>
-              <a:t>메타데이터</a:t>
+              <a:t>② 머리줄 (메타데이터 5칸)</a:t>
             </a:r>
             <a:endParaRPr lang="en-US" sz="1500" dirty="0"/>
           </a:p>
           <a:p>
-            <a:pPr marL="0" indent="0" algn="l">
+            <a:pPr algn="l" indent="0" marL="0">
               <a:spcAft>
                 <a:spcPts val="100"/>
               </a:spcAft>
               <a:buNone/>
             </a:pPr>
             <a:r>
-              <a:rPr lang="ko-KR" altLang="en-US" sz="1400" dirty="0">
+              <a:rPr lang="en-US" sz="1400" dirty="0">
                 <a:solidFill>
                   <a:srgbClr val="2B3242"/>
                 </a:solidFill>
@@ -1387,40 +1506,7 @@
                 <a:ea typeface="Pretendard" pitchFamily="34" charset="-122"/>
                 <a:cs typeface="Pretendard" pitchFamily="34" charset="-120"/>
               </a:rPr>
-              <a:t>예</a:t>
-            </a:r>
-            <a:r>
-              <a:rPr lang="en-US" altLang="ko-KR" sz="1400" dirty="0">
-                <a:solidFill>
-                  <a:srgbClr val="2B3242"/>
-                </a:solidFill>
-                <a:latin typeface="Pretendard" pitchFamily="34" charset="0"/>
-                <a:ea typeface="Pretendard" pitchFamily="34" charset="-122"/>
-                <a:cs typeface="Pretendard" pitchFamily="34" charset="-120"/>
-              </a:rPr>
-              <a:t>: </a:t>
-            </a:r>
-            <a:r>
-              <a:rPr lang="en-US" sz="1400" dirty="0" err="1">
-                <a:solidFill>
-                  <a:srgbClr val="2B3242"/>
-                </a:solidFill>
-                <a:latin typeface="Pretendard" pitchFamily="34" charset="0"/>
-                <a:ea typeface="Pretendard" pitchFamily="34" charset="-122"/>
-                <a:cs typeface="Pretendard" pitchFamily="34" charset="-120"/>
-              </a:rPr>
-              <a:t>record_id</a:t>
-            </a:r>
-            <a:r>
-              <a:rPr lang="en-US" sz="1400" dirty="0">
-                <a:solidFill>
-                  <a:srgbClr val="2B3242"/>
-                </a:solidFill>
-                <a:latin typeface="Pretendard" pitchFamily="34" charset="0"/>
-                <a:ea typeface="Pretendard" pitchFamily="34" charset="-122"/>
-                <a:cs typeface="Pretendard" pitchFamily="34" charset="-120"/>
-              </a:rPr>
-              <a:t>, 상담일, 채널, 주제, 가명 회원 키</a:t>
+              <a:t>record_id, 상담일, 채널, 주제, 가명 회원 키</a:t>
             </a:r>
             <a:endParaRPr lang="en-US" sz="1500" dirty="0"/>
           </a:p>
@@ -1452,13 +1538,6 @@
             <a:prstDash val="solid"/>
           </a:ln>
         </p:spPr>
-        <p:txBody>
-          <a:bodyPr/>
-          <a:lstStyle/>
-          <a:p>
-            <a:endParaRPr lang="ko-KR" altLang="en-US"/>
-          </a:p>
-        </p:txBody>
       </p:sp>
       <p:sp>
         <p:nvSpPr>
@@ -1481,7 +1560,7 @@
           <a:bodyPr wrap="square" lIns="127000" tIns="38100" rIns="127000" bIns="38100" rtlCol="0" anchor="ctr"/>
           <a:lstStyle/>
           <a:p>
-            <a:pPr marL="0" indent="0" algn="l">
+            <a:pPr algn="l" indent="0" marL="0">
               <a:spcAft>
                 <a:spcPts val="100"/>
               </a:spcAft>
@@ -1496,19 +1575,19 @@
                 <a:ea typeface="Pretendard" pitchFamily="34" charset="-122"/>
                 <a:cs typeface="Pretendard" pitchFamily="34" charset="-120"/>
               </a:rPr>
-              <a:t>③ 추출 단위 본문</a:t>
+              <a:t>③ 추출 단위 본문 (K1 결과)</a:t>
             </a:r>
             <a:endParaRPr lang="en-US" sz="1500" dirty="0"/>
           </a:p>
           <a:p>
-            <a:pPr marL="0" indent="0" algn="l">
+            <a:pPr algn="l" indent="0" marL="0">
               <a:spcAft>
                 <a:spcPts val="100"/>
               </a:spcAft>
               <a:buNone/>
             </a:pPr>
             <a:r>
-              <a:rPr lang="ko-KR" altLang="en-US" sz="1400" dirty="0">
+              <a:rPr lang="en-US" sz="1400" dirty="0">
                 <a:solidFill>
                   <a:srgbClr val="2B3242"/>
                 </a:solidFill>
@@ -1516,84 +1595,7 @@
                 <a:ea typeface="Pretendard" pitchFamily="34" charset="-122"/>
                 <a:cs typeface="Pretendard" pitchFamily="34" charset="-120"/>
               </a:rPr>
-              <a:t>예</a:t>
-            </a:r>
-            <a:r>
-              <a:rPr lang="en-US" altLang="ko-KR" sz="1400" dirty="0">
-                <a:solidFill>
-                  <a:srgbClr val="2B3242"/>
-                </a:solidFill>
-                <a:latin typeface="Pretendard" pitchFamily="34" charset="0"/>
-                <a:ea typeface="Pretendard" pitchFamily="34" charset="-122"/>
-                <a:cs typeface="Pretendard" pitchFamily="34" charset="-120"/>
-              </a:rPr>
-              <a:t>: </a:t>
-            </a:r>
-            <a:r>
-              <a:rPr lang="ko-KR" altLang="en-US" sz="1400" dirty="0">
-                <a:solidFill>
-                  <a:srgbClr val="2B3242"/>
-                </a:solidFill>
-                <a:latin typeface="Pretendard" pitchFamily="34" charset="0"/>
-                <a:ea typeface="Pretendard" pitchFamily="34" charset="-122"/>
-                <a:cs typeface="Pretendard" pitchFamily="34" charset="-120"/>
-              </a:rPr>
-              <a:t>조항 </a:t>
-            </a:r>
-            <a:r>
-              <a:rPr lang="en-US" altLang="ko-KR" sz="1400" dirty="0">
-                <a:solidFill>
-                  <a:srgbClr val="2B3242"/>
-                </a:solidFill>
-                <a:latin typeface="Pretendard" pitchFamily="34" charset="0"/>
-                <a:ea typeface="Pretendard" pitchFamily="34" charset="-122"/>
-                <a:cs typeface="Pretendard" pitchFamily="34" charset="-120"/>
-              </a:rPr>
-              <a:t>1</a:t>
-            </a:r>
-            <a:r>
-              <a:rPr lang="ko-KR" altLang="en-US" sz="1400" dirty="0">
-                <a:solidFill>
-                  <a:srgbClr val="2B3242"/>
-                </a:solidFill>
-                <a:latin typeface="Pretendard" pitchFamily="34" charset="0"/>
-                <a:ea typeface="Pretendard" pitchFamily="34" charset="-122"/>
-                <a:cs typeface="Pretendard" pitchFamily="34" charset="-120"/>
-              </a:rPr>
-              <a:t>건</a:t>
-            </a:r>
-            <a:r>
-              <a:rPr lang="en-US" altLang="ko-KR" sz="1400" dirty="0">
-                <a:solidFill>
-                  <a:srgbClr val="2B3242"/>
-                </a:solidFill>
-                <a:latin typeface="Pretendard" pitchFamily="34" charset="0"/>
-                <a:ea typeface="Pretendard" pitchFamily="34" charset="-122"/>
-                <a:cs typeface="Pretendard" pitchFamily="34" charset="-120"/>
-              </a:rPr>
-              <a:t>, </a:t>
-            </a:r>
-            <a:r>
-              <a:rPr lang="en-US" sz="1400" dirty="0" err="1">
-                <a:solidFill>
-                  <a:srgbClr val="2B3242"/>
-                </a:solidFill>
-                <a:latin typeface="Pretendard" pitchFamily="34" charset="0"/>
-                <a:ea typeface="Pretendard" pitchFamily="34" charset="-122"/>
-                <a:cs typeface="Pretendard" pitchFamily="34" charset="-120"/>
-              </a:rPr>
-              <a:t>상담</a:t>
-            </a:r>
-            <a:r>
-              <a:rPr lang="en-US" sz="1400" dirty="0">
-                <a:solidFill>
-                  <a:srgbClr val="2B3242"/>
-                </a:solidFill>
-                <a:latin typeface="Pretendard" pitchFamily="34" charset="0"/>
-                <a:ea typeface="Pretendard" pitchFamily="34" charset="-122"/>
-                <a:cs typeface="Pretendard" pitchFamily="34" charset="-120"/>
-              </a:rPr>
-              <a:t> 1건</a:t>
+              <a:t>상담은 검색용 청크 1개가 곧 단위 1개</a:t>
             </a:r>
             <a:endParaRPr lang="en-US" sz="1500" dirty="0"/>
           </a:p>
@@ -1625,13 +1627,6 @@
             <a:prstDash val="solid"/>
           </a:ln>
         </p:spPr>
-        <p:txBody>
-          <a:bodyPr/>
-          <a:lstStyle/>
-          <a:p>
-            <a:endParaRPr lang="ko-KR" altLang="en-US"/>
-          </a:p>
-        </p:txBody>
       </p:sp>
       <p:sp>
         <p:nvSpPr>
@@ -1654,7 +1649,7 @@
           <a:bodyPr wrap="square" lIns="127000" tIns="38100" rIns="127000" bIns="38100" rtlCol="0" anchor="ctr"/>
           <a:lstStyle/>
           <a:p>
-            <a:pPr marL="0" indent="0" algn="l">
+            <a:pPr algn="l" indent="0" marL="0">
               <a:spcAft>
                 <a:spcPts val="100"/>
               </a:spcAft>
@@ -1669,45 +1664,12 @@
                 <a:ea typeface="Pretendard" pitchFamily="34" charset="-122"/>
                 <a:cs typeface="Pretendard" pitchFamily="34" charset="-120"/>
               </a:rPr>
-              <a:t>④ </a:t>
-            </a:r>
-            <a:r>
-              <a:rPr lang="en-US" sz="1500" b="1" dirty="0" err="1">
-                <a:solidFill>
-                  <a:srgbClr val="2B3242"/>
-                </a:solidFill>
-                <a:latin typeface="Pretendard" pitchFamily="34" charset="0"/>
-                <a:ea typeface="Pretendard" pitchFamily="34" charset="-122"/>
-                <a:cs typeface="Pretendard" pitchFamily="34" charset="-120"/>
-              </a:rPr>
-              <a:t>추출</a:t>
-            </a:r>
-            <a:r>
-              <a:rPr lang="en-US" sz="1500" b="1" dirty="0">
-                <a:solidFill>
-                  <a:srgbClr val="2B3242"/>
-                </a:solidFill>
-                <a:latin typeface="Pretendard" pitchFamily="34" charset="0"/>
-                <a:ea typeface="Pretendard" pitchFamily="34" charset="-122"/>
-                <a:cs typeface="Pretendard" pitchFamily="34" charset="-120"/>
-              </a:rPr>
-              <a:t> </a:t>
-            </a:r>
-            <a:r>
-              <a:rPr lang="en-US" sz="1500" b="1" dirty="0" err="1">
-                <a:solidFill>
-                  <a:srgbClr val="2B3242"/>
-                </a:solidFill>
-                <a:latin typeface="Pretendard" pitchFamily="34" charset="0"/>
-                <a:ea typeface="Pretendard" pitchFamily="34" charset="-122"/>
-                <a:cs typeface="Pretendard" pitchFamily="34" charset="-120"/>
-              </a:rPr>
-              <a:t>지시</a:t>
+              <a:t>④ 추출 지시 (라이브러리 기본)</a:t>
             </a:r>
             <a:endParaRPr lang="en-US" sz="1500" dirty="0"/>
           </a:p>
           <a:p>
-            <a:pPr marL="0" indent="0" algn="l">
+            <a:pPr algn="l" indent="0" marL="0">
               <a:spcAft>
                 <a:spcPts val="100"/>
               </a:spcAft>
@@ -1722,18 +1684,7 @@
                 <a:ea typeface="Pretendard" pitchFamily="34" charset="-122"/>
                 <a:cs typeface="Pretendard" pitchFamily="34" charset="-120"/>
               </a:rPr>
-              <a:t>neo4j-graphrag</a:t>
-            </a:r>
-            <a:r>
-              <a:rPr lang="ko-KR" altLang="en-US" sz="1400" dirty="0">
-                <a:solidFill>
-                  <a:srgbClr val="2B3242"/>
-                </a:solidFill>
-                <a:latin typeface="Pretendard" pitchFamily="34" charset="0"/>
-                <a:ea typeface="Pretendard" pitchFamily="34" charset="-122"/>
-                <a:cs typeface="Pretendard" pitchFamily="34" charset="-120"/>
-              </a:rPr>
-              <a:t>라이브러리의 프롬프트 그대로 사용</a:t>
+              <a:t>JSON으로, 주어진 타입만, 관계 방향 지킴</a:t>
             </a:r>
             <a:endParaRPr lang="en-US" sz="1500" dirty="0"/>
           </a:p>
@@ -1747,8 +1698,8 @@
         </p:nvSpPr>
         <p:spPr>
           <a:xfrm>
-            <a:off x="4989881" y="2514600"/>
-            <a:ext cx="1600200" cy="1828800"/>
+            <a:off x="4989881" y="2377440"/>
+            <a:ext cx="1600200" cy="2103120"/>
           </a:xfrm>
           <a:prstGeom prst="roundRect">
             <a:avLst>
@@ -1760,13 +1711,6 @@
           </a:solidFill>
           <a:ln/>
         </p:spPr>
-        <p:txBody>
-          <a:bodyPr/>
-          <a:lstStyle/>
-          <a:p>
-            <a:endParaRPr lang="ko-KR" altLang="en-US"/>
-          </a:p>
-        </p:txBody>
       </p:sp>
       <p:sp>
         <p:nvSpPr>
@@ -1776,8 +1720,8 @@
         </p:nvSpPr>
         <p:spPr>
           <a:xfrm>
-            <a:off x="4989881" y="2514600"/>
-            <a:ext cx="1600200" cy="1828800"/>
+            <a:off x="4989881" y="2377440"/>
+            <a:ext cx="1600200" cy="2103120"/>
           </a:xfrm>
           <a:prstGeom prst="rect">
             <a:avLst/>
@@ -1789,7 +1733,7 @@
           <a:bodyPr wrap="square" lIns="635" tIns="635" rIns="635" bIns="635" rtlCol="0" anchor="ctr"/>
           <a:lstStyle/>
           <a:p>
-            <a:pPr marL="0" indent="0" algn="ctr">
+            <a:pPr algn="ctr" indent="0" marL="0">
               <a:spcAft>
                 <a:spcPts val="100"/>
               </a:spcAft>
@@ -1809,7 +1753,7 @@
             <a:endParaRPr lang="en-US" sz="2000" dirty="0"/>
           </a:p>
           <a:p>
-            <a:pPr marL="0" indent="0" algn="ctr">
+            <a:pPr algn="ctr" indent="0" marL="0">
               <a:spcAft>
                 <a:spcPts val="100"/>
               </a:spcAft>
@@ -1829,7 +1773,7 @@
             <a:endParaRPr lang="en-US" sz="2000" dirty="0"/>
           </a:p>
           <a:p>
-            <a:pPr marL="0" indent="0" algn="ctr">
+            <a:pPr algn="ctr" indent="0" marL="0">
               <a:spcAft>
                 <a:spcPts val="100"/>
               </a:spcAft>
@@ -1849,7 +1793,7 @@
             <a:endParaRPr lang="en-US" sz="2000" dirty="0"/>
           </a:p>
           <a:p>
-            <a:pPr marL="0" indent="0" algn="ctr">
+            <a:pPr algn="ctr" indent="0" marL="0">
               <a:spcAft>
                 <a:spcPts val="100"/>
               </a:spcAft>
@@ -1865,6 +1809,26 @@
                 <a:cs typeface="Pretendard" pitchFamily="34" charset="-120"/>
               </a:rPr>
               <a:t>단위 하나에 1번</a:t>
+            </a:r>
+            <a:endParaRPr lang="en-US" sz="2000" dirty="0"/>
+          </a:p>
+          <a:p>
+            <a:pPr algn="ctr" indent="0" marL="0">
+              <a:spcAft>
+                <a:spcPts val="100"/>
+              </a:spcAft>
+              <a:buNone/>
+            </a:pPr>
+            <a:r>
+              <a:rPr lang="en-US" sz="1400" dirty="0">
+                <a:solidFill>
+                  <a:srgbClr val="FFFFFF"/>
+                </a:solidFill>
+                <a:latin typeface="Pretendard" pitchFamily="34" charset="0"/>
+                <a:ea typeface="Pretendard" pitchFamily="34" charset="-122"/>
+                <a:cs typeface="Pretendard" pitchFamily="34" charset="-120"/>
+              </a:rPr>
+              <a:t>동시 4건</a:t>
             </a:r>
             <a:endParaRPr lang="en-US" sz="2000" dirty="0"/>
           </a:p>
@@ -1893,13 +1857,6 @@
             <a:tailEnd type="triangle"/>
           </a:ln>
         </p:spPr>
-        <p:txBody>
-          <a:bodyPr/>
-          <a:lstStyle/>
-          <a:p>
-            <a:endParaRPr lang="ko-KR" altLang="en-US"/>
-          </a:p>
-        </p:txBody>
       </p:sp>
       <p:sp>
         <p:nvSpPr>
@@ -1924,13 +1881,6 @@
             <a:tailEnd type="triangle"/>
           </a:ln>
         </p:spPr>
-        <p:txBody>
-          <a:bodyPr/>
-          <a:lstStyle/>
-          <a:p>
-            <a:endParaRPr lang="ko-KR" altLang="en-US"/>
-          </a:p>
-        </p:txBody>
       </p:sp>
       <p:sp>
         <p:nvSpPr>
@@ -1953,13 +1903,6 @@
           </a:solidFill>
           <a:ln/>
         </p:spPr>
-        <p:txBody>
-          <a:bodyPr/>
-          <a:lstStyle/>
-          <a:p>
-            <a:endParaRPr lang="ko-KR" altLang="en-US"/>
-          </a:p>
-        </p:txBody>
       </p:sp>
       <p:sp>
         <p:nvSpPr>
@@ -1982,7 +1925,7 @@
           <a:bodyPr wrap="square" lIns="1016" tIns="1016" rIns="1016" bIns="1016" rtlCol="0" anchor="ctr"/>
           <a:lstStyle/>
           <a:p>
-            <a:pPr marL="0" indent="0" algn="ctr">
+            <a:pPr algn="ctr" indent="0" marL="0">
               <a:buNone/>
             </a:pPr>
             <a:r>
@@ -1994,29 +1937,7 @@
                 <a:ea typeface="Pretendard" pitchFamily="34" charset="-122"/>
                 <a:cs typeface="Pretendard" pitchFamily="34" charset="-120"/>
               </a:rPr>
-              <a:t>나온 그래프 (상담 C-20260501-003 </a:t>
-            </a:r>
-            <a:r>
-              <a:rPr lang="ko-KR" altLang="en-US" sz="1600" b="1" dirty="0">
-                <a:solidFill>
-                  <a:srgbClr val="FFFFFF"/>
-                </a:solidFill>
-                <a:latin typeface="Pretendard" pitchFamily="34" charset="0"/>
-                <a:ea typeface="Pretendard" pitchFamily="34" charset="-122"/>
-                <a:cs typeface="Pretendard" pitchFamily="34" charset="-120"/>
-              </a:rPr>
-              <a:t>예시</a:t>
-            </a:r>
-            <a:r>
-              <a:rPr lang="en-US" sz="1600" b="1" dirty="0">
-                <a:solidFill>
-                  <a:srgbClr val="FFFFFF"/>
-                </a:solidFill>
-                <a:latin typeface="Pretendard" pitchFamily="34" charset="0"/>
-                <a:ea typeface="Pretendard" pitchFamily="34" charset="-122"/>
-                <a:cs typeface="Pretendard" pitchFamily="34" charset="-120"/>
-              </a:rPr>
-              <a:t>)</a:t>
+              <a:t>나온 그래프 (v0 표본 실행, 상담 C-20260501-003)</a:t>
             </a:r>
             <a:endParaRPr lang="en-US" sz="1600" dirty="0"/>
           </a:p>
@@ -2048,13 +1969,6 @@
             <a:prstDash val="solid"/>
           </a:ln>
         </p:spPr>
-        <p:txBody>
-          <a:bodyPr/>
-          <a:lstStyle/>
-          <a:p>
-            <a:endParaRPr lang="ko-KR" altLang="en-US"/>
-          </a:p>
-        </p:txBody>
       </p:sp>
       <p:sp>
         <p:nvSpPr>
@@ -2077,7 +1991,7 @@
           <a:bodyPr wrap="square" lIns="635" tIns="635" rIns="635" bIns="635" rtlCol="0" anchor="ctr"/>
           <a:lstStyle/>
           <a:p>
-            <a:pPr marL="0" indent="0" algn="ctr">
+            <a:pPr algn="ctr" indent="0" marL="0">
               <a:spcAft>
                 <a:spcPts val="100"/>
               </a:spcAft>
@@ -2097,7 +2011,7 @@
             <a:endParaRPr lang="en-US" sz="1400" dirty="0"/>
           </a:p>
           <a:p>
-            <a:pPr marL="0" indent="0" algn="ctr">
+            <a:pPr algn="ctr" indent="0" marL="0">
               <a:spcAft>
                 <a:spcPts val="100"/>
               </a:spcAft>
@@ -2141,13 +2055,6 @@
             <a:tailEnd type="triangle"/>
           </a:ln>
         </p:spPr>
-        <p:txBody>
-          <a:bodyPr/>
-          <a:lstStyle/>
-          <a:p>
-            <a:endParaRPr lang="ko-KR" altLang="en-US"/>
-          </a:p>
-        </p:txBody>
       </p:sp>
       <p:sp>
         <p:nvSpPr>
@@ -2175,13 +2082,6 @@
             <a:prstDash val="solid"/>
           </a:ln>
         </p:spPr>
-        <p:txBody>
-          <a:bodyPr/>
-          <a:lstStyle/>
-          <a:p>
-            <a:endParaRPr lang="ko-KR" altLang="en-US"/>
-          </a:p>
-        </p:txBody>
       </p:sp>
       <p:sp>
         <p:nvSpPr>
@@ -2204,7 +2104,7 @@
           <a:bodyPr wrap="square" lIns="1016" tIns="1016" rIns="1016" bIns="1016" rtlCol="0" anchor="ctr"/>
           <a:lstStyle/>
           <a:p>
-            <a:pPr marL="0" indent="0" algn="ctr">
+            <a:pPr algn="ctr" indent="0" marL="0">
               <a:buNone/>
             </a:pPr>
             <a:r>
@@ -2245,13 +2145,6 @@
             <a:tailEnd type="triangle"/>
           </a:ln>
         </p:spPr>
-        <p:txBody>
-          <a:bodyPr/>
-          <a:lstStyle/>
-          <a:p>
-            <a:endParaRPr lang="ko-KR" altLang="en-US"/>
-          </a:p>
-        </p:txBody>
       </p:sp>
       <p:sp>
         <p:nvSpPr>
@@ -2279,13 +2172,6 @@
             <a:prstDash val="solid"/>
           </a:ln>
         </p:spPr>
-        <p:txBody>
-          <a:bodyPr/>
-          <a:lstStyle/>
-          <a:p>
-            <a:endParaRPr lang="ko-KR" altLang="en-US"/>
-          </a:p>
-        </p:txBody>
       </p:sp>
       <p:sp>
         <p:nvSpPr>
@@ -2308,7 +2194,7 @@
           <a:bodyPr wrap="square" lIns="635" tIns="635" rIns="635" bIns="635" rtlCol="0" anchor="ctr"/>
           <a:lstStyle/>
           <a:p>
-            <a:pPr marL="0" indent="0" algn="ctr">
+            <a:pPr algn="ctr" indent="0" marL="0">
               <a:spcAft>
                 <a:spcPts val="100"/>
               </a:spcAft>
@@ -2328,7 +2214,7 @@
             <a:endParaRPr lang="en-US" sz="1400" dirty="0"/>
           </a:p>
           <a:p>
-            <a:pPr marL="0" indent="0" algn="ctr">
+            <a:pPr algn="ctr" indent="0" marL="0">
               <a:spcAft>
                 <a:spcPts val="100"/>
               </a:spcAft>
@@ -2375,13 +2261,6 @@
             <a:prstDash val="solid"/>
           </a:ln>
         </p:spPr>
-        <p:txBody>
-          <a:bodyPr/>
-          <a:lstStyle/>
-          <a:p>
-            <a:endParaRPr lang="ko-KR" altLang="en-US"/>
-          </a:p>
-        </p:txBody>
       </p:sp>
       <p:sp>
         <p:nvSpPr>
@@ -2404,7 +2283,7 @@
           <a:bodyPr wrap="square" lIns="635" tIns="635" rIns="635" bIns="635" rtlCol="0" anchor="ctr"/>
           <a:lstStyle/>
           <a:p>
-            <a:pPr marL="0" indent="0" algn="ctr">
+            <a:pPr algn="ctr" indent="0" marL="0">
               <a:spcAft>
                 <a:spcPts val="100"/>
               </a:spcAft>
@@ -2424,7 +2303,7 @@
             <a:endParaRPr lang="en-US" sz="1400" dirty="0"/>
           </a:p>
           <a:p>
-            <a:pPr marL="0" indent="0" algn="ctr">
+            <a:pPr algn="ctr" indent="0" marL="0">
               <a:spcAft>
                 <a:spcPts val="100"/>
               </a:spcAft>
@@ -2468,13 +2347,6 @@
             <a:tailEnd type="triangle"/>
           </a:ln>
         </p:spPr>
-        <p:txBody>
-          <a:bodyPr/>
-          <a:lstStyle/>
-          <a:p>
-            <a:endParaRPr lang="ko-KR" altLang="en-US"/>
-          </a:p>
-        </p:txBody>
       </p:sp>
       <p:sp>
         <p:nvSpPr>
@@ -2502,13 +2374,6 @@
             <a:prstDash val="solid"/>
           </a:ln>
         </p:spPr>
-        <p:txBody>
-          <a:bodyPr/>
-          <a:lstStyle/>
-          <a:p>
-            <a:endParaRPr lang="ko-KR" altLang="en-US"/>
-          </a:p>
-        </p:txBody>
       </p:sp>
       <p:sp>
         <p:nvSpPr>
@@ -2531,7 +2396,7 @@
           <a:bodyPr wrap="square" lIns="1016" tIns="1016" rIns="1016" bIns="1016" rtlCol="0" anchor="ctr"/>
           <a:lstStyle/>
           <a:p>
-            <a:pPr marL="0" indent="0" algn="ctr">
+            <a:pPr algn="ctr" indent="0" marL="0">
               <a:buNone/>
             </a:pPr>
             <a:r>
@@ -2572,13 +2437,6 @@
             <a:tailEnd type="triangle"/>
           </a:ln>
         </p:spPr>
-        <p:txBody>
-          <a:bodyPr/>
-          <a:lstStyle/>
-          <a:p>
-            <a:endParaRPr lang="ko-KR" altLang="en-US"/>
-          </a:p>
-        </p:txBody>
       </p:sp>
       <p:sp>
         <p:nvSpPr>
@@ -2606,13 +2464,6 @@
             <a:prstDash val="solid"/>
           </a:ln>
         </p:spPr>
-        <p:txBody>
-          <a:bodyPr/>
-          <a:lstStyle/>
-          <a:p>
-            <a:endParaRPr lang="ko-KR" altLang="en-US"/>
-          </a:p>
-        </p:txBody>
       </p:sp>
       <p:sp>
         <p:nvSpPr>
@@ -2635,7 +2486,7 @@
           <a:bodyPr wrap="square" lIns="635" tIns="635" rIns="635" bIns="635" rtlCol="0" anchor="ctr"/>
           <a:lstStyle/>
           <a:p>
-            <a:pPr marL="0" indent="0" algn="ctr">
+            <a:pPr algn="ctr" indent="0" marL="0">
               <a:spcAft>
                 <a:spcPts val="100"/>
               </a:spcAft>
@@ -2655,7 +2506,7 @@
             <a:endParaRPr lang="en-US" sz="1400" dirty="0"/>
           </a:p>
           <a:p>
-            <a:pPr marL="0" indent="0" algn="ctr">
+            <a:pPr algn="ctr" indent="0" marL="0">
               <a:spcAft>
                 <a:spcPts val="100"/>
               </a:spcAft>
@@ -2702,13 +2553,6 @@
             <a:prstDash val="solid"/>
           </a:ln>
         </p:spPr>
-        <p:txBody>
-          <a:bodyPr/>
-          <a:lstStyle/>
-          <a:p>
-            <a:endParaRPr lang="ko-KR" altLang="en-US"/>
-          </a:p>
-        </p:txBody>
       </p:sp>
       <p:sp>
         <p:nvSpPr>
@@ -2731,7 +2575,7 @@
           <a:bodyPr wrap="square" lIns="635" tIns="635" rIns="635" bIns="635" rtlCol="0" anchor="ctr"/>
           <a:lstStyle/>
           <a:p>
-            <a:pPr marL="0" indent="0" algn="ctr">
+            <a:pPr algn="ctr" indent="0" marL="0">
               <a:spcAft>
                 <a:spcPts val="100"/>
               </a:spcAft>
@@ -2751,7 +2595,7 @@
             <a:endParaRPr lang="en-US" sz="1400" dirty="0"/>
           </a:p>
           <a:p>
-            <a:pPr marL="0" indent="0" algn="ctr">
+            <a:pPr algn="ctr" indent="0" marL="0">
               <a:spcAft>
                 <a:spcPts val="100"/>
               </a:spcAft>
@@ -2795,13 +2639,6 @@
             <a:tailEnd type="triangle"/>
           </a:ln>
         </p:spPr>
-        <p:txBody>
-          <a:bodyPr/>
-          <a:lstStyle/>
-          <a:p>
-            <a:endParaRPr lang="ko-KR" altLang="en-US"/>
-          </a:p>
-        </p:txBody>
       </p:sp>
       <p:sp>
         <p:nvSpPr>
@@ -2829,13 +2666,6 @@
             <a:prstDash val="solid"/>
           </a:ln>
         </p:spPr>
-        <p:txBody>
-          <a:bodyPr/>
-          <a:lstStyle/>
-          <a:p>
-            <a:endParaRPr lang="ko-KR" altLang="en-US"/>
-          </a:p>
-        </p:txBody>
       </p:sp>
       <p:sp>
         <p:nvSpPr>
@@ -2858,7 +2688,7 @@
           <a:bodyPr wrap="square" lIns="1016" tIns="1016" rIns="1016" bIns="1016" rtlCol="0" anchor="ctr"/>
           <a:lstStyle/>
           <a:p>
-            <a:pPr marL="0" indent="0" algn="ctr">
+            <a:pPr algn="ctr" indent="0" marL="0">
               <a:buNone/>
             </a:pPr>
             <a:r>
@@ -2899,13 +2729,6 @@
             <a:tailEnd type="triangle"/>
           </a:ln>
         </p:spPr>
-        <p:txBody>
-          <a:bodyPr/>
-          <a:lstStyle/>
-          <a:p>
-            <a:endParaRPr lang="ko-KR" altLang="en-US"/>
-          </a:p>
-        </p:txBody>
       </p:sp>
       <p:sp>
         <p:nvSpPr>
@@ -2933,13 +2756,6 @@
             <a:prstDash val="solid"/>
           </a:ln>
         </p:spPr>
-        <p:txBody>
-          <a:bodyPr/>
-          <a:lstStyle/>
-          <a:p>
-            <a:endParaRPr lang="ko-KR" altLang="en-US"/>
-          </a:p>
-        </p:txBody>
       </p:sp>
       <p:sp>
         <p:nvSpPr>
@@ -2962,7 +2778,7 @@
           <a:bodyPr wrap="square" lIns="635" tIns="635" rIns="635" bIns="635" rtlCol="0" anchor="ctr"/>
           <a:lstStyle/>
           <a:p>
-            <a:pPr marL="0" indent="0" algn="ctr">
+            <a:pPr algn="ctr" indent="0" marL="0">
               <a:spcAft>
                 <a:spcPts val="100"/>
               </a:spcAft>
@@ -2982,7 +2798,7 @@
             <a:endParaRPr lang="en-US" sz="1400" dirty="0"/>
           </a:p>
           <a:p>
-            <a:pPr marL="0" indent="0" algn="ctr">
+            <a:pPr algn="ctr" indent="0" marL="0">
               <a:spcAft>
                 <a:spcPts val="100"/>
               </a:spcAft>
@@ -3029,13 +2845,6 @@
             <a:prstDash val="solid"/>
           </a:ln>
         </p:spPr>
-        <p:txBody>
-          <a:bodyPr/>
-          <a:lstStyle/>
-          <a:p>
-            <a:endParaRPr lang="ko-KR" altLang="en-US"/>
-          </a:p>
-        </p:txBody>
       </p:sp>
       <p:sp>
         <p:nvSpPr>
@@ -3058,7 +2867,7 @@
           <a:bodyPr wrap="square" lIns="635" tIns="635" rIns="635" bIns="635" rtlCol="0" anchor="ctr"/>
           <a:lstStyle/>
           <a:p>
-            <a:pPr marL="0" indent="0" algn="ctr">
+            <a:pPr algn="ctr" indent="0" marL="0">
               <a:spcAft>
                 <a:spcPts val="100"/>
               </a:spcAft>
@@ -3078,7 +2887,7 @@
             <a:endParaRPr lang="en-US" sz="1400" dirty="0"/>
           </a:p>
           <a:p>
-            <a:pPr marL="0" indent="0" algn="ctr">
+            <a:pPr algn="ctr" indent="0" marL="0">
               <a:spcAft>
                 <a:spcPts val="100"/>
               </a:spcAft>
@@ -3122,13 +2931,6 @@
             <a:tailEnd type="triangle"/>
           </a:ln>
         </p:spPr>
-        <p:txBody>
-          <a:bodyPr/>
-          <a:lstStyle/>
-          <a:p>
-            <a:endParaRPr lang="ko-KR" altLang="en-US"/>
-          </a:p>
-        </p:txBody>
       </p:sp>
       <p:sp>
         <p:nvSpPr>
@@ -3156,13 +2958,6 @@
             <a:prstDash val="solid"/>
           </a:ln>
         </p:spPr>
-        <p:txBody>
-          <a:bodyPr/>
-          <a:lstStyle/>
-          <a:p>
-            <a:endParaRPr lang="ko-KR" altLang="en-US"/>
-          </a:p>
-        </p:txBody>
       </p:sp>
       <p:sp>
         <p:nvSpPr>
@@ -3185,7 +2980,7 @@
           <a:bodyPr wrap="square" lIns="1016" tIns="1016" rIns="1016" bIns="1016" rtlCol="0" anchor="ctr"/>
           <a:lstStyle/>
           <a:p>
-            <a:pPr marL="0" indent="0" algn="ctr">
+            <a:pPr algn="ctr" indent="0" marL="0">
               <a:buNone/>
             </a:pPr>
             <a:r>
@@ -3226,13 +3021,6 @@
             <a:tailEnd type="triangle"/>
           </a:ln>
         </p:spPr>
-        <p:txBody>
-          <a:bodyPr/>
-          <a:lstStyle/>
-          <a:p>
-            <a:endParaRPr lang="ko-KR" altLang="en-US"/>
-          </a:p>
-        </p:txBody>
       </p:sp>
       <p:sp>
         <p:nvSpPr>
@@ -3260,13 +3048,6 @@
             <a:prstDash val="solid"/>
           </a:ln>
         </p:spPr>
-        <p:txBody>
-          <a:bodyPr/>
-          <a:lstStyle/>
-          <a:p>
-            <a:endParaRPr lang="ko-KR" altLang="en-US"/>
-          </a:p>
-        </p:txBody>
       </p:sp>
       <p:sp>
         <p:nvSpPr>
@@ -3289,7 +3070,7 @@
           <a:bodyPr wrap="square" lIns="635" tIns="635" rIns="635" bIns="635" rtlCol="0" anchor="ctr"/>
           <a:lstStyle/>
           <a:p>
-            <a:pPr marL="0" indent="0" algn="ctr">
+            <a:pPr algn="ctr" indent="0" marL="0">
               <a:spcAft>
                 <a:spcPts val="100"/>
               </a:spcAft>
@@ -3309,7 +3090,7 @@
             <a:endParaRPr lang="en-US" sz="1400" dirty="0"/>
           </a:p>
           <a:p>
-            <a:pPr marL="0" indent="0" algn="ctr">
+            <a:pPr algn="ctr" indent="0" marL="0">
               <a:spcAft>
                 <a:spcPts val="100"/>
               </a:spcAft>
@@ -3339,11 +3120,11 @@
         <p:spPr>
           <a:xfrm>
             <a:off x="509321" y="4937760"/>
-            <a:ext cx="3268980" cy="960120"/>
+            <a:ext cx="3268980" cy="1097280"/>
           </a:xfrm>
           <a:prstGeom prst="roundRect">
             <a:avLst>
-              <a:gd name="adj" fmla="val 7619"/>
+              <a:gd name="adj" fmla="val 6667"/>
             </a:avLst>
           </a:prstGeom>
           <a:solidFill>
@@ -3356,13 +3137,6 @@
             <a:prstDash val="solid"/>
           </a:ln>
         </p:spPr>
-        <p:txBody>
-          <a:bodyPr/>
-          <a:lstStyle/>
-          <a:p>
-            <a:endParaRPr lang="ko-KR" altLang="en-US"/>
-          </a:p>
-        </p:txBody>
       </p:sp>
       <p:sp>
         <p:nvSpPr>
@@ -3385,13 +3159,6 @@
           </a:solidFill>
           <a:ln/>
         </p:spPr>
-        <p:txBody>
-          <a:bodyPr/>
-          <a:lstStyle/>
-          <a:p>
-            <a:endParaRPr lang="ko-KR" altLang="en-US"/>
-          </a:p>
-        </p:txBody>
       </p:sp>
       <p:sp>
         <p:nvSpPr>
@@ -3414,7 +3181,7 @@
           <a:bodyPr wrap="square" lIns="1016" tIns="1016" rIns="1016" bIns="1016" rtlCol="0" anchor="ctr"/>
           <a:lstStyle/>
           <a:p>
-            <a:pPr marL="0" indent="0" algn="ctr">
+            <a:pPr algn="ctr" indent="0" marL="0">
               <a:buNone/>
             </a:pPr>
             <a:r>
@@ -3453,7 +3220,7 @@
           <a:bodyPr wrap="square" lIns="762" tIns="762" rIns="762" bIns="762" rtlCol="0" anchor="ctr"/>
           <a:lstStyle/>
           <a:p>
-            <a:pPr marL="0" indent="0" algn="l">
+            <a:pPr algn="l" indent="0" marL="0">
               <a:buNone/>
             </a:pPr>
             <a:r>
@@ -3465,7 +3232,7 @@
                 <a:ea typeface="Pretendard" pitchFamily="34" charset="-122"/>
                 <a:cs typeface="Pretendard" pitchFamily="34" charset="-120"/>
               </a:rPr>
-              <a:t>형식 오류는 다시</a:t>
+              <a:t>같은 본문은 다시 묻지 않음</a:t>
             </a:r>
             <a:endParaRPr lang="en-US" sz="1500" dirty="0"/>
           </a:p>
@@ -3480,7 +3247,7 @@
         <p:spPr>
           <a:xfrm>
             <a:off x="646481" y="5431536"/>
-            <a:ext cx="2994660" cy="420624"/>
+            <a:ext cx="2994660" cy="548640"/>
           </a:xfrm>
           <a:prstGeom prst="rect">
             <a:avLst/>
@@ -3489,10 +3256,10 @@
           <a:ln/>
         </p:spPr>
         <p:txBody>
-          <a:bodyPr wrap="square" lIns="762" tIns="762" rIns="762" bIns="762" rtlCol="0" anchor="ctr"/>
+          <a:bodyPr wrap="square" lIns="762" tIns="762" rIns="762" bIns="762" rtlCol="0" anchor="t"/>
           <a:lstStyle/>
           <a:p>
-            <a:pPr marL="0" indent="0" algn="l">
+            <a:pPr algn="l" indent="0" marL="0">
               <a:buNone/>
             </a:pPr>
             <a:r>
@@ -3504,7 +3271,7 @@
                 <a:ea typeface="Pretendard" pitchFamily="34" charset="-122"/>
                 <a:cs typeface="Pretendard" pitchFamily="34" charset="-120"/>
               </a:rPr>
-              <a:t>같은 입력으로 2번까지 다시 물음</a:t>
+              <a:t>본문 해시와 스키마 지문이 같으면 앞 결과를 씀</a:t>
             </a:r>
             <a:endParaRPr lang="en-US" sz="1400" dirty="0"/>
           </a:p>
@@ -3519,11 +3286,11 @@
         <p:spPr>
           <a:xfrm>
             <a:off x="3961181" y="4937760"/>
-            <a:ext cx="3268980" cy="960120"/>
+            <a:ext cx="3268980" cy="1097280"/>
           </a:xfrm>
           <a:prstGeom prst="roundRect">
             <a:avLst>
-              <a:gd name="adj" fmla="val 7619"/>
+              <a:gd name="adj" fmla="val 6667"/>
             </a:avLst>
           </a:prstGeom>
           <a:solidFill>
@@ -3536,13 +3303,6 @@
             <a:prstDash val="solid"/>
           </a:ln>
         </p:spPr>
-        <p:txBody>
-          <a:bodyPr/>
-          <a:lstStyle/>
-          <a:p>
-            <a:endParaRPr lang="ko-KR" altLang="en-US"/>
-          </a:p>
-        </p:txBody>
       </p:sp>
       <p:sp>
         <p:nvSpPr>
@@ -3565,13 +3325,6 @@
           </a:solidFill>
           <a:ln/>
         </p:spPr>
-        <p:txBody>
-          <a:bodyPr/>
-          <a:lstStyle/>
-          <a:p>
-            <a:endParaRPr lang="ko-KR" altLang="en-US"/>
-          </a:p>
-        </p:txBody>
       </p:sp>
       <p:sp>
         <p:nvSpPr>
@@ -3594,7 +3347,7 @@
           <a:bodyPr wrap="square" lIns="1016" tIns="1016" rIns="1016" bIns="1016" rtlCol="0" anchor="ctr"/>
           <a:lstStyle/>
           <a:p>
-            <a:pPr marL="0" indent="0" algn="ctr">
+            <a:pPr algn="ctr" indent="0" marL="0">
               <a:buNone/>
             </a:pPr>
             <a:r>
@@ -3633,7 +3386,7 @@
           <a:bodyPr wrap="square" lIns="762" tIns="762" rIns="762" bIns="762" rtlCol="0" anchor="ctr"/>
           <a:lstStyle/>
           <a:p>
-            <a:pPr marL="0" indent="0" algn="l">
+            <a:pPr algn="l" indent="0" marL="0">
               <a:buNone/>
             </a:pPr>
             <a:r>
@@ -3645,7 +3398,7 @@
                 <a:ea typeface="Pretendard" pitchFamily="34" charset="-122"/>
                 <a:cs typeface="Pretendard" pitchFamily="34" charset="-120"/>
               </a:rPr>
-              <a:t>한 건 실패는 기록하고 계속</a:t>
+              <a:t>형식 오류는 다시</a:t>
             </a:r>
             <a:endParaRPr lang="en-US" sz="1500" dirty="0"/>
           </a:p>
@@ -3660,7 +3413,7 @@
         <p:spPr>
           <a:xfrm>
             <a:off x="4098341" y="5431536"/>
-            <a:ext cx="2994660" cy="420624"/>
+            <a:ext cx="2994660" cy="548640"/>
           </a:xfrm>
           <a:prstGeom prst="rect">
             <a:avLst/>
@@ -3669,10 +3422,10 @@
           <a:ln/>
         </p:spPr>
         <p:txBody>
-          <a:bodyPr wrap="square" lIns="762" tIns="762" rIns="762" bIns="762" rtlCol="0" anchor="ctr"/>
+          <a:bodyPr wrap="square" lIns="762" tIns="762" rIns="762" bIns="762" rtlCol="0" anchor="t"/>
           <a:lstStyle/>
           <a:p>
-            <a:pPr marL="0" indent="0" algn="l">
+            <a:pPr algn="l" indent="0" marL="0">
               <a:buNone/>
             </a:pPr>
             <a:r>
@@ -3684,7 +3437,7 @@
                 <a:ea typeface="Pretendard" pitchFamily="34" charset="-122"/>
                 <a:cs typeface="Pretendard" pitchFamily="34" charset="-120"/>
               </a:rPr>
-              <a:t>나머지 단위는 그대로 진행 (동시 4건)</a:t>
+              <a:t>같은 입력으로 2번까지 다시 물음</a:t>
             </a:r>
             <a:endParaRPr lang="en-US" sz="1400" dirty="0"/>
           </a:p>
@@ -3699,11 +3452,11 @@
         <p:spPr>
           <a:xfrm>
             <a:off x="7413041" y="4937760"/>
-            <a:ext cx="3268980" cy="960120"/>
+            <a:ext cx="3268980" cy="1097280"/>
           </a:xfrm>
           <a:prstGeom prst="roundRect">
             <a:avLst>
-              <a:gd name="adj" fmla="val 7619"/>
+              <a:gd name="adj" fmla="val 6667"/>
             </a:avLst>
           </a:prstGeom>
           <a:solidFill>
@@ -3716,13 +3469,6 @@
             <a:prstDash val="solid"/>
           </a:ln>
         </p:spPr>
-        <p:txBody>
-          <a:bodyPr/>
-          <a:lstStyle/>
-          <a:p>
-            <a:endParaRPr lang="ko-KR" altLang="en-US"/>
-          </a:p>
-        </p:txBody>
       </p:sp>
       <p:sp>
         <p:nvSpPr>
@@ -3745,13 +3491,6 @@
           </a:solidFill>
           <a:ln/>
         </p:spPr>
-        <p:txBody>
-          <a:bodyPr/>
-          <a:lstStyle/>
-          <a:p>
-            <a:endParaRPr lang="ko-KR" altLang="en-US"/>
-          </a:p>
-        </p:txBody>
       </p:sp>
       <p:sp>
         <p:nvSpPr>
@@ -3774,7 +3513,7 @@
           <a:bodyPr wrap="square" lIns="1016" tIns="1016" rIns="1016" bIns="1016" rtlCol="0" anchor="ctr"/>
           <a:lstStyle/>
           <a:p>
-            <a:pPr marL="0" indent="0" algn="ctr">
+            <a:pPr algn="ctr" indent="0" marL="0">
               <a:buNone/>
             </a:pPr>
             <a:r>
@@ -3813,7 +3552,7 @@
           <a:bodyPr wrap="square" lIns="762" tIns="762" rIns="762" bIns="762" rtlCol="0" anchor="ctr"/>
           <a:lstStyle/>
           <a:p>
-            <a:pPr marL="0" indent="0" algn="l">
+            <a:pPr algn="l" indent="0" marL="0">
               <a:buNone/>
             </a:pPr>
             <a:r>
@@ -3825,62 +3564,7 @@
                 <a:ea typeface="Pretendard" pitchFamily="34" charset="-122"/>
                 <a:cs typeface="Pretendard" pitchFamily="34" charset="-120"/>
               </a:rPr>
-              <a:t>노드 </a:t>
-            </a:r>
-            <a:r>
-              <a:rPr lang="en-US" sz="1500" b="1" dirty="0" err="1">
-                <a:solidFill>
-                  <a:srgbClr val="1E2A5C"/>
-                </a:solidFill>
-                <a:latin typeface="Pretendard" pitchFamily="34" charset="0"/>
-                <a:ea typeface="Pretendard" pitchFamily="34" charset="-122"/>
-                <a:cs typeface="Pretendard" pitchFamily="34" charset="-120"/>
-              </a:rPr>
-              <a:t>ID에</a:t>
-            </a:r>
-            <a:r>
-              <a:rPr lang="en-US" sz="1500" b="1" dirty="0">
-                <a:solidFill>
-                  <a:srgbClr val="1E2A5C"/>
-                </a:solidFill>
-                <a:latin typeface="Pretendard" pitchFamily="34" charset="0"/>
-                <a:ea typeface="Pretendard" pitchFamily="34" charset="-122"/>
-                <a:cs typeface="Pretendard" pitchFamily="34" charset="-120"/>
-              </a:rPr>
-              <a:t> </a:t>
-            </a:r>
-            <a:r>
-              <a:rPr lang="ko-KR" altLang="en-US" sz="1500" b="1" dirty="0">
-                <a:solidFill>
-                  <a:srgbClr val="1E2A5C"/>
-                </a:solidFill>
-                <a:latin typeface="Pretendard" pitchFamily="34" charset="0"/>
-                <a:ea typeface="Pretendard" pitchFamily="34" charset="-122"/>
-                <a:cs typeface="Pretendard" pitchFamily="34" charset="-120"/>
-              </a:rPr>
-              <a:t>추출</a:t>
-            </a:r>
-            <a:r>
-              <a:rPr lang="en-US" sz="1500" b="1" dirty="0" err="1">
-                <a:solidFill>
-                  <a:srgbClr val="1E2A5C"/>
-                </a:solidFill>
-                <a:latin typeface="Pretendard" pitchFamily="34" charset="0"/>
-                <a:ea typeface="Pretendard" pitchFamily="34" charset="-122"/>
-                <a:cs typeface="Pretendard" pitchFamily="34" charset="-120"/>
-              </a:rPr>
-              <a:t>단위</a:t>
-            </a:r>
-            <a:r>
-              <a:rPr lang="en-US" sz="1500" b="1" dirty="0">
-                <a:solidFill>
-                  <a:srgbClr val="1E2A5C"/>
-                </a:solidFill>
-                <a:latin typeface="Pretendard" pitchFamily="34" charset="0"/>
-                <a:ea typeface="Pretendard" pitchFamily="34" charset="-122"/>
-                <a:cs typeface="Pretendard" pitchFamily="34" charset="-120"/>
-              </a:rPr>
-              <a:t> ID가 붙음</a:t>
+              <a:t>실패는 기록하고 계속</a:t>
             </a:r>
             <a:endParaRPr lang="en-US" sz="1500" dirty="0"/>
           </a:p>
@@ -3895,7 +3579,7 @@
         <p:spPr>
           <a:xfrm>
             <a:off x="7550201" y="5431536"/>
-            <a:ext cx="2994660" cy="420624"/>
+            <a:ext cx="2994660" cy="548640"/>
           </a:xfrm>
           <a:prstGeom prst="rect">
             <a:avLst/>
@@ -3904,10 +3588,10 @@
           <a:ln/>
         </p:spPr>
         <p:txBody>
-          <a:bodyPr wrap="square" lIns="762" tIns="762" rIns="762" bIns="762" rtlCol="0" anchor="ctr"/>
+          <a:bodyPr wrap="square" lIns="762" tIns="762" rIns="762" bIns="762" rtlCol="0" anchor="t"/>
           <a:lstStyle/>
           <a:p>
-            <a:pPr marL="0" indent="0" algn="l">
+            <a:pPr algn="l" indent="0" marL="0">
               <a:buNone/>
             </a:pPr>
             <a:r>
@@ -3919,7 +3603,7 @@
                 <a:ea typeface="Pretendard" pitchFamily="34" charset="-122"/>
                 <a:cs typeface="Pretendard" pitchFamily="34" charset="-120"/>
               </a:rPr>
-              <a:t>K4에서 검색용 청크와 이을 때 씀</a:t>
+              <a:t>failed_units에 남기고 나머지 단위는 진행</a:t>
             </a:r>
             <a:endParaRPr lang="en-US" sz="1400" dirty="0"/>
           </a:p>
@@ -3934,11 +3618,11 @@
         <p:spPr>
           <a:xfrm>
             <a:off x="10864901" y="4937760"/>
-            <a:ext cx="3268980" cy="960120"/>
+            <a:ext cx="3268980" cy="1097280"/>
           </a:xfrm>
           <a:prstGeom prst="roundRect">
             <a:avLst>
-              <a:gd name="adj" fmla="val 7619"/>
+              <a:gd name="adj" fmla="val 6667"/>
             </a:avLst>
           </a:prstGeom>
           <a:solidFill>
@@ -3951,13 +3635,6 @@
             <a:prstDash val="solid"/>
           </a:ln>
         </p:spPr>
-        <p:txBody>
-          <a:bodyPr/>
-          <a:lstStyle/>
-          <a:p>
-            <a:endParaRPr lang="ko-KR" altLang="en-US"/>
-          </a:p>
-        </p:txBody>
       </p:sp>
       <p:sp>
         <p:nvSpPr>
@@ -3980,13 +3657,6 @@
           </a:solidFill>
           <a:ln/>
         </p:spPr>
-        <p:txBody>
-          <a:bodyPr/>
-          <a:lstStyle/>
-          <a:p>
-            <a:endParaRPr lang="ko-KR" altLang="en-US"/>
-          </a:p>
-        </p:txBody>
       </p:sp>
       <p:sp>
         <p:nvSpPr>
@@ -4009,7 +3679,7 @@
           <a:bodyPr wrap="square" lIns="1016" tIns="1016" rIns="1016" bIns="1016" rtlCol="0" anchor="ctr"/>
           <a:lstStyle/>
           <a:p>
-            <a:pPr marL="0" indent="0" algn="ctr">
+            <a:pPr algn="ctr" indent="0" marL="0">
               <a:buNone/>
             </a:pPr>
             <a:r>
@@ -4048,7 +3718,7 @@
           <a:bodyPr wrap="square" lIns="762" tIns="762" rIns="762" bIns="762" rtlCol="0" anchor="ctr"/>
           <a:lstStyle/>
           <a:p>
-            <a:pPr marL="0" indent="0" algn="l">
+            <a:pPr algn="l" indent="0" marL="0">
               <a:buNone/>
             </a:pPr>
             <a:r>
@@ -4060,84 +3730,7 @@
                 <a:ea typeface="Pretendard" pitchFamily="34" charset="-122"/>
                 <a:cs typeface="Pretendard" pitchFamily="34" charset="-120"/>
               </a:rPr>
-              <a:t>스키마 </a:t>
-            </a:r>
-            <a:r>
-              <a:rPr lang="en-US" sz="1500" b="1" dirty="0" err="1">
-                <a:solidFill>
-                  <a:srgbClr val="1E2A5C"/>
-                </a:solidFill>
-                <a:latin typeface="Pretendard" pitchFamily="34" charset="0"/>
-                <a:ea typeface="Pretendard" pitchFamily="34" charset="-122"/>
-                <a:cs typeface="Pretendard" pitchFamily="34" charset="-120"/>
-              </a:rPr>
-              <a:t>밖은</a:t>
-            </a:r>
-            <a:r>
-              <a:rPr lang="en-US" sz="1500" b="1" dirty="0">
-                <a:solidFill>
-                  <a:srgbClr val="1E2A5C"/>
-                </a:solidFill>
-                <a:latin typeface="Pretendard" pitchFamily="34" charset="0"/>
-                <a:ea typeface="Pretendard" pitchFamily="34" charset="-122"/>
-                <a:cs typeface="Pretendard" pitchFamily="34" charset="-120"/>
-              </a:rPr>
-              <a:t> K3(</a:t>
-            </a:r>
-            <a:r>
-              <a:rPr lang="ko-KR" altLang="en-US" sz="1500" b="1" dirty="0">
-                <a:solidFill>
-                  <a:srgbClr val="1E2A5C"/>
-                </a:solidFill>
-                <a:latin typeface="Pretendard" pitchFamily="34" charset="0"/>
-                <a:ea typeface="Pretendard" pitchFamily="34" charset="-122"/>
-                <a:cs typeface="Pretendard" pitchFamily="34" charset="-120"/>
-              </a:rPr>
-              <a:t>가지치기</a:t>
-            </a:r>
-            <a:r>
-              <a:rPr lang="en-US" altLang="ko-KR" sz="1500" b="1" dirty="0">
-                <a:solidFill>
-                  <a:srgbClr val="1E2A5C"/>
-                </a:solidFill>
-                <a:latin typeface="Pretendard" pitchFamily="34" charset="0"/>
-                <a:ea typeface="Pretendard" pitchFamily="34" charset="-122"/>
-                <a:cs typeface="Pretendard" pitchFamily="34" charset="-120"/>
-              </a:rPr>
-              <a:t>)</a:t>
-            </a:r>
-            <a:r>
-              <a:rPr lang="ko-KR" altLang="en-US" sz="1500" b="1" dirty="0">
-                <a:solidFill>
-                  <a:srgbClr val="1E2A5C"/>
-                </a:solidFill>
-                <a:latin typeface="Pretendard" pitchFamily="34" charset="0"/>
-                <a:ea typeface="Pretendard" pitchFamily="34" charset="-122"/>
-                <a:cs typeface="Pretendard" pitchFamily="34" charset="-120"/>
-              </a:rPr>
-              <a:t>단계</a:t>
-            </a:r>
-            <a:r>
-              <a:rPr lang="en-US" sz="1500" b="1" dirty="0" err="1">
-                <a:solidFill>
-                  <a:srgbClr val="1E2A5C"/>
-                </a:solidFill>
-                <a:latin typeface="Pretendard" pitchFamily="34" charset="0"/>
-                <a:ea typeface="Pretendard" pitchFamily="34" charset="-122"/>
-                <a:cs typeface="Pretendard" pitchFamily="34" charset="-120"/>
-              </a:rPr>
-              <a:t>에서</a:t>
-            </a:r>
-            <a:r>
-              <a:rPr lang="en-US" sz="1500" b="1" dirty="0">
-                <a:solidFill>
-                  <a:srgbClr val="1E2A5C"/>
-                </a:solidFill>
-                <a:latin typeface="Pretendard" pitchFamily="34" charset="0"/>
-                <a:ea typeface="Pretendard" pitchFamily="34" charset="-122"/>
-                <a:cs typeface="Pretendard" pitchFamily="34" charset="-120"/>
-              </a:rPr>
-              <a:t> 지움</a:t>
+              <a:t>노드 ID 앞 단위 ID는 임시</a:t>
             </a:r>
             <a:endParaRPr lang="en-US" sz="1500" dirty="0"/>
           </a:p>
@@ -4152,7 +3745,7 @@
         <p:spPr>
           <a:xfrm>
             <a:off x="11002061" y="5431536"/>
-            <a:ext cx="2994660" cy="420624"/>
+            <a:ext cx="2994660" cy="548640"/>
           </a:xfrm>
           <a:prstGeom prst="rect">
             <a:avLst/>
@@ -4161,10 +3754,10 @@
           <a:ln/>
         </p:spPr>
         <p:txBody>
-          <a:bodyPr wrap="square" lIns="762" tIns="762" rIns="762" bIns="762" rtlCol="0" anchor="ctr"/>
+          <a:bodyPr wrap="square" lIns="762" tIns="762" rIns="762" bIns="762" rtlCol="0" anchor="t"/>
           <a:lstStyle/>
           <a:p>
-            <a:pPr marL="0" indent="0" algn="l">
+            <a:pPr algn="l" indent="0" marL="0">
               <a:buNone/>
             </a:pPr>
             <a:r>
@@ -4176,15 +3769,99 @@
                 <a:ea typeface="Pretendard" pitchFamily="34" charset="-122"/>
                 <a:cs typeface="Pretendard" pitchFamily="34" charset="-120"/>
               </a:rPr>
-              <a:t>정해진 타입이 아닌 노드와 관계는 가지치기</a:t>
-            </a:r>
-            <a:endParaRPr lang="en-US" sz="1400" dirty="0"/>
-          </a:p>
-        </p:txBody>
-      </p:sp>
-      <p:sp>
-        <p:nvSpPr>
-          <p:cNvPr id="4" name="Slide Number Placeholder 0"/>
+              <a:t>단위끼리 ID가 겹치지 않게 함. K4 적재 중에만 씀</a:t>
+            </a:r>
+            <a:endParaRPr lang="en-US" sz="1400" dirty="0"/>
+          </a:p>
+        </p:txBody>
+      </p:sp>
+      <p:sp>
+        <p:nvSpPr>
+          <p:cNvPr id="73" name="Shape 70"/>
+          <p:cNvSpPr/>
+          <p:nvPr/>
+        </p:nvSpPr>
+        <p:spPr>
+          <a:xfrm>
+            <a:off x="509321" y="6172200"/>
+            <a:ext cx="13624560" cy="868680"/>
+          </a:xfrm>
+          <a:prstGeom prst="roundRect">
+            <a:avLst>
+              <a:gd name="adj" fmla="val 8421"/>
+            </a:avLst>
+          </a:prstGeom>
+          <a:solidFill>
+            <a:srgbClr val="1E2A5C"/>
+          </a:solidFill>
+          <a:ln/>
+        </p:spPr>
+      </p:sp>
+      <p:sp>
+        <p:nvSpPr>
+          <p:cNvPr id="74" name="Text 71"/>
+          <p:cNvSpPr txBox="1"/>
+          <p:nvPr/>
+        </p:nvSpPr>
+        <p:spPr>
+          <a:xfrm>
+            <a:off x="509321" y="6172200"/>
+            <a:ext cx="13624560" cy="868680"/>
+          </a:xfrm>
+          <a:prstGeom prst="rect">
+            <a:avLst/>
+          </a:prstGeom>
+          <a:noFill/>
+          <a:ln/>
+        </p:spPr>
+        <p:txBody>
+          <a:bodyPr wrap="square" lIns="635" tIns="635" rIns="635" bIns="635" rtlCol="0" anchor="ctr"/>
+          <a:lstStyle/>
+          <a:p>
+            <a:pPr algn="ctr" indent="0" marL="0">
+              <a:spcAft>
+                <a:spcPts val="100"/>
+              </a:spcAft>
+              <a:buNone/>
+            </a:pPr>
+            <a:r>
+              <a:rPr lang="en-US" sz="1600" b="1" dirty="0">
+                <a:solidFill>
+                  <a:srgbClr val="FFFFFF"/>
+                </a:solidFill>
+                <a:latin typeface="Pretendard" pitchFamily="34" charset="0"/>
+                <a:ea typeface="Pretendard" pitchFamily="34" charset="-122"/>
+                <a:cs typeface="Pretendard" pitchFamily="34" charset="-120"/>
+              </a:rPr>
+              <a:t>v0 표본: 전체 재색인 단위 24개, LLM 24번, 실패 0, 토큰 76,401 / 증분 색인 LLM 1번, 3개 재사용</a:t>
+            </a:r>
+            <a:endParaRPr lang="en-US" sz="1600" dirty="0"/>
+          </a:p>
+          <a:p>
+            <a:pPr algn="ctr" indent="0" marL="0">
+              <a:spcAft>
+                <a:spcPts val="100"/>
+              </a:spcAft>
+              <a:buNone/>
+            </a:pPr>
+            <a:r>
+              <a:rPr lang="en-US" sz="1500" dirty="0">
+                <a:solidFill>
+                  <a:srgbClr val="FFFFFF"/>
+                </a:solidFill>
+                <a:latin typeface="Pretendard" pitchFamily="34" charset="0"/>
+                <a:ea typeface="Pretendard" pitchFamily="34" charset="-122"/>
+                <a:cs typeface="Pretendard" pitchFamily="34" charset="-120"/>
+              </a:rPr>
+              <a:t>결과는 K3까지 마친 뒤 kg_prepared.json에 보관만 함. Neo4j에는 K4 반영 때 씀</a:t>
+            </a:r>
+            <a:endParaRPr lang="en-US" sz="1600" dirty="0"/>
+          </a:p>
+        </p:txBody>
+      </p:sp>
+      <p:sp>
+        <p:nvSpPr>
+          <p:cNvPr id="25" name="Slide Number Placeholder 0"/>
           <p:cNvSpPr>
             <a:spLocks noGrp="1"/>
           </p:cNvSpPr>
@@ -4202,7 +3879,7 @@
           </a:prstGeom>
           <a:extLst>
             <a:ext uri="{C572A759-6A51-4108-AA02-DFA0A04FC94B}">
-              <ma14:wrappingTextBoxFlag xmlns:ma14="http://schemas.microsoft.com/office/mac/drawingml/2011/main" xmlns="" val="0"/>
+              <ma14:wrappingTextBoxFlag xmlns:ma14="http://schemas.microsoft.com/office/mac/drawingml/2011/main" val="0"/>
             </a:ext>
           </a:extLst>
         </p:spPr>
@@ -4223,7 +3900,7 @@
           <a:p>
             <a:pPr algn="r"/>
             <a:fld id="{F7021451-1387-4CA6-816F-3879F97B5CBC}" type="slidenum">
-              <a:rPr lang="en-US" b="0"/>
+              <a:rPr b="0" lang="en-US"/>
               <a:t>1</a:t>
             </a:fld>
             <a:endParaRPr lang="en-US"/>
@@ -4258,9 +3935,7 @@
       <p:sp>
         <p:nvSpPr>
           <p:cNvPr id="2" name="Text 2"/>
-          <p:cNvSpPr>
-            <a:spLocks noGrp="1"/>
-          </p:cNvSpPr>
+          <p:cNvSpPr/>
           <p:nvPr>
             <p:ph type="title"/>
           </p:nvPr>
@@ -4280,7 +3955,7 @@
           <a:bodyPr wrap="square" lIns="0" tIns="0" rIns="0" bIns="0" rtlCol="0" anchor="ctr"/>
           <a:lstStyle/>
           <a:p>
-            <a:pPr marL="0" indent="0" algn="l">
+            <a:pPr algn="l" indent="0" marL="0">
               <a:buNone/>
             </a:pPr>
             <a:r>
@@ -4292,7 +3967,7 @@
                 <a:ea typeface="Pretendard" pitchFamily="34" charset="-122"/>
                 <a:cs typeface="Pretendard" pitchFamily="34" charset="-120"/>
               </a:rPr>
-              <a:t>K2 엔티티와 관계 추출 코드</a:t>
+              <a:t>K2 추출 코드 (kg_build.py)</a:t>
             </a:r>
             <a:endParaRPr lang="en-US" sz="3200" dirty="0"/>
           </a:p>
@@ -4319,7 +3994,7 @@
           <a:bodyPr wrap="square" lIns="0" tIns="0" rIns="0" bIns="0" rtlCol="0" anchor="ctr"/>
           <a:lstStyle/>
           <a:p>
-            <a:pPr marL="0" indent="0">
+            <a:pPr indent="0" marL="0">
               <a:buNone/>
             </a:pPr>
             <a:r>
@@ -4331,7 +4006,7 @@
                 <a:ea typeface="Pretendard SemiBold" pitchFamily="34" charset="-122"/>
                 <a:cs typeface="Pretendard SemiBold" pitchFamily="34" charset="-120"/>
               </a:rPr>
-              <a:t>추출기 하나를 만들고, 단위마다 머리줄을 붙여 호출하며, 형식 오류는 다시 시도함</a:t>
+              <a:t>추출기는 한 번 만들고, 단위마다 머리줄을 붙여 부르며, K3 가지치기까지 마친 결과를 파일로 보관함</a:t>
             </a:r>
             <a:endParaRPr lang="en-US" sz="1800" dirty="0"/>
           </a:p>
@@ -4363,13 +4038,6 @@
             <a:prstDash val="solid"/>
           </a:ln>
         </p:spPr>
-        <p:txBody>
-          <a:bodyPr/>
-          <a:lstStyle/>
-          <a:p>
-            <a:endParaRPr lang="ko-KR" altLang="en-US"/>
-          </a:p>
-        </p:txBody>
       </p:sp>
       <p:sp>
         <p:nvSpPr>
@@ -4392,7 +4060,7 @@
           <a:bodyPr wrap="square" lIns="762" tIns="762" rIns="762" bIns="762" rtlCol="0" anchor="ctr"/>
           <a:lstStyle/>
           <a:p>
-            <a:pPr marL="0" indent="0" algn="l">
+            <a:pPr algn="l" indent="0" marL="0">
               <a:buNone/>
             </a:pPr>
             <a:r>
@@ -4404,7 +4072,7 @@
                 <a:ea typeface="Pretendard" pitchFamily="34" charset="-122"/>
                 <a:cs typeface="Pretendard" pitchFamily="34" charset="-120"/>
               </a:rPr>
-              <a:t>추출기 만들기와 extract_one (fill_test.py 발췌)</a:t>
+              <a:t>추출기 만들기와 _k2_k3_one (kg_build.py 발췌)</a:t>
             </a:r>
             <a:endParaRPr lang="en-US" sz="1400" dirty="0"/>
           </a:p>
@@ -4431,7 +4099,7 @@
           <a:bodyPr wrap="square" lIns="254" tIns="254" rIns="254" bIns="254" rtlCol="0" anchor="t"/>
           <a:lstStyle/>
           <a:p>
-            <a:pPr marL="0" indent="0">
+            <a:pPr indent="0" marL="0">
               <a:lnSpc>
                 <a:spcPct val="105000"/>
               </a:lnSpc>
@@ -4446,12 +4114,12 @@
                 <a:ea typeface="Pretendard" pitchFamily="34" charset="-122"/>
                 <a:cs typeface="Pretendard" pitchFamily="34" charset="-120"/>
               </a:rPr>
-              <a:t>llm = make_llm(graph_safe=True)                # Groq openai/gpt-oss-120b</a:t>
-            </a:r>
-            <a:endParaRPr lang="en-US" sz="1400" dirty="0"/>
-          </a:p>
-          <a:p>
-            <a:pPr marL="0" indent="0">
+              <a:t># prepare() 안: 추출기와 가지치기는 한 번만 만듦</a:t>
+            </a:r>
+            <a:endParaRPr lang="en-US" sz="1400" dirty="0"/>
+          </a:p>
+          <a:p>
+            <a:pPr indent="0" marL="0">
               <a:lnSpc>
                 <a:spcPct val="105000"/>
               </a:lnSpc>
@@ -4466,12 +4134,12 @@
                 <a:ea typeface="Pretendard" pitchFamily="34" charset="-122"/>
                 <a:cs typeface="Pretendard" pitchFamily="34" charset="-120"/>
               </a:rPr>
-              <a:t>extractor = LLMEntityRelationExtractor(</a:t>
-            </a:r>
-            <a:endParaRPr lang="en-US" sz="1400" dirty="0"/>
-          </a:p>
-          <a:p>
-            <a:pPr marL="0" indent="0">
+              <a:t>llm = make_llm()                                  # Groq openai/gpt-oss-120b</a:t>
+            </a:r>
+            <a:endParaRPr lang="en-US" sz="1400" dirty="0"/>
+          </a:p>
+          <a:p>
+            <a:pPr indent="0" marL="0">
               <a:lnSpc>
                 <a:spcPct val="105000"/>
               </a:lnSpc>
@@ -4486,12 +4154,12 @@
                 <a:ea typeface="Pretendard" pitchFamily="34" charset="-122"/>
                 <a:cs typeface="Pretendard" pitchFamily="34" charset="-120"/>
               </a:rPr>
-              <a:t>    llm=llm, create_lexical_graph=False, on_error=OnError.RAISE)</a:t>
-            </a:r>
-            <a:endParaRPr lang="en-US" sz="1400" dirty="0"/>
-          </a:p>
-          <a:p>
-            <a:pPr marL="0" indent="0">
+              <a:t>extractor = LLMEntityRelationExtractor(llm=llm,</a:t>
+            </a:r>
+            <a:endParaRPr lang="en-US" sz="1400" dirty="0"/>
+          </a:p>
+          <a:p>
+            <a:pPr indent="0" marL="0">
               <a:lnSpc>
                 <a:spcPct val="105000"/>
               </a:lnSpc>
@@ -4506,41 +4174,41 @@
                 <a:ea typeface="Pretendard" pitchFamily="34" charset="-122"/>
                 <a:cs typeface="Pretendard" pitchFamily="34" charset="-120"/>
               </a:rPr>
-              <a:t>schema = GraphSchema.model_validate(graph_schema)  # 승인된 스키마</a:t>
-            </a:r>
-            <a:endParaRPr lang="en-US" sz="1400" dirty="0"/>
-          </a:p>
-          <a:p>
-            <a:pPr marL="0" indent="0">
+              <a:t>    create_lexical_graph=False, on_error=OnError.RAISE)</a:t>
+            </a:r>
+            <a:endParaRPr lang="en-US" sz="1400" dirty="0"/>
+          </a:p>
+          <a:p>
+            <a:pPr indent="0" marL="0">
               <a:lnSpc>
                 <a:spcPct val="105000"/>
               </a:lnSpc>
               <a:buNone/>
             </a:pPr>
-            <a:endParaRPr lang="en-US" sz="1400" dirty="0"/>
-          </a:p>
-          <a:p>
-            <a:pPr marL="0" indent="0">
+            <a:r>
+              <a:rPr lang="en-US" sz="1400" dirty="0">
+                <a:solidFill>
+                  <a:srgbClr val="2B3242"/>
+                </a:solidFill>
+                <a:latin typeface="Pretendard" pitchFamily="34" charset="0"/>
+                <a:ea typeface="Pretendard" pitchFamily="34" charset="-122"/>
+                <a:cs typeface="Pretendard" pitchFamily="34" charset="-120"/>
+              </a:rPr>
+              <a:t>pruner, sem = GraphPruning(), asyncio.Semaphore(config.LLM_CONCURRENCY)</a:t>
+            </a:r>
+            <a:endParaRPr lang="en-US" sz="1400" dirty="0"/>
+          </a:p>
+          <a:p>
+            <a:pPr indent="0" marL="0">
               <a:lnSpc>
                 <a:spcPct val="105000"/>
               </a:lnSpc>
               <a:buNone/>
             </a:pPr>
-            <a:r>
-              <a:rPr lang="en-US" sz="1400" dirty="0">
-                <a:solidFill>
-                  <a:srgbClr val="2B3242"/>
-                </a:solidFill>
-                <a:latin typeface="Pretendard" pitchFamily="34" charset="0"/>
-                <a:ea typeface="Pretendard" pitchFamily="34" charset="-122"/>
-                <a:cs typeface="Pretendard" pitchFamily="34" charset="-120"/>
-              </a:rPr>
-              <a:t>def head_line(md, fields):                      # 단위 본문 앞에 붙이는 머리줄</a:t>
-            </a:r>
-            <a:endParaRPr lang="en-US" sz="1400" dirty="0"/>
-          </a:p>
-          <a:p>
-            <a:pPr marL="0" indent="0">
+            <a:endParaRPr lang="en-US" sz="1400" dirty="0"/>
+          </a:p>
+          <a:p>
+            <a:pPr indent="0" marL="0">
               <a:lnSpc>
                 <a:spcPct val="105000"/>
               </a:lnSpc>
@@ -4555,12 +4223,12 @@
                 <a:ea typeface="Pretendard" pitchFamily="34" charset="-122"/>
                 <a:cs typeface="Pretendard" pitchFamily="34" charset="-120"/>
               </a:rPr>
-              <a:t>    return " | ".join(f"{f}: {md[f]}" for f in fields</a:t>
-            </a:r>
-            <a:endParaRPr lang="en-US" sz="1400" dirty="0"/>
-          </a:p>
-          <a:p>
-            <a:pPr marL="0" indent="0">
+              <a:t>async def _k2_k3_one(sem, extractor, pruner, unit, spec):</a:t>
+            </a:r>
+            <a:endParaRPr lang="en-US" sz="1400" dirty="0"/>
+          </a:p>
+          <a:p>
+            <a:pPr indent="0" marL="0">
               <a:lnSpc>
                 <a:spcPct val="105000"/>
               </a:lnSpc>
@@ -4575,21 +4243,32 @@
                 <a:ea typeface="Pretendard" pitchFamily="34" charset="-122"/>
                 <a:cs typeface="Pretendard" pitchFamily="34" charset="-120"/>
               </a:rPr>
-              <a:t>                      if md.get(f) not in (None, "")) + "\n"</a:t>
-            </a:r>
-            <a:endParaRPr lang="en-US" sz="1400" dirty="0"/>
-          </a:p>
-          <a:p>
-            <a:pPr marL="0" indent="0">
+              <a:t>    async with sem:                               # 동시 4건</a:t>
+            </a:r>
+            <a:endParaRPr lang="en-US" sz="1400" dirty="0"/>
+          </a:p>
+          <a:p>
+            <a:pPr indent="0" marL="0">
               <a:lnSpc>
                 <a:spcPct val="105000"/>
               </a:lnSpc>
               <a:buNone/>
             </a:pPr>
-            <a:endParaRPr lang="en-US" sz="1400" dirty="0"/>
-          </a:p>
-          <a:p>
-            <a:pPr marL="0" indent="0">
+            <a:r>
+              <a:rPr lang="en-US" sz="1400" dirty="0">
+                <a:solidFill>
+                  <a:srgbClr val="2B3242"/>
+                </a:solidFill>
+                <a:latin typeface="Pretendard" pitchFamily="34" charset="0"/>
+                <a:ea typeface="Pretendard" pitchFamily="34" charset="-122"/>
+                <a:cs typeface="Pretendard" pitchFamily="34" charset="-120"/>
+              </a:rPr>
+              <a:t>        text = _head_line(unit["metadata"], spec["header"]) + unit["text"]</a:t>
+            </a:r>
+            <a:endParaRPr lang="en-US" sz="1400" dirty="0"/>
+          </a:p>
+          <a:p>
+            <a:pPr indent="0" marL="0">
               <a:lnSpc>
                 <a:spcPct val="105000"/>
               </a:lnSpc>
@@ -4604,12 +4283,12 @@
                 <a:ea typeface="Pretendard" pitchFamily="34" charset="-122"/>
                 <a:cs typeface="Pretendard" pitchFamily="34" charset="-120"/>
               </a:rPr>
-              <a:t>async def extract_one(sem, unit_id, text):</a:t>
-            </a:r>
-            <a:endParaRPr lang="en-US" sz="1400" dirty="0"/>
-          </a:p>
-          <a:p>
-            <a:pPr marL="0" indent="0">
+              <a:t>        for attempt in range(config.LLM_RETRIES + 1):    # 2번까지 다시</a:t>
+            </a:r>
+            <a:endParaRPr lang="en-US" sz="1400" dirty="0"/>
+          </a:p>
+          <a:p>
+            <a:pPr indent="0" marL="0">
               <a:lnSpc>
                 <a:spcPct val="105000"/>
               </a:lnSpc>
@@ -4624,12 +4303,12 @@
                 <a:ea typeface="Pretendard" pitchFamily="34" charset="-122"/>
                 <a:cs typeface="Pretendard" pitchFamily="34" charset="-120"/>
               </a:rPr>
-              <a:t>    async with sem:                             # 동시 4건</a:t>
-            </a:r>
-            <a:endParaRPr lang="en-US" sz="1400" dirty="0"/>
-          </a:p>
-          <a:p>
-            <a:pPr marL="0" indent="0">
+              <a:t>            try:</a:t>
+            </a:r>
+            <a:endParaRPr lang="en-US" sz="1400" dirty="0"/>
+          </a:p>
+          <a:p>
+            <a:pPr indent="0" marL="0">
               <a:lnSpc>
                 <a:spcPct val="105000"/>
               </a:lnSpc>
@@ -4644,12 +4323,12 @@
                 <a:ea typeface="Pretendard" pitchFamily="34" charset="-122"/>
                 <a:cs typeface="Pretendard" pitchFamily="34" charset="-120"/>
               </a:rPr>
-              <a:t>        for attempt in range(3):                # 형식 오류는 2번까지 다시</a:t>
-            </a:r>
-            <a:endParaRPr lang="en-US" sz="1400" dirty="0"/>
-          </a:p>
-          <a:p>
-            <a:pPr marL="0" indent="0">
+              <a:t>                graph = await extractor.run(chunks=TextChunks(chunks=[</a:t>
+            </a:r>
+            <a:endParaRPr lang="en-US" sz="1400" dirty="0"/>
+          </a:p>
+          <a:p>
+            <a:pPr indent="0" marL="0">
               <a:lnSpc>
                 <a:spcPct val="105000"/>
               </a:lnSpc>
@@ -4664,12 +4343,12 @@
                 <a:ea typeface="Pretendard" pitchFamily="34" charset="-122"/>
                 <a:cs typeface="Pretendard" pitchFamily="34" charset="-120"/>
               </a:rPr>
-              <a:t>            try:</a:t>
-            </a:r>
-            <a:endParaRPr lang="en-US" sz="1400" dirty="0"/>
-          </a:p>
-          <a:p>
-            <a:pPr marL="0" indent="0">
+              <a:t>                    TextChunk(text=text, index=0, uid=unit["unit_id"])]),</a:t>
+            </a:r>
+            <a:endParaRPr lang="en-US" sz="1400" dirty="0"/>
+          </a:p>
+          <a:p>
+            <a:pPr indent="0" marL="0">
               <a:lnSpc>
                 <a:spcPct val="105000"/>
               </a:lnSpc>
@@ -4684,12 +4363,12 @@
                 <a:ea typeface="Pretendard" pitchFamily="34" charset="-122"/>
                 <a:cs typeface="Pretendard" pitchFamily="34" charset="-120"/>
               </a:rPr>
-              <a:t>                graph = await extractor.run(</a:t>
-            </a:r>
-            <a:endParaRPr lang="en-US" sz="1400" dirty="0"/>
-          </a:p>
-          <a:p>
-            <a:pPr marL="0" indent="0">
+              <a:t>                    schema=spec["schema"])</a:t>
+            </a:r>
+            <a:endParaRPr lang="en-US" sz="1400" dirty="0"/>
+          </a:p>
+          <a:p>
+            <a:pPr indent="0" marL="0">
               <a:lnSpc>
                 <a:spcPct val="105000"/>
               </a:lnSpc>
@@ -4704,12 +4383,12 @@
                 <a:ea typeface="Pretendard" pitchFamily="34" charset="-122"/>
                 <a:cs typeface="Pretendard" pitchFamily="34" charset="-120"/>
               </a:rPr>
-              <a:t>                    chunks=TextChunks(chunks=[</a:t>
-            </a:r>
-            <a:endParaRPr lang="en-US" sz="1400" dirty="0"/>
-          </a:p>
-          <a:p>
-            <a:pPr marL="0" indent="0">
+              <a:t>                break</a:t>
+            </a:r>
+            <a:endParaRPr lang="en-US" sz="1400" dirty="0"/>
+          </a:p>
+          <a:p>
+            <a:pPr indent="0" marL="0">
               <a:lnSpc>
                 <a:spcPct val="105000"/>
               </a:lnSpc>
@@ -4724,12 +4403,12 @@
                 <a:ea typeface="Pretendard" pitchFamily="34" charset="-122"/>
                 <a:cs typeface="Pretendard" pitchFamily="34" charset="-120"/>
               </a:rPr>
-              <a:t>                        TextChunk(text=text, index=0, uid=unit_id)]),</a:t>
-            </a:r>
-            <a:endParaRPr lang="en-US" sz="1400" dirty="0"/>
-          </a:p>
-          <a:p>
-            <a:pPr marL="0" indent="0">
+              <a:t>            except Exception as e:</a:t>
+            </a:r>
+            <a:endParaRPr lang="en-US" sz="1400" dirty="0"/>
+          </a:p>
+          <a:p>
+            <a:pPr indent="0" marL="0">
               <a:lnSpc>
                 <a:spcPct val="105000"/>
               </a:lnSpc>
@@ -4744,12 +4423,12 @@
                 <a:ea typeface="Pretendard" pitchFamily="34" charset="-122"/>
                 <a:cs typeface="Pretendard" pitchFamily="34" charset="-120"/>
               </a:rPr>
-              <a:t>                    schema=schema)</a:t>
-            </a:r>
-            <a:endParaRPr lang="en-US" sz="1400" dirty="0"/>
-          </a:p>
-          <a:p>
-            <a:pPr marL="0" indent="0">
+              <a:t>                if attempt == config.LLM_RETRIES:   # 실패는 기록용으로 돌려줌</a:t>
+            </a:r>
+            <a:endParaRPr lang="en-US" sz="1400" dirty="0"/>
+          </a:p>
+          <a:p>
+            <a:pPr indent="0" marL="0">
               <a:lnSpc>
                 <a:spcPct val="105000"/>
               </a:lnSpc>
@@ -4764,12 +4443,12 @@
                 <a:ea typeface="Pretendard" pitchFamily="34" charset="-122"/>
                 <a:cs typeface="Pretendard" pitchFamily="34" charset="-120"/>
               </a:rPr>
-              <a:t>                break</a:t>
-            </a:r>
-            <a:endParaRPr lang="en-US" sz="1400" dirty="0"/>
-          </a:p>
-          <a:p>
-            <a:pPr marL="0" indent="0">
+              <a:t>                    return {"error": f"{type(e).__name__}: {str(e)[:200]}"}</a:t>
+            </a:r>
+            <a:endParaRPr lang="en-US" sz="1400" dirty="0"/>
+          </a:p>
+          <a:p>
+            <a:pPr indent="0" marL="0">
               <a:lnSpc>
                 <a:spcPct val="105000"/>
               </a:lnSpc>
@@ -4784,12 +4463,12 @@
                 <a:ea typeface="Pretendard" pitchFamily="34" charset="-122"/>
                 <a:cs typeface="Pretendard" pitchFamily="34" charset="-120"/>
               </a:rPr>
-              <a:t>            except Exception:</a:t>
-            </a:r>
-            <a:endParaRPr lang="en-US" sz="1400" dirty="0"/>
-          </a:p>
-          <a:p>
-            <a:pPr marL="0" indent="0">
+              <a:t>        pruned = (await pruner.run(graph, spec["schema"])).graph   # K3</a:t>
+            </a:r>
+            <a:endParaRPr lang="en-US" sz="1400" dirty="0"/>
+          </a:p>
+          <a:p>
+            <a:pPr indent="0" marL="0">
               <a:lnSpc>
                 <a:spcPct val="105000"/>
               </a:lnSpc>
@@ -4804,47 +4483,7 @@
                 <a:ea typeface="Pretendard" pitchFamily="34" charset="-122"/>
                 <a:cs typeface="Pretendard" pitchFamily="34" charset="-120"/>
               </a:rPr>
-              <a:t>                if attempt == 2:</a:t>
-            </a:r>
-            <a:endParaRPr lang="en-US" sz="1400" dirty="0"/>
-          </a:p>
-          <a:p>
-            <a:pPr marL="0" indent="0">
-              <a:lnSpc>
-                <a:spcPct val="105000"/>
-              </a:lnSpc>
-              <a:buNone/>
-            </a:pPr>
-            <a:r>
-              <a:rPr lang="en-US" sz="1400" dirty="0">
-                <a:solidFill>
-                  <a:srgbClr val="2B3242"/>
-                </a:solidFill>
-                <a:latin typeface="Pretendard" pitchFamily="34" charset="0"/>
-                <a:ea typeface="Pretendard" pitchFamily="34" charset="-122"/>
-                <a:cs typeface="Pretendard" pitchFamily="34" charset="-120"/>
-              </a:rPr>
-              <a:t>                    raise</a:t>
-            </a:r>
-            <a:endParaRPr lang="en-US" sz="1400" dirty="0"/>
-          </a:p>
-          <a:p>
-            <a:pPr marL="0" indent="0">
-              <a:lnSpc>
-                <a:spcPct val="105000"/>
-              </a:lnSpc>
-              <a:buNone/>
-            </a:pPr>
-            <a:r>
-              <a:rPr lang="en-US" sz="1400" dirty="0">
-                <a:solidFill>
-                  <a:srgbClr val="2B3242"/>
-                </a:solidFill>
-                <a:latin typeface="Pretendard" pitchFamily="34" charset="0"/>
-                <a:ea typeface="Pretendard" pitchFamily="34" charset="-122"/>
-                <a:cs typeface="Pretendard" pitchFamily="34" charset="-120"/>
-              </a:rPr>
-              <a:t>        return graph                            # 다음: K3 가지치기</a:t>
+              <a:t>        return {"graph": pruned.model_dump(), …}</a:t>
             </a:r>
             <a:endParaRPr lang="en-US" sz="1400" dirty="0"/>
           </a:p>
@@ -4859,11 +4498,11 @@
         <p:spPr>
           <a:xfrm>
             <a:off x="8144561" y="1737360"/>
-            <a:ext cx="5989320" cy="3840480"/>
+            <a:ext cx="5989320" cy="2880360"/>
           </a:xfrm>
           <a:prstGeom prst="roundRect">
             <a:avLst>
-              <a:gd name="adj" fmla="val 1429"/>
+              <a:gd name="adj" fmla="val 1905"/>
             </a:avLst>
           </a:prstGeom>
           <a:solidFill>
@@ -4876,13 +4515,6 @@
             <a:prstDash val="solid"/>
           </a:ln>
         </p:spPr>
-        <p:txBody>
-          <a:bodyPr/>
-          <a:lstStyle/>
-          <a:p>
-            <a:endParaRPr lang="ko-KR" altLang="en-US"/>
-          </a:p>
-        </p:txBody>
       </p:sp>
       <p:sp>
         <p:nvSpPr>
@@ -4905,7 +4537,7 @@
           <a:bodyPr wrap="square" lIns="762" tIns="762" rIns="762" bIns="762" rtlCol="0" anchor="ctr"/>
           <a:lstStyle/>
           <a:p>
-            <a:pPr marL="0" indent="0" algn="l">
+            <a:pPr algn="l" indent="0" marL="0">
               <a:buNone/>
             </a:pPr>
             <a:r>
@@ -4917,7 +4549,7 @@
                 <a:ea typeface="Pretendard" pitchFamily="34" charset="-122"/>
                 <a:cs typeface="Pretendard" pitchFamily="34" charset="-120"/>
               </a:rPr>
-              <a:t>LLM이 돌려준 JSON (다듬은 뒤, 일부)</a:t>
+              <a:t>kg_prepared.json에 보관한 결과 (일부)</a:t>
             </a:r>
             <a:endParaRPr lang="en-US" sz="1400" dirty="0"/>
           </a:p>
@@ -4932,7 +4564,7 @@
         <p:spPr>
           <a:xfrm>
             <a:off x="8254289" y="2139696"/>
-            <a:ext cx="5769864" cy="3383280"/>
+            <a:ext cx="5769864" cy="2423160"/>
           </a:xfrm>
           <a:prstGeom prst="rect">
             <a:avLst/>
@@ -4944,7 +4576,7 @@
           <a:bodyPr wrap="square" lIns="254" tIns="254" rIns="254" bIns="254" rtlCol="0" anchor="t"/>
           <a:lstStyle/>
           <a:p>
-            <a:pPr marL="0" indent="0">
+            <a:pPr indent="0" marL="0">
               <a:lnSpc>
                 <a:spcPct val="105000"/>
               </a:lnSpc>
@@ -4959,12 +4591,12 @@
                 <a:ea typeface="Pretendard" pitchFamily="34" charset="-122"/>
                 <a:cs typeface="Pretendard" pitchFamily="34" charset="-120"/>
               </a:rPr>
-              <a:t>{"nodes": [</a:t>
-            </a:r>
-            <a:endParaRPr lang="en-US" sz="1400" dirty="0"/>
-          </a:p>
-          <a:p>
-            <a:pPr marL="0" indent="0">
+              <a:t>{"unit_id": "D3_C-20260501-003_c797…_0000",</a:t>
+            </a:r>
+            <a:endParaRPr lang="en-US" sz="1400" dirty="0"/>
+          </a:p>
+          <a:p>
+            <a:pPr indent="0" marL="0">
               <a:lnSpc>
                 <a:spcPct val="105000"/>
               </a:lnSpc>
@@ -4979,12 +4611,12 @@
                 <a:ea typeface="Pretendard" pitchFamily="34" charset="-122"/>
                 <a:cs typeface="Pretendard" pitchFamily="34" charset="-120"/>
               </a:rPr>
-              <a:t>  {"id": "0", "label": "Consultation",</a:t>
-            </a:r>
-            <a:endParaRPr lang="en-US" sz="1400" dirty="0"/>
-          </a:p>
-          <a:p>
-            <a:pPr marL="0" indent="0">
+              <a:t> "text_hash": "…", "schema_signature": "…",</a:t>
+            </a:r>
+            <a:endParaRPr lang="en-US" sz="1400" dirty="0"/>
+          </a:p>
+          <a:p>
+            <a:pPr indent="0" marL="0">
               <a:lnSpc>
                 <a:spcPct val="105000"/>
               </a:lnSpc>
@@ -4999,12 +4631,12 @@
                 <a:ea typeface="Pretendard" pitchFamily="34" charset="-122"/>
                 <a:cs typeface="Pretendard" pitchFamily="34" charset="-120"/>
               </a:rPr>
-              <a:t>   "properties": {"record_id": "C-20260501-003",</a:t>
-            </a:r>
-            <a:endParaRPr lang="en-US" sz="1400" dirty="0"/>
-          </a:p>
-          <a:p>
-            <a:pPr marL="0" indent="0">
+              <a:t> "graph": {"nodes": [ …,</a:t>
+            </a:r>
+            <a:endParaRPr lang="en-US" sz="1400" dirty="0"/>
+          </a:p>
+          <a:p>
+            <a:pPr indent="0" marL="0">
               <a:lnSpc>
                 <a:spcPct val="105000"/>
               </a:lnSpc>
@@ -5019,12 +4651,12 @@
                 <a:ea typeface="Pretendard" pitchFamily="34" charset="-122"/>
                 <a:cs typeface="Pretendard" pitchFamily="34" charset="-120"/>
               </a:rPr>
-              <a:t>                  "channel": "콜센터", …}},</a:t>
-            </a:r>
-            <a:endParaRPr lang="en-US" sz="1400" dirty="0"/>
-          </a:p>
-          <a:p>
-            <a:pPr marL="0" indent="0">
+              <a:t>   {"id": "D3_C-20260501-003_c797…_0000:p1",</a:t>
+            </a:r>
+            <a:endParaRPr lang="en-US" sz="1400" dirty="0"/>
+          </a:p>
+          <a:p>
+            <a:pPr indent="0" marL="0">
               <a:lnSpc>
                 <a:spcPct val="105000"/>
               </a:lnSpc>
@@ -5039,12 +4671,12 @@
                 <a:ea typeface="Pretendard" pitchFamily="34" charset="-122"/>
                 <a:cs typeface="Pretendard" pitchFamily="34" charset="-120"/>
               </a:rPr>
-              <a:t>  {"id": "3", "label": "Proposal",</a:t>
-            </a:r>
-            <a:endParaRPr lang="en-US" sz="1400" dirty="0"/>
-          </a:p>
-          <a:p>
-            <a:pPr marL="0" indent="0">
+              <a:t>    "label": "Proposal",</a:t>
+            </a:r>
+            <a:endParaRPr lang="en-US" sz="1400" dirty="0"/>
+          </a:p>
+          <a:p>
+            <a:pPr indent="0" marL="0">
               <a:lnSpc>
                 <a:spcPct val="105000"/>
               </a:lnSpc>
@@ -5059,12 +4691,12 @@
                 <a:ea typeface="Pretendard" pitchFamily="34" charset="-122"/>
                 <a:cs typeface="Pretendard" pitchFamily="34" charset="-120"/>
               </a:rPr>
-              <a:t>   "properties": {"content": "그러면 주문 내역 화면으로 …",</a:t>
-            </a:r>
-            <a:endParaRPr lang="en-US" sz="1400" dirty="0"/>
-          </a:p>
-          <a:p>
-            <a:pPr marL="0" indent="0">
+              <a:t>    "properties": {"content": "그러면 주문 내역 화면으로 …",</a:t>
+            </a:r>
+            <a:endParaRPr lang="en-US" sz="1400" dirty="0"/>
+          </a:p>
+          <a:p>
+            <a:pPr indent="0" marL="0">
               <a:lnSpc>
                 <a:spcPct val="105000"/>
               </a:lnSpc>
@@ -5079,12 +4711,12 @@
                 <a:ea typeface="Pretendard" pitchFamily="34" charset="-122"/>
                 <a:cs typeface="Pretendard" pitchFamily="34" charset="-120"/>
               </a:rPr>
-              <a:t>                  "decision": "수용"}},</a:t>
-            </a:r>
-            <a:endParaRPr lang="en-US" sz="1400" dirty="0"/>
-          </a:p>
-          <a:p>
-            <a:pPr marL="0" indent="0">
+              <a:t>                   "decision": "수용"}}, … ],</a:t>
+            </a:r>
+            <a:endParaRPr lang="en-US" sz="1400" dirty="0"/>
+          </a:p>
+          <a:p>
+            <a:pPr indent="0" marL="0">
               <a:lnSpc>
                 <a:spcPct val="105000"/>
               </a:lnSpc>
@@ -5099,12 +4731,12 @@
                 <a:ea typeface="Pretendard" pitchFamily="34" charset="-122"/>
                 <a:cs typeface="Pretendard" pitchFamily="34" charset="-120"/>
               </a:rPr>
-              <a:t>  {"id": "4", "label": "ReconsiderCondition",</a:t>
-            </a:r>
-            <a:endParaRPr lang="en-US" sz="1400" dirty="0"/>
-          </a:p>
-          <a:p>
-            <a:pPr marL="0" indent="0">
+              <a:t>  "relationships": [ …,</a:t>
+            </a:r>
+            <a:endParaRPr lang="en-US" sz="1400" dirty="0"/>
+          </a:p>
+          <a:p>
+            <a:pPr indent="0" marL="0">
               <a:lnSpc>
                 <a:spcPct val="105000"/>
               </a:lnSpc>
@@ -5119,12 +4751,12 @@
                 <a:ea typeface="Pretendard" pitchFamily="34" charset="-122"/>
                 <a:cs typeface="Pretendard" pitchFamily="34" charset="-120"/>
               </a:rPr>
-              <a:t>   "properties": {"condition": "다음 명세서 나올 때 …"}}],</a:t>
-            </a:r>
-            <a:endParaRPr lang="en-US" sz="1400" dirty="0"/>
-          </a:p>
-          <a:p>
-            <a:pPr marL="0" indent="0">
+              <a:t>   {"type": "RECONSIDER_WHEN",</a:t>
+            </a:r>
+            <a:endParaRPr lang="en-US" sz="1400" dirty="0"/>
+          </a:p>
+          <a:p>
+            <a:pPr indent="0" marL="0">
               <a:lnSpc>
                 <a:spcPct val="105000"/>
               </a:lnSpc>
@@ -5139,87 +4771,7 @@
                 <a:ea typeface="Pretendard" pitchFamily="34" charset="-122"/>
                 <a:cs typeface="Pretendard" pitchFamily="34" charset="-120"/>
               </a:rPr>
-              <a:t> "relationships": [</a:t>
-            </a:r>
-            <a:endParaRPr lang="en-US" sz="1400" dirty="0"/>
-          </a:p>
-          <a:p>
-            <a:pPr marL="0" indent="0">
-              <a:lnSpc>
-                <a:spcPct val="105000"/>
-              </a:lnSpc>
-              <a:buNone/>
-            </a:pPr>
-            <a:r>
-              <a:rPr lang="en-US" sz="1400" dirty="0">
-                <a:solidFill>
-                  <a:srgbClr val="2B3242"/>
-                </a:solidFill>
-                <a:latin typeface="Pretendard" pitchFamily="34" charset="0"/>
-                <a:ea typeface="Pretendard" pitchFamily="34" charset="-122"/>
-                <a:cs typeface="Pretendard" pitchFamily="34" charset="-120"/>
-              </a:rPr>
-              <a:t>  {"type": "HAS_PROPOSAL",</a:t>
-            </a:r>
-            <a:endParaRPr lang="en-US" sz="1400" dirty="0"/>
-          </a:p>
-          <a:p>
-            <a:pPr marL="0" indent="0">
-              <a:lnSpc>
-                <a:spcPct val="105000"/>
-              </a:lnSpc>
-              <a:buNone/>
-            </a:pPr>
-            <a:r>
-              <a:rPr lang="en-US" sz="1400" dirty="0">
-                <a:solidFill>
-                  <a:srgbClr val="2B3242"/>
-                </a:solidFill>
-                <a:latin typeface="Pretendard" pitchFamily="34" charset="0"/>
-                <a:ea typeface="Pretendard" pitchFamily="34" charset="-122"/>
-                <a:cs typeface="Pretendard" pitchFamily="34" charset="-120"/>
-              </a:rPr>
-              <a:t>   "start_node_id": "0", "end_node_id": "3"},</a:t>
-            </a:r>
-            <a:endParaRPr lang="en-US" sz="1400" dirty="0"/>
-          </a:p>
-          <a:p>
-            <a:pPr marL="0" indent="0">
-              <a:lnSpc>
-                <a:spcPct val="105000"/>
-              </a:lnSpc>
-              <a:buNone/>
-            </a:pPr>
-            <a:r>
-              <a:rPr lang="en-US" sz="1400" dirty="0">
-                <a:solidFill>
-                  <a:srgbClr val="2B3242"/>
-                </a:solidFill>
-                <a:latin typeface="Pretendard" pitchFamily="34" charset="0"/>
-                <a:ea typeface="Pretendard" pitchFamily="34" charset="-122"/>
-                <a:cs typeface="Pretendard" pitchFamily="34" charset="-120"/>
-              </a:rPr>
-              <a:t>  {"type": "RECONSIDER_WHEN",</a:t>
-            </a:r>
-            <a:endParaRPr lang="en-US" sz="1400" dirty="0"/>
-          </a:p>
-          <a:p>
-            <a:pPr marL="0" indent="0">
-              <a:lnSpc>
-                <a:spcPct val="105000"/>
-              </a:lnSpc>
-              <a:buNone/>
-            </a:pPr>
-            <a:r>
-              <a:rPr lang="en-US" sz="1400" dirty="0">
-                <a:solidFill>
-                  <a:srgbClr val="2B3242"/>
-                </a:solidFill>
-                <a:latin typeface="Pretendard" pitchFamily="34" charset="0"/>
-                <a:ea typeface="Pretendard" pitchFamily="34" charset="-122"/>
-                <a:cs typeface="Pretendard" pitchFamily="34" charset="-120"/>
-              </a:rPr>
-              <a:t>   "start_node_id": "3", "end_node_id": "4"}]}</a:t>
+              <a:t>    "start_node_id": "…_0000:p1", "end_node_id": "…_0000:r0"}]}}</a:t>
             </a:r>
             <a:endParaRPr lang="en-US" sz="1400" dirty="0"/>
           </a:p>
@@ -5233,12 +4785,12 @@
         </p:nvSpPr>
         <p:spPr>
           <a:xfrm>
-            <a:off x="8144561" y="5669280"/>
-            <a:ext cx="5989320" cy="731520"/>
+            <a:off x="8144561" y="4709160"/>
+            <a:ext cx="5989320" cy="1691640"/>
           </a:xfrm>
           <a:prstGeom prst="roundRect">
             <a:avLst>
-              <a:gd name="adj" fmla="val 10000"/>
+              <a:gd name="adj" fmla="val 3243"/>
             </a:avLst>
           </a:prstGeom>
           <a:solidFill>
@@ -5251,13 +4803,6 @@
             <a:prstDash val="solid"/>
           </a:ln>
         </p:spPr>
-        <p:txBody>
-          <a:bodyPr/>
-          <a:lstStyle/>
-          <a:p>
-            <a:endParaRPr lang="ko-KR" altLang="en-US"/>
-          </a:p>
-        </p:txBody>
       </p:sp>
       <p:sp>
         <p:nvSpPr>
@@ -5267,8 +4812,8 @@
         </p:nvSpPr>
         <p:spPr>
           <a:xfrm>
-            <a:off x="8144561" y="5669280"/>
-            <a:ext cx="5989320" cy="731520"/>
+            <a:off x="8254289" y="4782312"/>
+            <a:ext cx="5769864" cy="310896"/>
           </a:xfrm>
           <a:prstGeom prst="rect">
             <a:avLst/>
@@ -5277,17 +4822,56 @@
           <a:ln/>
         </p:spPr>
         <p:txBody>
-          <a:bodyPr wrap="square" lIns="635" tIns="635" rIns="635" bIns="635" rtlCol="0" anchor="ctr"/>
+          <a:bodyPr wrap="square" lIns="762" tIns="762" rIns="762" bIns="762" rtlCol="0" anchor="ctr"/>
           <a:lstStyle/>
           <a:p>
-            <a:pPr marL="0" indent="0" algn="ctr">
-              <a:spcAft>
-                <a:spcPts val="100"/>
-              </a:spcAft>
-              <a:buNone/>
-            </a:pPr>
-            <a:r>
-              <a:rPr lang="en-US" sz="1500" b="1" dirty="0">
+            <a:pPr algn="l" indent="0" marL="0">
+              <a:buNone/>
+            </a:pPr>
+            <a:r>
+              <a:rPr lang="en-US" sz="1400" b="1" dirty="0">
+                <a:solidFill>
+                  <a:srgbClr val="7C8598"/>
+                </a:solidFill>
+                <a:latin typeface="Pretendard" pitchFamily="34" charset="0"/>
+                <a:ea typeface="Pretendard" pitchFamily="34" charset="-122"/>
+                <a:cs typeface="Pretendard" pitchFamily="34" charset="-120"/>
+              </a:rPr>
+              <a:t>앞 세대 결과 재사용 (prepare 발췌)</a:t>
+            </a:r>
+            <a:endParaRPr lang="en-US" sz="1400" dirty="0"/>
+          </a:p>
+        </p:txBody>
+      </p:sp>
+      <p:sp>
+        <p:nvSpPr>
+          <p:cNvPr id="13" name="Text 10"/>
+          <p:cNvSpPr txBox="1"/>
+          <p:nvPr/>
+        </p:nvSpPr>
+        <p:spPr>
+          <a:xfrm>
+            <a:off x="8254289" y="5111496"/>
+            <a:ext cx="5769864" cy="1234440"/>
+          </a:xfrm>
+          <a:prstGeom prst="rect">
+            <a:avLst/>
+          </a:prstGeom>
+          <a:noFill/>
+          <a:ln/>
+        </p:spPr>
+        <p:txBody>
+          <a:bodyPr wrap="square" lIns="254" tIns="254" rIns="254" bIns="254" rtlCol="0" anchor="t"/>
+          <a:lstStyle/>
+          <a:p>
+            <a:pPr indent="0" marL="0">
+              <a:lnSpc>
+                <a:spcPct val="105000"/>
+              </a:lnSpc>
+              <a:buNone/>
+            </a:pPr>
+            <a:r>
+              <a:rPr lang="en-US" sz="1400" dirty="0">
                 <a:solidFill>
                   <a:srgbClr val="2B3242"/>
                 </a:solidFill>
@@ -5295,15 +4879,15 @@
                 <a:ea typeface="Pretendard" pitchFamily="34" charset="-122"/>
                 <a:cs typeface="Pretendard" pitchFamily="34" charset="-120"/>
               </a:rPr>
-              <a:t>응답 다듬기 (GraphSafeLLM)</a:t>
-            </a:r>
-            <a:endParaRPr lang="en-US" sz="1500" dirty="0"/>
-          </a:p>
-          <a:p>
-            <a:pPr marL="0" indent="0" algn="ctr">
-              <a:spcAft>
-                <a:spcPts val="100"/>
-              </a:spcAft>
+              <a:t>hit = cache.get((u["doc_type"], u["text_hash"], u["schema_signature"]))</a:t>
+            </a:r>
+            <a:endParaRPr lang="en-US" sz="1400" dirty="0"/>
+          </a:p>
+          <a:p>
+            <a:pPr indent="0" marL="0">
+              <a:lnSpc>
+                <a:spcPct val="105000"/>
+              </a:lnSpc>
               <a:buNone/>
             </a:pPr>
             <a:r>
@@ -5315,15 +4899,75 @@
                 <a:ea typeface="Pretendard" pitchFamily="34" charset="-122"/>
                 <a:cs typeface="Pretendard" pitchFamily="34" charset="-120"/>
               </a:rPr>
-              <a:t>정해진 칸 밖 키 제거, id는 글자로, 빈 속성 제거</a:t>
-            </a:r>
-            <a:endParaRPr lang="en-US" sz="1500" dirty="0"/>
-          </a:p>
-        </p:txBody>
-      </p:sp>
-      <p:sp>
-        <p:nvSpPr>
-          <p:cNvPr id="13" name="Shape 10"/>
+              <a:t>if hit:</a:t>
+            </a:r>
+            <a:endParaRPr lang="en-US" sz="1400" dirty="0"/>
+          </a:p>
+          <a:p>
+            <a:pPr indent="0" marL="0">
+              <a:lnSpc>
+                <a:spcPct val="105000"/>
+              </a:lnSpc>
+              <a:buNone/>
+            </a:pPr>
+            <a:r>
+              <a:rPr lang="en-US" sz="1400" dirty="0">
+                <a:solidFill>
+                  <a:srgbClr val="2B3242"/>
+                </a:solidFill>
+                <a:latin typeface="Pretendard" pitchFamily="34" charset="0"/>
+                <a:ea typeface="Pretendard" pitchFamily="34" charset="-122"/>
+                <a:cs typeface="Pretendard" pitchFamily="34" charset="-120"/>
+              </a:rPr>
+              <a:t>    u.update(graph=hit["graph"], reused=True)   # LLM을 부르지 않음</a:t>
+            </a:r>
+            <a:endParaRPr lang="en-US" sz="1400" dirty="0"/>
+          </a:p>
+          <a:p>
+            <a:pPr indent="0" marL="0">
+              <a:lnSpc>
+                <a:spcPct val="105000"/>
+              </a:lnSpc>
+              <a:buNone/>
+            </a:pPr>
+            <a:r>
+              <a:rPr lang="en-US" sz="1400" dirty="0">
+                <a:solidFill>
+                  <a:srgbClr val="2B3242"/>
+                </a:solidFill>
+                <a:latin typeface="Pretendard" pitchFamily="34" charset="0"/>
+                <a:ea typeface="Pretendard" pitchFamily="34" charset="-122"/>
+                <a:cs typeface="Pretendard" pitchFamily="34" charset="-120"/>
+              </a:rPr>
+              <a:t>else:</a:t>
+            </a:r>
+            <a:endParaRPr lang="en-US" sz="1400" dirty="0"/>
+          </a:p>
+          <a:p>
+            <a:pPr indent="0" marL="0">
+              <a:lnSpc>
+                <a:spcPct val="105000"/>
+              </a:lnSpc>
+              <a:buNone/>
+            </a:pPr>
+            <a:r>
+              <a:rPr lang="en-US" sz="1400" dirty="0">
+                <a:solidFill>
+                  <a:srgbClr val="2B3242"/>
+                </a:solidFill>
+                <a:latin typeface="Pretendard" pitchFamily="34" charset="0"/>
+                <a:ea typeface="Pretendard" pitchFamily="34" charset="-122"/>
+                <a:cs typeface="Pretendard" pitchFamily="34" charset="-120"/>
+              </a:rPr>
+              <a:t>    todo.append(u)</a:t>
+            </a:r>
+            <a:endParaRPr lang="en-US" sz="1400" dirty="0"/>
+          </a:p>
+        </p:txBody>
+      </p:sp>
+      <p:sp>
+        <p:nvSpPr>
+          <p:cNvPr id="14" name="Shape 11"/>
           <p:cNvSpPr/>
           <p:nvPr/>
         </p:nvSpPr>
@@ -5338,21 +4982,19 @@
             </a:avLst>
           </a:prstGeom>
           <a:solidFill>
-            <a:srgbClr val="2E74C6"/>
+            <a:srgbClr val="F5F8FC"/>
           </a:solidFill>
-          <a:ln/>
-        </p:spPr>
-        <p:txBody>
-          <a:bodyPr/>
-          <a:lstStyle/>
-          <a:p>
-            <a:endParaRPr lang="ko-KR" altLang="en-US"/>
-          </a:p>
-        </p:txBody>
-      </p:sp>
-      <p:sp>
-        <p:nvSpPr>
-          <p:cNvPr id="14" name="Text 11"/>
+          <a:ln w="12700">
+            <a:solidFill>
+              <a:srgbClr val="D9E0EC"/>
+            </a:solidFill>
+            <a:prstDash val="solid"/>
+          </a:ln>
+        </p:spPr>
+      </p:sp>
+      <p:sp>
+        <p:nvSpPr>
+          <p:cNvPr id="15" name="Text 12"/>
           <p:cNvSpPr txBox="1"/>
           <p:nvPr/>
         </p:nvSpPr>
@@ -5371,7 +5013,7 @@
           <a:bodyPr wrap="square" lIns="635" tIns="635" rIns="635" bIns="635" rtlCol="0" anchor="ctr"/>
           <a:lstStyle/>
           <a:p>
-            <a:pPr marL="0" indent="0" algn="ctr">
+            <a:pPr algn="ctr" indent="0" marL="0">
               <a:spcAft>
                 <a:spcPts val="100"/>
               </a:spcAft>
@@ -5380,18 +5022,18 @@
             <a:r>
               <a:rPr lang="en-US" sz="1500" b="1" dirty="0">
                 <a:solidFill>
-                  <a:srgbClr val="FFFFFF"/>
-                </a:solidFill>
-                <a:latin typeface="Pretendard" pitchFamily="34" charset="0"/>
-                <a:ea typeface="Pretendard" pitchFamily="34" charset="-122"/>
-                <a:cs typeface="Pretendard" pitchFamily="34" charset="-120"/>
-              </a:rPr>
-              <a:t>노드 ID 앞에 단위 ID가 붙음</a:t>
+                  <a:srgbClr val="2B3242"/>
+                </a:solidFill>
+                <a:latin typeface="Pretendard" pitchFamily="34" charset="0"/>
+                <a:ea typeface="Pretendard" pitchFamily="34" charset="-122"/>
+                <a:cs typeface="Pretendard" pitchFamily="34" charset="-120"/>
+              </a:rPr>
+              <a:t>응답 다듬기 (GroqLLM._clean)</a:t>
             </a:r>
             <a:endParaRPr lang="en-US" sz="1500" dirty="0"/>
           </a:p>
           <a:p>
-            <a:pPr marL="0" indent="0" algn="ctr">
+            <a:pPr algn="ctr" indent="0" marL="0">
               <a:spcAft>
                 <a:spcPts val="100"/>
               </a:spcAft>
@@ -5400,13 +5042,13 @@
             <a:r>
               <a:rPr lang="en-US" sz="1400" dirty="0">
                 <a:solidFill>
-                  <a:srgbClr val="FFFFFF"/>
-                </a:solidFill>
-                <a:latin typeface="Pretendard" pitchFamily="34" charset="0"/>
-                <a:ea typeface="Pretendard" pitchFamily="34" charset="-122"/>
-                <a:cs typeface="Pretendard" pitchFamily="34" charset="-120"/>
-              </a:rPr>
-              <a:t>"3" → D3_C-20260501-003_…_0000:3</a:t>
+                  <a:srgbClr val="2B3242"/>
+                </a:solidFill>
+                <a:latin typeface="Pretendard" pitchFamily="34" charset="0"/>
+                <a:ea typeface="Pretendard" pitchFamily="34" charset="-122"/>
+                <a:cs typeface="Pretendard" pitchFamily="34" charset="-120"/>
+              </a:rPr>
+              <a:t>정해진 칸 밖 키 제거, id는 글자로, 빈 속성 제거</a:t>
             </a:r>
             <a:endParaRPr lang="en-US" sz="1500" dirty="0"/>
           </a:p>
@@ -5432,7 +5074,7 @@
           </a:prstGeom>
           <a:extLst>
             <a:ext uri="{C572A759-6A51-4108-AA02-DFA0A04FC94B}">
-              <ma14:wrappingTextBoxFlag xmlns:ma14="http://schemas.microsoft.com/office/mac/drawingml/2011/main" xmlns="" val="0"/>
+              <ma14:wrappingTextBoxFlag xmlns:ma14="http://schemas.microsoft.com/office/mac/drawingml/2011/main" val="0"/>
             </a:ext>
           </a:extLst>
         </p:spPr>
@@ -5453,7 +5095,7 @@
           <a:p>
             <a:pPr algn="r"/>
             <a:fld id="{F7021451-1387-4CA6-816F-3879F97B5CBC}" type="slidenum">
-              <a:rPr lang="en-US" b="0"/>
+              <a:rPr b="0" lang="en-US"/>
               <a:t>2</a:t>
             </a:fld>
             <a:endParaRPr lang="en-US"/>
@@ -5761,319 +5403,4 @@
     </a:ext>
   </a:extLst>
 </a:theme>
-</file>
-
-<file path=ppt/theme/theme2.xml><?xml version="1.0" encoding="utf-8"?>
-<a:theme xmlns:a="http://schemas.openxmlformats.org/drawingml/2006/main" name="Office 테마">
-  <a:themeElements>
-    <a:clrScheme name="Office">
-      <a:dk1>
-        <a:sysClr val="windowText" lastClr="000000"/>
-      </a:dk1>
-      <a:lt1>
-        <a:sysClr val="window" lastClr="FFFFFF"/>
-      </a:lt1>
-      <a:dk2>
-        <a:srgbClr val="0E2841"/>
-      </a:dk2>
-      <a:lt2>
-        <a:srgbClr val="E8E8E8"/>
-      </a:lt2>
-      <a:accent1>
-        <a:srgbClr val="156082"/>
-      </a:accent1>
-      <a:accent2>
-        <a:srgbClr val="E97132"/>
-      </a:accent2>
-      <a:accent3>
-        <a:srgbClr val="196B24"/>
-      </a:accent3>
-      <a:accent4>
-        <a:srgbClr val="0F9ED5"/>
-      </a:accent4>
-      <a:accent5>
-        <a:srgbClr val="A02B93"/>
-      </a:accent5>
-      <a:accent6>
-        <a:srgbClr val="4EA72E"/>
-      </a:accent6>
-      <a:hlink>
-        <a:srgbClr val="467886"/>
-      </a:hlink>
-      <a:folHlink>
-        <a:srgbClr val="96607D"/>
-      </a:folHlink>
-    </a:clrScheme>
-    <a:fontScheme name="Office">
-      <a:majorFont>
-        <a:latin typeface="맑은 고딕" panose="02110004020202020204"/>
-        <a:ea typeface=""/>
-        <a:cs typeface=""/>
-        <a:font script="Jpan" typeface="游ゴシック Light"/>
-        <a:font script="Hang" typeface="맑은 고딕"/>
-        <a:font script="Hans" typeface="等线 Light"/>
-        <a:font script="Hant" typeface="新細明體"/>
-        <a:font script="Arab" typeface="Times New Roman"/>
-        <a:font script="Hebr" typeface="Times New Roman"/>
-        <a:font script="Thai" typeface="Angsana New"/>
-        <a:font script="Ethi" typeface="Nyala"/>
-        <a:font script="Beng" typeface="Vrinda"/>
-        <a:font script="Gujr" typeface="Shruti"/>
-        <a:font script="Khmr" typeface="MoolBoran"/>
-        <a:font script="Knda" typeface="Tunga"/>
-        <a:font script="Guru" typeface="Raavi"/>
-        <a:font script="Cans" typeface="Euphemia"/>
-        <a:font script="Cher" typeface="Plantagenet Cherokee"/>
-        <a:font script="Yiii" typeface="Microsoft Yi Baiti"/>
-        <a:font script="Tibt" typeface="Microsoft Himalaya"/>
-        <a:font script="Thaa" typeface="MV Boli"/>
-        <a:font script="Deva" typeface="Mangal"/>
-        <a:font script="Telu" typeface="Gautami"/>
-        <a:font script="Taml" typeface="Latha"/>
-        <a:font script="Syrc" typeface="Estrangelo Edessa"/>
-        <a:font script="Orya" typeface="Kalinga"/>
-        <a:font script="Mlym" typeface="Kartika"/>
-        <a:font script="Laoo" typeface="DokChampa"/>
-        <a:font script="Sinh" typeface="Iskoola Pota"/>
-        <a:font script="Mong" typeface="Mongolian Baiti"/>
-        <a:font script="Viet" typeface="Times New Roman"/>
-        <a:font script="Uigh" typeface="Microsoft Uighur"/>
-        <a:font script="Geor" typeface="Sylfaen"/>
-        <a:font script="Armn" typeface="Arial"/>
-        <a:font script="Bugi" typeface="Leelawadee UI"/>
-        <a:font script="Bopo" typeface="Microsoft JhengHei"/>
-        <a:font script="Java" typeface="Javanese Text"/>
-        <a:font script="Lisu" typeface="Segoe UI"/>
-        <a:font script="Mymr" typeface="Myanmar Text"/>
-        <a:font script="Nkoo" typeface="Ebrima"/>
-        <a:font script="Olck" typeface="Nirmala UI"/>
-        <a:font script="Osma" typeface="Ebrima"/>
-        <a:font script="Phag" typeface="Phagspa"/>
-        <a:font script="Syrn" typeface="Estrangelo Edessa"/>
-        <a:font script="Syrj" typeface="Estrangelo Edessa"/>
-        <a:font script="Syre" typeface="Estrangelo Edessa"/>
-        <a:font script="Sora" typeface="Nirmala UI"/>
-        <a:font script="Tale" typeface="Microsoft Tai Le"/>
-        <a:font script="Talu" typeface="Microsoft New Tai Lue"/>
-        <a:font script="Tfng" typeface="Ebrima"/>
-      </a:majorFont>
-      <a:minorFont>
-        <a:latin typeface="맑은 고딕" panose="02110004020202020204"/>
-        <a:ea typeface=""/>
-        <a:cs typeface=""/>
-        <a:font script="Jpan" typeface="游ゴシック"/>
-        <a:font script="Hang" typeface="맑은 고딕"/>
-        <a:font script="Hans" typeface="等线"/>
-        <a:font script="Hant" typeface="新細明體"/>
-        <a:font script="Arab" typeface="Arial"/>
-        <a:font script="Hebr" typeface="Arial"/>
-        <a:font script="Thai" typeface="Cordia New"/>
-        <a:font script="Ethi" typeface="Nyala"/>
-        <a:font script="Beng" typeface="Vrinda"/>
-        <a:font script="Gujr" typeface="Shruti"/>
-        <a:font script="Khmr" typeface="DaunPenh"/>
-        <a:font script="Knda" typeface="Tunga"/>
-        <a:font script="Guru" typeface="Raavi"/>
-        <a:font script="Cans" typeface="Euphemia"/>
-        <a:font script="Cher" typeface="Plantagenet Cherokee"/>
-        <a:font script="Yiii" typeface="Microsoft Yi Baiti"/>
-        <a:font script="Tibt" typeface="Microsoft Himalaya"/>
-        <a:font script="Thaa" typeface="MV Boli"/>
-        <a:font script="Deva" typeface="Mangal"/>
-        <a:font script="Telu" typeface="Gautami"/>
-        <a:font script="Taml" typeface="Latha"/>
-        <a:font script="Syrc" typeface="Estrangelo Edessa"/>
-        <a:font script="Orya" typeface="Kalinga"/>
-        <a:font script="Mlym" typeface="Kartika"/>
-        <a:font script="Laoo" typeface="DokChampa"/>
-        <a:font script="Sinh" typeface="Iskoola Pota"/>
-        <a:font script="Mong" typeface="Mongolian Baiti"/>
-        <a:font script="Viet" typeface="Arial"/>
-        <a:font script="Uigh" typeface="Microsoft Uighur"/>
-        <a:font script="Geor" typeface="Sylfaen"/>
-        <a:font script="Armn" typeface="Arial"/>
-        <a:font script="Bugi" typeface="Leelawadee UI"/>
-        <a:font script="Bopo" typeface="Microsoft JhengHei"/>
-        <a:font script="Java" typeface="Javanese Text"/>
-        <a:font script="Lisu" typeface="Segoe UI"/>
-        <a:font script="Mymr" typeface="Myanmar Text"/>
-        <a:font script="Nkoo" typeface="Ebrima"/>
-        <a:font script="Olck" typeface="Nirmala UI"/>
-        <a:font script="Osma" typeface="Ebrima"/>
-        <a:font script="Phag" typeface="Phagspa"/>
-        <a:font script="Syrn" typeface="Estrangelo Edessa"/>
-        <a:font script="Syrj" typeface="Estrangelo Edessa"/>
-        <a:font script="Syre" typeface="Estrangelo Edessa"/>
-        <a:font script="Sora" typeface="Nirmala UI"/>
-        <a:font script="Tale" typeface="Microsoft Tai Le"/>
-        <a:font script="Talu" typeface="Microsoft New Tai Lue"/>
-        <a:font script="Tfng" typeface="Ebrima"/>
-      </a:minorFont>
-    </a:fontScheme>
-    <a:fmtScheme name="Office">
-      <a:fillStyleLst>
-        <a:solidFill>
-          <a:schemeClr val="phClr"/>
-        </a:solidFill>
-        <a:gradFill rotWithShape="1">
-          <a:gsLst>
-            <a:gs pos="0">
-              <a:schemeClr val="phClr">
-                <a:lumMod val="110000"/>
-                <a:satMod val="105000"/>
-                <a:tint val="67000"/>
-              </a:schemeClr>
-            </a:gs>
-            <a:gs pos="50000">
-              <a:schemeClr val="phClr">
-                <a:lumMod val="105000"/>
-                <a:satMod val="103000"/>
-                <a:tint val="73000"/>
-              </a:schemeClr>
-            </a:gs>
-            <a:gs pos="100000">
-              <a:schemeClr val="phClr">
-                <a:lumMod val="105000"/>
-                <a:satMod val="109000"/>
-                <a:tint val="81000"/>
-              </a:schemeClr>
-            </a:gs>
-          </a:gsLst>
-          <a:lin ang="5400000" scaled="0"/>
-        </a:gradFill>
-        <a:gradFill rotWithShape="1">
-          <a:gsLst>
-            <a:gs pos="0">
-              <a:schemeClr val="phClr">
-                <a:satMod val="103000"/>
-                <a:lumMod val="102000"/>
-                <a:tint val="94000"/>
-              </a:schemeClr>
-            </a:gs>
-            <a:gs pos="50000">
-              <a:schemeClr val="phClr">
-                <a:satMod val="110000"/>
-                <a:lumMod val="100000"/>
-                <a:shade val="100000"/>
-              </a:schemeClr>
-            </a:gs>
-            <a:gs pos="100000">
-              <a:schemeClr val="phClr">
-                <a:lumMod val="99000"/>
-                <a:satMod val="120000"/>
-                <a:shade val="78000"/>
-              </a:schemeClr>
-            </a:gs>
-          </a:gsLst>
-          <a:lin ang="5400000" scaled="0"/>
-        </a:gradFill>
-      </a:fillStyleLst>
-      <a:lnStyleLst>
-        <a:ln w="12700" cap="flat" cmpd="sng" algn="ctr">
-          <a:solidFill>
-            <a:schemeClr val="phClr"/>
-          </a:solidFill>
-          <a:prstDash val="solid"/>
-          <a:miter lim="800000"/>
-        </a:ln>
-        <a:ln w="19050" cap="flat" cmpd="sng" algn="ctr">
-          <a:solidFill>
-            <a:schemeClr val="phClr"/>
-          </a:solidFill>
-          <a:prstDash val="solid"/>
-          <a:miter lim="800000"/>
-        </a:ln>
-        <a:ln w="25400" cap="flat" cmpd="sng" algn="ctr">
-          <a:solidFill>
-            <a:schemeClr val="phClr"/>
-          </a:solidFill>
-          <a:prstDash val="solid"/>
-          <a:miter lim="800000"/>
-        </a:ln>
-      </a:lnStyleLst>
-      <a:effectStyleLst>
-        <a:effectStyle>
-          <a:effectLst/>
-        </a:effectStyle>
-        <a:effectStyle>
-          <a:effectLst/>
-        </a:effectStyle>
-        <a:effectStyle>
-          <a:effectLst>
-            <a:outerShdw blurRad="57150" dist="19050" dir="5400000" algn="ctr" rotWithShape="0">
-              <a:srgbClr val="000000">
-                <a:alpha val="63000"/>
-              </a:srgbClr>
-            </a:outerShdw>
-          </a:effectLst>
-        </a:effectStyle>
-      </a:effectStyleLst>
-      <a:bgFillStyleLst>
-        <a:solidFill>
-          <a:schemeClr val="phClr"/>
-        </a:solidFill>
-        <a:solidFill>
-          <a:schemeClr val="phClr">
-            <a:tint val="95000"/>
-            <a:satMod val="170000"/>
-          </a:schemeClr>
-        </a:solidFill>
-        <a:gradFill rotWithShape="1">
-          <a:gsLst>
-            <a:gs pos="0">
-              <a:schemeClr val="phClr">
-                <a:tint val="93000"/>
-                <a:satMod val="150000"/>
-                <a:shade val="98000"/>
-                <a:lumMod val="102000"/>
-              </a:schemeClr>
-            </a:gs>
-            <a:gs pos="50000">
-              <a:schemeClr val="phClr">
-                <a:tint val="98000"/>
-                <a:satMod val="130000"/>
-                <a:shade val="90000"/>
-                <a:lumMod val="103000"/>
-              </a:schemeClr>
-            </a:gs>
-            <a:gs pos="100000">
-              <a:schemeClr val="phClr">
-                <a:shade val="63000"/>
-                <a:satMod val="120000"/>
-              </a:schemeClr>
-            </a:gs>
-          </a:gsLst>
-          <a:lin ang="5400000" scaled="0"/>
-        </a:gradFill>
-      </a:bgFillStyleLst>
-    </a:fmtScheme>
-  </a:themeElements>
-  <a:objectDefaults>
-    <a:lnDef>
-      <a:spPr/>
-      <a:bodyPr/>
-      <a:lstStyle/>
-      <a:style>
-        <a:lnRef idx="2">
-          <a:schemeClr val="accent1"/>
-        </a:lnRef>
-        <a:fillRef idx="0">
-          <a:schemeClr val="accent1"/>
-        </a:fillRef>
-        <a:effectRef idx="1">
-          <a:schemeClr val="accent1"/>
-        </a:effectRef>
-        <a:fontRef idx="minor">
-          <a:schemeClr val="tx1"/>
-        </a:fontRef>
-      </a:style>
-    </a:lnDef>
-  </a:objectDefaults>
-  <a:extraClrSchemeLst/>
-  <a:extLst>
-    <a:ext uri="{05A4C25C-085E-4340-85A3-A5531E510DB2}">
-      <thm15:themeFamily xmlns:thm15="http://schemas.microsoft.com/office/thememl/2012/main" name="Office Theme" id="{2E142A2C-CD16-42D6-873A-C26D2A0506FA}" vid="{1BDDFF52-6CD6-40A5-AB3C-68EB2F1E4D0A}"/>
-    </a:ext>
-  </a:extLst>
-</a:theme>
 </file>
--- a/temp/k2-extraction/K2추출.pptx
+++ b/temp/k2-extraction/K2추출.pptx
@@ -505,7 +505,7 @@
               <a:rPr lang="en-US" dirty="0"/>
               <a:t>K2는 추출 단위 하나를 LLM에 넣어 노드와 관계를 받는 단계입니다. LLM에는 네 가지가 들어갑니다. 그 문서 유형의 graph_schema.json, 메타데이터 머리줄, 추출 단위 본문, 그리고 라이브러리의 기본 추출 지시입니다. 머리줄은 상담 번호나 날짜처럼 본문에 잘 드러나지 않는 키 속성을 채우려고 붙입니다.
 예시 상담에서 LLM은 상담사가 권한 두 방법을 제안 노드로, 고객이 말한 다시 문의할 조건을 재검토 조건 노드로 뽑고, 본문에 적힌 앞 상담 번호로 이전 상담과 이었습니다. 다만 같은 원문을 한 번 더 넣었더니 재검토 조건이 제안의 이유 속성으로 들어갔습니다. LLM은 부를 때마다 결과가 조금씩 다릅니다. 그래서 본문과 스키마가 그대로인 단위는 다시 묻지 않고 앞 결과를 씁니다.
-노드 ID 앞에 붙는 단위 ID는 단위끼리 ID가 겹치지 않게 하는 임시 표시입니다. 검색용 청크와 잇는 일은 K4에서 추출 단위 노드와 FROM_CHUNK 관계가 맡습니다.</a:t>
+뽑힌 그래프는 같은 함수 안에서 바로 K3 가지치기를 거쳐 스키마에 없는 것을 지웁니다. 검색용 청크와 잇는 일은 K4에서 추출 단위 노드와 FROM_CHUNK 관계가 맡습니다.</a:t>
             </a:r>
             <a:endParaRPr lang="en-US" dirty="0"/>
           </a:p>
@@ -593,8 +593,8 @@
           <a:p>
             <a:r>
               <a:rPr lang="en-US" dirty="0"/>
-              <a:t>추출기는 한 번만 만듭니다. 검색용 청크 노드는 만들지 않고, 오류가 나면 예외로 올리게 설정합니다. 단위마다 머리줄을 붙인 글을 TextChunk 하나로 감싸 넣는데, uid에 단위 ID를 줍니다. 그래서 돌려받은 노드 ID 앞에 단위 ID가 붙습니다.
-형식 오류는 같은 입력으로 두 번까지 다시 묻고, 그래도 안 되면 오류를 돌려줘 실패 목록에 남깁니다. 받은 그래프는 같은 함수에서 바로 가지치기를 하고, 결과를 kg_prepared.json에 보관합니다. 다음 실행에서는 본문 해시와 스키마 지문이 같으면 이 보관 결과를 그대로 씁니다.</a:t>
+              <a:t>추출기는 한 번만 만듭니다. 검색용 청크 노드는 만들지 않고, 오류가 나면 예외로 올리게 설정합니다. 단위마다 머리줄을 붙인 글을 TextChunk 하나로 감싸 넣습니다.
+형식 오류는 같은 입력으로 두 번까지 다시 묻고, 그래도 안 되면 오류를 돌려줘 실패 목록에 남깁니다. K2와 K3는 따로 도는 단계가 아니라 한 함수 안에서 함께 수행됩니다. 추출이 끝나면 같은 자리에서 바로 가지치기를 하고, 결과를 kg_prepared.json에 보관합니다. 다음 실행에서는 본문 해시와 스키마 지문이 같으면 이 보관 결과를 그대로 씁니다.</a:t>
             </a:r>
             <a:endParaRPr lang="en-US" dirty="0"/>
           </a:p>
@@ -1343,11 +1343,11 @@
         <p:spPr>
           <a:xfrm>
             <a:off x="509321" y="2194560"/>
-            <a:ext cx="4160520" cy="585216"/>
+            <a:ext cx="4160520" cy="859536"/>
           </a:xfrm>
           <a:prstGeom prst="roundRect">
             <a:avLst>
-              <a:gd name="adj" fmla="val 12500"/>
+              <a:gd name="adj" fmla="val 8511"/>
             </a:avLst>
           </a:prstGeom>
           <a:solidFill>
@@ -1370,7 +1370,7 @@
         <p:spPr>
           <a:xfrm>
             <a:off x="509321" y="2194560"/>
-            <a:ext cx="4160520" cy="585216"/>
+            <a:ext cx="4160520" cy="859536"/>
           </a:xfrm>
           <a:prstGeom prst="rect">
             <a:avLst/>
@@ -1389,7 +1389,7 @@
               <a:buNone/>
             </a:pPr>
             <a:r>
-              <a:rPr lang="en-US" sz="1500" b="1" dirty="0">
+              <a:rPr lang="en-US" sz="1700" b="1" dirty="0">
                 <a:solidFill>
                   <a:srgbClr val="1E2A5C"/>
                 </a:solidFill>
@@ -1397,9 +1397,9 @@
                 <a:ea typeface="Pretendard" pitchFamily="34" charset="-122"/>
                 <a:cs typeface="Pretendard" pitchFamily="34" charset="-120"/>
               </a:rPr>
-              <a:t>① 문서 유형별 graph_schema.json</a:t>
-            </a:r>
-            <a:endParaRPr lang="en-US" sz="1500" dirty="0"/>
+              <a:t>① 그래프 스키마 설계</a:t>
+            </a:r>
+            <a:endParaRPr lang="en-US" sz="1700" dirty="0"/>
           </a:p>
           <a:p>
             <a:pPr algn="l" indent="0" marL="0">
@@ -1409,7 +1409,7 @@
               <a:buNone/>
             </a:pPr>
             <a:r>
-              <a:rPr lang="en-US" sz="1400" dirty="0">
+              <a:rPr lang="en-US" sz="1500" dirty="0">
                 <a:solidFill>
                   <a:srgbClr val="1E2A5C"/>
                 </a:solidFill>
@@ -1417,9 +1417,9 @@
                 <a:ea typeface="Pretendard" pitchFamily="34" charset="-122"/>
                 <a:cs typeface="Pretendard" pitchFamily="34" charset="-120"/>
               </a:rPr>
-              <a:t>상담 기록: 노드 4, 관계 4와 해당, 비해당 설명</a:t>
-            </a:r>
-            <a:endParaRPr lang="en-US" sz="1500" dirty="0"/>
+              <a:t>문서유형별로 사전에 정의</a:t>
+            </a:r>
+            <a:endParaRPr lang="en-US" sz="1700" dirty="0"/>
           </a:p>
         </p:txBody>
       </p:sp>
@@ -1431,12 +1431,12 @@
         </p:nvSpPr>
         <p:spPr>
           <a:xfrm>
-            <a:off x="509321" y="2852928"/>
-            <a:ext cx="4160520" cy="585216"/>
+            <a:off x="509321" y="3145536"/>
+            <a:ext cx="4160520" cy="859536"/>
           </a:xfrm>
           <a:prstGeom prst="roundRect">
             <a:avLst>
-              <a:gd name="adj" fmla="val 12500"/>
+              <a:gd name="adj" fmla="val 8511"/>
             </a:avLst>
           </a:prstGeom>
           <a:solidFill>
@@ -1458,8 +1458,8 @@
         </p:nvSpPr>
         <p:spPr>
           <a:xfrm>
-            <a:off x="509321" y="2852928"/>
-            <a:ext cx="4160520" cy="585216"/>
+            <a:off x="509321" y="3145536"/>
+            <a:ext cx="4160520" cy="859536"/>
           </a:xfrm>
           <a:prstGeom prst="rect">
             <a:avLst/>
@@ -1478,7 +1478,7 @@
               <a:buNone/>
             </a:pPr>
             <a:r>
-              <a:rPr lang="en-US" sz="1500" b="1" dirty="0">
+              <a:rPr lang="en-US" sz="1700" b="1" dirty="0">
                 <a:solidFill>
                   <a:srgbClr val="2B3242"/>
                 </a:solidFill>
@@ -1486,9 +1486,9 @@
                 <a:ea typeface="Pretendard" pitchFamily="34" charset="-122"/>
                 <a:cs typeface="Pretendard" pitchFamily="34" charset="-120"/>
               </a:rPr>
-              <a:t>② 머리줄 (메타데이터 5칸)</a:t>
-            </a:r>
-            <a:endParaRPr lang="en-US" sz="1500" dirty="0"/>
+              <a:t>② 메타데이터</a:t>
+            </a:r>
+            <a:endParaRPr lang="en-US" sz="1700" dirty="0"/>
           </a:p>
           <a:p>
             <a:pPr algn="l" indent="0" marL="0">
@@ -1498,7 +1498,7 @@
               <a:buNone/>
             </a:pPr>
             <a:r>
-              <a:rPr lang="en-US" sz="1400" dirty="0">
+              <a:rPr lang="en-US" sz="1500" dirty="0">
                 <a:solidFill>
                   <a:srgbClr val="2B3242"/>
                 </a:solidFill>
@@ -1506,9 +1506,9 @@
                 <a:ea typeface="Pretendard" pitchFamily="34" charset="-122"/>
                 <a:cs typeface="Pretendard" pitchFamily="34" charset="-120"/>
               </a:rPr>
-              <a:t>record_id, 상담일, 채널, 주제, 가명 회원 키</a:t>
-            </a:r>
-            <a:endParaRPr lang="en-US" sz="1500" dirty="0"/>
+              <a:t>예: record_id, 상담일, 채널, 주제, 가명 회원 키</a:t>
+            </a:r>
+            <a:endParaRPr lang="en-US" sz="1700" dirty="0"/>
           </a:p>
         </p:txBody>
       </p:sp>
@@ -1520,12 +1520,12 @@
         </p:nvSpPr>
         <p:spPr>
           <a:xfrm>
-            <a:off x="509321" y="3511296"/>
-            <a:ext cx="4160520" cy="585216"/>
+            <a:off x="509321" y="4096512"/>
+            <a:ext cx="4160520" cy="859536"/>
           </a:xfrm>
           <a:prstGeom prst="roundRect">
             <a:avLst>
-              <a:gd name="adj" fmla="val 12500"/>
+              <a:gd name="adj" fmla="val 8511"/>
             </a:avLst>
           </a:prstGeom>
           <a:solidFill>
@@ -1547,8 +1547,8 @@
         </p:nvSpPr>
         <p:spPr>
           <a:xfrm>
-            <a:off x="509321" y="3511296"/>
-            <a:ext cx="4160520" cy="585216"/>
+            <a:off x="509321" y="4096512"/>
+            <a:ext cx="4160520" cy="859536"/>
           </a:xfrm>
           <a:prstGeom prst="rect">
             <a:avLst/>
@@ -1567,7 +1567,7 @@
               <a:buNone/>
             </a:pPr>
             <a:r>
-              <a:rPr lang="en-US" sz="1500" b="1" dirty="0">
+              <a:rPr lang="en-US" sz="1700" b="1" dirty="0">
                 <a:solidFill>
                   <a:srgbClr val="2B3242"/>
                 </a:solidFill>
@@ -1575,9 +1575,9 @@
                 <a:ea typeface="Pretendard" pitchFamily="34" charset="-122"/>
                 <a:cs typeface="Pretendard" pitchFamily="34" charset="-120"/>
               </a:rPr>
-              <a:t>③ 추출 단위 본문 (K1 결과)</a:t>
-            </a:r>
-            <a:endParaRPr lang="en-US" sz="1500" dirty="0"/>
+              <a:t>③ 추출 단위 본문</a:t>
+            </a:r>
+            <a:endParaRPr lang="en-US" sz="1700" dirty="0"/>
           </a:p>
           <a:p>
             <a:pPr algn="l" indent="0" marL="0">
@@ -1587,7 +1587,7 @@
               <a:buNone/>
             </a:pPr>
             <a:r>
-              <a:rPr lang="en-US" sz="1400" dirty="0">
+              <a:rPr lang="en-US" sz="1500" dirty="0">
                 <a:solidFill>
                   <a:srgbClr val="2B3242"/>
                 </a:solidFill>
@@ -1595,9 +1595,9 @@
                 <a:ea typeface="Pretendard" pitchFamily="34" charset="-122"/>
                 <a:cs typeface="Pretendard" pitchFamily="34" charset="-120"/>
               </a:rPr>
-              <a:t>상담은 검색용 청크 1개가 곧 단위 1개</a:t>
-            </a:r>
-            <a:endParaRPr lang="en-US" sz="1500" dirty="0"/>
+              <a:t>예: 조항 1건, 상담 1건</a:t>
+            </a:r>
+            <a:endParaRPr lang="en-US" sz="1700" dirty="0"/>
           </a:p>
         </p:txBody>
       </p:sp>
@@ -1609,12 +1609,12 @@
         </p:nvSpPr>
         <p:spPr>
           <a:xfrm>
-            <a:off x="509321" y="4169664"/>
-            <a:ext cx="4160520" cy="585216"/>
+            <a:off x="509321" y="5047488"/>
+            <a:ext cx="4160520" cy="859536"/>
           </a:xfrm>
           <a:prstGeom prst="roundRect">
             <a:avLst>
-              <a:gd name="adj" fmla="val 12500"/>
+              <a:gd name="adj" fmla="val 8511"/>
             </a:avLst>
           </a:prstGeom>
           <a:solidFill>
@@ -1636,8 +1636,8 @@
         </p:nvSpPr>
         <p:spPr>
           <a:xfrm>
-            <a:off x="509321" y="4169664"/>
-            <a:ext cx="4160520" cy="585216"/>
+            <a:off x="509321" y="5047488"/>
+            <a:ext cx="4160520" cy="859536"/>
           </a:xfrm>
           <a:prstGeom prst="rect">
             <a:avLst/>
@@ -1656,7 +1656,7 @@
               <a:buNone/>
             </a:pPr>
             <a:r>
-              <a:rPr lang="en-US" sz="1500" b="1" dirty="0">
+              <a:rPr lang="en-US" sz="1700" b="1" dirty="0">
                 <a:solidFill>
                   <a:srgbClr val="2B3242"/>
                 </a:solidFill>
@@ -1664,9 +1664,9 @@
                 <a:ea typeface="Pretendard" pitchFamily="34" charset="-122"/>
                 <a:cs typeface="Pretendard" pitchFamily="34" charset="-120"/>
               </a:rPr>
-              <a:t>④ 추출 지시 (라이브러리 기본)</a:t>
-            </a:r>
-            <a:endParaRPr lang="en-US" sz="1500" dirty="0"/>
+              <a:t>④ 추출 지시</a:t>
+            </a:r>
+            <a:endParaRPr lang="en-US" sz="1700" dirty="0"/>
           </a:p>
           <a:p>
             <a:pPr algn="l" indent="0" marL="0">
@@ -1676,7 +1676,7 @@
               <a:buNone/>
             </a:pPr>
             <a:r>
-              <a:rPr lang="en-US" sz="1400" dirty="0">
+              <a:rPr lang="en-US" sz="1500" dirty="0">
                 <a:solidFill>
                   <a:srgbClr val="2B3242"/>
                 </a:solidFill>
@@ -1684,9 +1684,9 @@
                 <a:ea typeface="Pretendard" pitchFamily="34" charset="-122"/>
                 <a:cs typeface="Pretendard" pitchFamily="34" charset="-120"/>
               </a:rPr>
-              <a:t>JSON으로, 주어진 타입만, 관계 방향 지킴</a:t>
-            </a:r>
-            <a:endParaRPr lang="en-US" sz="1500" dirty="0"/>
+              <a:t>neo4j-graphrag라이브러리의 프롬프트 그대로 사용</a:t>
+            </a:r>
+            <a:endParaRPr lang="en-US" sz="1700" dirty="0"/>
           </a:p>
         </p:txBody>
       </p:sp>
@@ -1698,8 +1698,8 @@
         </p:nvSpPr>
         <p:spPr>
           <a:xfrm>
-            <a:off x="4989881" y="2377440"/>
-            <a:ext cx="1600200" cy="2103120"/>
+            <a:off x="4989881" y="2679192"/>
+            <a:ext cx="1600200" cy="2743200"/>
           </a:xfrm>
           <a:prstGeom prst="roundRect">
             <a:avLst>
@@ -1720,8 +1720,8 @@
         </p:nvSpPr>
         <p:spPr>
           <a:xfrm>
-            <a:off x="4989881" y="2377440"/>
-            <a:ext cx="1600200" cy="2103120"/>
+            <a:off x="4989881" y="2679192"/>
+            <a:ext cx="1600200" cy="2743200"/>
           </a:xfrm>
           <a:prstGeom prst="rect">
             <a:avLst/>
@@ -1740,7 +1740,7 @@
               <a:buNone/>
             </a:pPr>
             <a:r>
-              <a:rPr lang="en-US" sz="2000" b="1" dirty="0">
+              <a:rPr lang="en-US" sz="2400" b="1" dirty="0">
                 <a:solidFill>
                   <a:srgbClr val="FFFFFF"/>
                 </a:solidFill>
@@ -1750,7 +1750,7 @@
               </a:rPr>
               <a:t>LLM</a:t>
             </a:r>
-            <a:endParaRPr lang="en-US" sz="2000" dirty="0"/>
+            <a:endParaRPr lang="en-US" sz="2400" dirty="0"/>
           </a:p>
           <a:p>
             <a:pPr algn="ctr" indent="0" marL="0">
@@ -1760,7 +1760,7 @@
               <a:buNone/>
             </a:pPr>
             <a:r>
-              <a:rPr lang="en-US" sz="1400" dirty="0">
+              <a:rPr lang="en-US" sz="1600" dirty="0">
                 <a:solidFill>
                   <a:srgbClr val="FFFFFF"/>
                 </a:solidFill>
@@ -1770,7 +1770,7 @@
               </a:rPr>
               <a:t>gpt-oss-120b</a:t>
             </a:r>
-            <a:endParaRPr lang="en-US" sz="2000" dirty="0"/>
+            <a:endParaRPr lang="en-US" sz="2400" dirty="0"/>
           </a:p>
           <a:p>
             <a:pPr algn="ctr" indent="0" marL="0">
@@ -1780,7 +1780,7 @@
               <a:buNone/>
             </a:pPr>
             <a:r>
-              <a:rPr lang="en-US" sz="1400" dirty="0">
+              <a:rPr lang="en-US" sz="1600" dirty="0">
                 <a:solidFill>
                   <a:srgbClr val="FFFFFF"/>
                 </a:solidFill>
@@ -1790,7 +1790,7 @@
               </a:rPr>
               <a:t>(Groq)</a:t>
             </a:r>
-            <a:endParaRPr lang="en-US" sz="2000" dirty="0"/>
+            <a:endParaRPr lang="en-US" sz="2400" dirty="0"/>
           </a:p>
           <a:p>
             <a:pPr algn="ctr" indent="0" marL="0">
@@ -1800,7 +1800,7 @@
               <a:buNone/>
             </a:pPr>
             <a:r>
-              <a:rPr lang="en-US" sz="1400" dirty="0">
+              <a:rPr lang="en-US" sz="1600" dirty="0">
                 <a:solidFill>
                   <a:srgbClr val="FFFFFF"/>
                 </a:solidFill>
@@ -1810,7 +1810,7 @@
               </a:rPr>
               <a:t>단위 하나에 1번</a:t>
             </a:r>
-            <a:endParaRPr lang="en-US" sz="2000" dirty="0"/>
+            <a:endParaRPr lang="en-US" sz="2400" dirty="0"/>
           </a:p>
           <a:p>
             <a:pPr algn="ctr" indent="0" marL="0">
@@ -1820,7 +1820,7 @@
               <a:buNone/>
             </a:pPr>
             <a:r>
-              <a:rPr lang="en-US" sz="1400" dirty="0">
+              <a:rPr lang="en-US" sz="1600" dirty="0">
                 <a:solidFill>
                   <a:srgbClr val="FFFFFF"/>
                 </a:solidFill>
@@ -1830,7 +1830,7 @@
               </a:rPr>
               <a:t>동시 4건</a:t>
             </a:r>
-            <a:endParaRPr lang="en-US" sz="2000" dirty="0"/>
+            <a:endParaRPr lang="en-US" sz="2400" dirty="0"/>
           </a:p>
         </p:txBody>
       </p:sp>
@@ -1842,7 +1842,7 @@
         </p:nvSpPr>
         <p:spPr>
           <a:xfrm>
-            <a:off x="4706417" y="3429000"/>
+            <a:off x="4706417" y="4050792"/>
             <a:ext cx="246888" cy="0"/>
           </a:xfrm>
           <a:prstGeom prst="line">
@@ -1866,7 +1866,7 @@
         </p:nvSpPr>
         <p:spPr>
           <a:xfrm>
-            <a:off x="6626657" y="3429000"/>
+            <a:off x="6626657" y="4050792"/>
             <a:ext cx="246888" cy="0"/>
           </a:xfrm>
           <a:prstGeom prst="line">
@@ -1937,7 +1937,7 @@
                 <a:ea typeface="Pretendard" pitchFamily="34" charset="-122"/>
                 <a:cs typeface="Pretendard" pitchFamily="34" charset="-120"/>
               </a:rPr>
-              <a:t>나온 그래프 (v0 표본 실행, 상담 C-20260501-003)</a:t>
+              <a:t>나온 그래프 (상담 C-20260501-003 예시)</a:t>
             </a:r>
             <a:endParaRPr lang="en-US" sz="1600" dirty="0"/>
           </a:p>
@@ -1952,11 +1952,11 @@
         <p:spPr>
           <a:xfrm>
             <a:off x="6910121" y="2194560"/>
-            <a:ext cx="2331720" cy="585216"/>
+            <a:ext cx="2331720" cy="859536"/>
           </a:xfrm>
           <a:prstGeom prst="roundRect">
             <a:avLst>
-              <a:gd name="adj" fmla="val 12500"/>
+              <a:gd name="adj" fmla="val 8511"/>
             </a:avLst>
           </a:prstGeom>
           <a:solidFill>
@@ -1979,7 +1979,7 @@
         <p:spPr>
           <a:xfrm>
             <a:off x="6910121" y="2194560"/>
-            <a:ext cx="2331720" cy="585216"/>
+            <a:ext cx="2331720" cy="859536"/>
           </a:xfrm>
           <a:prstGeom prst="rect">
             <a:avLst/>
@@ -1998,7 +1998,7 @@
               <a:buNone/>
             </a:pPr>
             <a:r>
-              <a:rPr lang="en-US" sz="1400" b="1" dirty="0">
+              <a:rPr lang="en-US" sz="1600" b="1" dirty="0">
                 <a:solidFill>
                   <a:srgbClr val="2B3242"/>
                 </a:solidFill>
@@ -2008,7 +2008,7 @@
               </a:rPr>
               <a:t>Consultation</a:t>
             </a:r>
-            <a:endParaRPr lang="en-US" sz="1400" dirty="0"/>
+            <a:endParaRPr lang="en-US" sz="1600" dirty="0"/>
           </a:p>
           <a:p>
             <a:pPr algn="ctr" indent="0" marL="0">
@@ -2028,7 +2028,7 @@
               </a:rPr>
               <a:t>C-20260501-003, 콜센터</a:t>
             </a:r>
-            <a:endParaRPr lang="en-US" sz="1400" dirty="0"/>
+            <a:endParaRPr lang="en-US" sz="1600" dirty="0"/>
           </a:p>
         </p:txBody>
       </p:sp>
@@ -2040,7 +2040,7 @@
         </p:nvSpPr>
         <p:spPr>
           <a:xfrm>
-            <a:off x="9269273" y="2487168"/>
+            <a:off x="9269273" y="2624328"/>
             <a:ext cx="82296" cy="0"/>
           </a:xfrm>
           <a:prstGeom prst="line">
@@ -2064,8 +2064,8 @@
         </p:nvSpPr>
         <p:spPr>
           <a:xfrm>
-            <a:off x="9379001" y="2304288"/>
-            <a:ext cx="1874520" cy="365760"/>
+            <a:off x="9379001" y="2432304"/>
+            <a:ext cx="1874520" cy="384048"/>
           </a:xfrm>
           <a:prstGeom prst="roundRect">
             <a:avLst>
@@ -2091,8 +2091,8 @@
         </p:nvSpPr>
         <p:spPr>
           <a:xfrm>
-            <a:off x="9379001" y="2304288"/>
-            <a:ext cx="1874520" cy="365760"/>
+            <a:off x="9379001" y="2432304"/>
+            <a:ext cx="1874520" cy="384048"/>
           </a:xfrm>
           <a:prstGeom prst="rect">
             <a:avLst/>
@@ -2130,7 +2130,7 @@
         </p:nvSpPr>
         <p:spPr>
           <a:xfrm>
-            <a:off x="11271809" y="2487168"/>
+            <a:off x="11271809" y="2624328"/>
             <a:ext cx="91440" cy="0"/>
           </a:xfrm>
           <a:prstGeom prst="line">
@@ -2155,11 +2155,11 @@
         <p:spPr>
           <a:xfrm>
             <a:off x="11390681" y="2194560"/>
-            <a:ext cx="2743200" cy="585216"/>
+            <a:ext cx="2743200" cy="859536"/>
           </a:xfrm>
           <a:prstGeom prst="roundRect">
             <a:avLst>
-              <a:gd name="adj" fmla="val 12500"/>
+              <a:gd name="adj" fmla="val 8511"/>
             </a:avLst>
           </a:prstGeom>
           <a:solidFill>
@@ -2182,7 +2182,7 @@
         <p:spPr>
           <a:xfrm>
             <a:off x="11390681" y="2194560"/>
-            <a:ext cx="2743200" cy="585216"/>
+            <a:ext cx="2743200" cy="859536"/>
           </a:xfrm>
           <a:prstGeom prst="rect">
             <a:avLst/>
@@ -2201,7 +2201,7 @@
               <a:buNone/>
             </a:pPr>
             <a:r>
-              <a:rPr lang="en-US" sz="1400" b="1" dirty="0">
+              <a:rPr lang="en-US" sz="1600" b="1" dirty="0">
                 <a:solidFill>
                   <a:srgbClr val="1E2A5C"/>
                 </a:solidFill>
@@ -2211,7 +2211,7 @@
               </a:rPr>
               <a:t>Proposal</a:t>
             </a:r>
-            <a:endParaRPr lang="en-US" sz="1400" dirty="0"/>
+            <a:endParaRPr lang="en-US" sz="1600" dirty="0"/>
           </a:p>
           <a:p>
             <a:pPr algn="ctr" indent="0" marL="0">
@@ -2231,7 +2231,7 @@
               </a:rPr>
               <a:t>종이 영수증 대조 (거절)</a:t>
             </a:r>
-            <a:endParaRPr lang="en-US" sz="1400" dirty="0"/>
+            <a:endParaRPr lang="en-US" sz="1600" dirty="0"/>
           </a:p>
         </p:txBody>
       </p:sp>
@@ -2243,12 +2243,12 @@
         </p:nvSpPr>
         <p:spPr>
           <a:xfrm>
-            <a:off x="6910121" y="2852928"/>
-            <a:ext cx="2331720" cy="585216"/>
+            <a:off x="6910121" y="3145536"/>
+            <a:ext cx="2331720" cy="859536"/>
           </a:xfrm>
           <a:prstGeom prst="roundRect">
             <a:avLst>
-              <a:gd name="adj" fmla="val 12500"/>
+              <a:gd name="adj" fmla="val 8511"/>
             </a:avLst>
           </a:prstGeom>
           <a:solidFill>
@@ -2270,8 +2270,8 @@
         </p:nvSpPr>
         <p:spPr>
           <a:xfrm>
-            <a:off x="6910121" y="2852928"/>
-            <a:ext cx="2331720" cy="585216"/>
+            <a:off x="6910121" y="3145536"/>
+            <a:ext cx="2331720" cy="859536"/>
           </a:xfrm>
           <a:prstGeom prst="rect">
             <a:avLst/>
@@ -2290,7 +2290,7 @@
               <a:buNone/>
             </a:pPr>
             <a:r>
-              <a:rPr lang="en-US" sz="1400" b="1" dirty="0">
+              <a:rPr lang="en-US" sz="1600" b="1" dirty="0">
                 <a:solidFill>
                   <a:srgbClr val="2B3242"/>
                 </a:solidFill>
@@ -2300,7 +2300,7 @@
               </a:rPr>
               <a:t>Consultation</a:t>
             </a:r>
-            <a:endParaRPr lang="en-US" sz="1400" dirty="0"/>
+            <a:endParaRPr lang="en-US" sz="1600" dirty="0"/>
           </a:p>
           <a:p>
             <a:pPr algn="ctr" indent="0" marL="0">
@@ -2320,7 +2320,7 @@
               </a:rPr>
               <a:t>C-20260501-003</a:t>
             </a:r>
-            <a:endParaRPr lang="en-US" sz="1400" dirty="0"/>
+            <a:endParaRPr lang="en-US" sz="1600" dirty="0"/>
           </a:p>
         </p:txBody>
       </p:sp>
@@ -2332,7 +2332,7 @@
         </p:nvSpPr>
         <p:spPr>
           <a:xfrm>
-            <a:off x="9269273" y="3145536"/>
+            <a:off x="9269273" y="3575304"/>
             <a:ext cx="82296" cy="0"/>
           </a:xfrm>
           <a:prstGeom prst="line">
@@ -2356,8 +2356,8 @@
         </p:nvSpPr>
         <p:spPr>
           <a:xfrm>
-            <a:off x="9379001" y="2962656"/>
-            <a:ext cx="1874520" cy="365760"/>
+            <a:off x="9379001" y="3383280"/>
+            <a:ext cx="1874520" cy="384048"/>
           </a:xfrm>
           <a:prstGeom prst="roundRect">
             <a:avLst>
@@ -2383,8 +2383,8 @@
         </p:nvSpPr>
         <p:spPr>
           <a:xfrm>
-            <a:off x="9379001" y="2962656"/>
-            <a:ext cx="1874520" cy="365760"/>
+            <a:off x="9379001" y="3383280"/>
+            <a:ext cx="1874520" cy="384048"/>
           </a:xfrm>
           <a:prstGeom prst="rect">
             <a:avLst/>
@@ -2422,7 +2422,7 @@
         </p:nvSpPr>
         <p:spPr>
           <a:xfrm>
-            <a:off x="11271809" y="3145536"/>
+            <a:off x="11271809" y="3575304"/>
             <a:ext cx="91440" cy="0"/>
           </a:xfrm>
           <a:prstGeom prst="line">
@@ -2446,12 +2446,12 @@
         </p:nvSpPr>
         <p:spPr>
           <a:xfrm>
-            <a:off x="11390681" y="2852928"/>
-            <a:ext cx="2743200" cy="585216"/>
+            <a:off x="11390681" y="3145536"/>
+            <a:ext cx="2743200" cy="859536"/>
           </a:xfrm>
           <a:prstGeom prst="roundRect">
             <a:avLst>
-              <a:gd name="adj" fmla="val 12500"/>
+              <a:gd name="adj" fmla="val 8511"/>
             </a:avLst>
           </a:prstGeom>
           <a:solidFill>
@@ -2473,8 +2473,8 @@
         </p:nvSpPr>
         <p:spPr>
           <a:xfrm>
-            <a:off x="11390681" y="2852928"/>
-            <a:ext cx="2743200" cy="585216"/>
+            <a:off x="11390681" y="3145536"/>
+            <a:ext cx="2743200" cy="859536"/>
           </a:xfrm>
           <a:prstGeom prst="rect">
             <a:avLst/>
@@ -2493,7 +2493,7 @@
               <a:buNone/>
             </a:pPr>
             <a:r>
-              <a:rPr lang="en-US" sz="1400" b="1" dirty="0">
+              <a:rPr lang="en-US" sz="1600" b="1" dirty="0">
                 <a:solidFill>
                   <a:srgbClr val="1E2A5C"/>
                 </a:solidFill>
@@ -2503,7 +2503,7 @@
               </a:rPr>
               <a:t>Proposal</a:t>
             </a:r>
-            <a:endParaRPr lang="en-US" sz="1400" dirty="0"/>
+            <a:endParaRPr lang="en-US" sz="1600" dirty="0"/>
           </a:p>
           <a:p>
             <a:pPr algn="ctr" indent="0" marL="0">
@@ -2523,7 +2523,7 @@
               </a:rPr>
               <a:t>주문 내역 화면 대조 (수용)</a:t>
             </a:r>
-            <a:endParaRPr lang="en-US" sz="1400" dirty="0"/>
+            <a:endParaRPr lang="en-US" sz="1600" dirty="0"/>
           </a:p>
         </p:txBody>
       </p:sp>
@@ -2535,12 +2535,12 @@
         </p:nvSpPr>
         <p:spPr>
           <a:xfrm>
-            <a:off x="6910121" y="3511296"/>
-            <a:ext cx="2331720" cy="585216"/>
+            <a:off x="6910121" y="4096512"/>
+            <a:ext cx="2331720" cy="859536"/>
           </a:xfrm>
           <a:prstGeom prst="roundRect">
             <a:avLst>
-              <a:gd name="adj" fmla="val 12500"/>
+              <a:gd name="adj" fmla="val 8511"/>
             </a:avLst>
           </a:prstGeom>
           <a:solidFill>
@@ -2562,8 +2562,8 @@
         </p:nvSpPr>
         <p:spPr>
           <a:xfrm>
-            <a:off x="6910121" y="3511296"/>
-            <a:ext cx="2331720" cy="585216"/>
+            <a:off x="6910121" y="4096512"/>
+            <a:ext cx="2331720" cy="859536"/>
           </a:xfrm>
           <a:prstGeom prst="rect">
             <a:avLst/>
@@ -2582,7 +2582,7 @@
               <a:buNone/>
             </a:pPr>
             <a:r>
-              <a:rPr lang="en-US" sz="1400" b="1" dirty="0">
+              <a:rPr lang="en-US" sz="1600" b="1" dirty="0">
                 <a:solidFill>
                   <a:srgbClr val="2B3242"/>
                 </a:solidFill>
@@ -2592,7 +2592,7 @@
               </a:rPr>
               <a:t>Proposal</a:t>
             </a:r>
-            <a:endParaRPr lang="en-US" sz="1400" dirty="0"/>
+            <a:endParaRPr lang="en-US" sz="1600" dirty="0"/>
           </a:p>
           <a:p>
             <a:pPr algn="ctr" indent="0" marL="0">
@@ -2612,7 +2612,7 @@
               </a:rPr>
               <a:t>주문 내역 화면 대조</a:t>
             </a:r>
-            <a:endParaRPr lang="en-US" sz="1400" dirty="0"/>
+            <a:endParaRPr lang="en-US" sz="1600" dirty="0"/>
           </a:p>
         </p:txBody>
       </p:sp>
@@ -2624,7 +2624,7 @@
         </p:nvSpPr>
         <p:spPr>
           <a:xfrm>
-            <a:off x="9269273" y="3803904"/>
+            <a:off x="9269273" y="4526280"/>
             <a:ext cx="82296" cy="0"/>
           </a:xfrm>
           <a:prstGeom prst="line">
@@ -2648,8 +2648,8 @@
         </p:nvSpPr>
         <p:spPr>
           <a:xfrm>
-            <a:off x="9379001" y="3621024"/>
-            <a:ext cx="1874520" cy="365760"/>
+            <a:off x="9379001" y="4334256"/>
+            <a:ext cx="1874520" cy="384048"/>
           </a:xfrm>
           <a:prstGeom prst="roundRect">
             <a:avLst>
@@ -2675,8 +2675,8 @@
         </p:nvSpPr>
         <p:spPr>
           <a:xfrm>
-            <a:off x="9379001" y="3621024"/>
-            <a:ext cx="1874520" cy="365760"/>
+            <a:off x="9379001" y="4334256"/>
+            <a:ext cx="1874520" cy="384048"/>
           </a:xfrm>
           <a:prstGeom prst="rect">
             <a:avLst/>
@@ -2714,7 +2714,7 @@
         </p:nvSpPr>
         <p:spPr>
           <a:xfrm>
-            <a:off x="11271809" y="3803904"/>
+            <a:off x="11271809" y="4526280"/>
             <a:ext cx="91440" cy="0"/>
           </a:xfrm>
           <a:prstGeom prst="line">
@@ -2738,12 +2738,12 @@
         </p:nvSpPr>
         <p:spPr>
           <a:xfrm>
-            <a:off x="11390681" y="3511296"/>
-            <a:ext cx="2743200" cy="585216"/>
+            <a:off x="11390681" y="4096512"/>
+            <a:ext cx="2743200" cy="859536"/>
           </a:xfrm>
           <a:prstGeom prst="roundRect">
             <a:avLst>
-              <a:gd name="adj" fmla="val 12500"/>
+              <a:gd name="adj" fmla="val 8511"/>
             </a:avLst>
           </a:prstGeom>
           <a:solidFill>
@@ -2765,8 +2765,8 @@
         </p:nvSpPr>
         <p:spPr>
           <a:xfrm>
-            <a:off x="11390681" y="3511296"/>
-            <a:ext cx="2743200" cy="585216"/>
+            <a:off x="11390681" y="4096512"/>
+            <a:ext cx="2743200" cy="859536"/>
           </a:xfrm>
           <a:prstGeom prst="rect">
             <a:avLst/>
@@ -2785,7 +2785,7 @@
               <a:buNone/>
             </a:pPr>
             <a:r>
-              <a:rPr lang="en-US" sz="1400" b="1" dirty="0">
+              <a:rPr lang="en-US" sz="1600" b="1" dirty="0">
                 <a:solidFill>
                   <a:srgbClr val="1E2A5C"/>
                 </a:solidFill>
@@ -2795,7 +2795,7 @@
               </a:rPr>
               <a:t>ReconsiderCondition</a:t>
             </a:r>
-            <a:endParaRPr lang="en-US" sz="1400" dirty="0"/>
+            <a:endParaRPr lang="en-US" sz="1600" dirty="0"/>
           </a:p>
           <a:p>
             <a:pPr algn="ctr" indent="0" marL="0">
@@ -2815,7 +2815,7 @@
               </a:rPr>
               <a:t>다음 명세서 나올 때 다시 문의</a:t>
             </a:r>
-            <a:endParaRPr lang="en-US" sz="1400" dirty="0"/>
+            <a:endParaRPr lang="en-US" sz="1600" dirty="0"/>
           </a:p>
         </p:txBody>
       </p:sp>
@@ -2827,12 +2827,12 @@
         </p:nvSpPr>
         <p:spPr>
           <a:xfrm>
-            <a:off x="6910121" y="4169664"/>
-            <a:ext cx="2331720" cy="585216"/>
+            <a:off x="6910121" y="5047488"/>
+            <a:ext cx="2331720" cy="859536"/>
           </a:xfrm>
           <a:prstGeom prst="roundRect">
             <a:avLst>
-              <a:gd name="adj" fmla="val 12500"/>
+              <a:gd name="adj" fmla="val 8511"/>
             </a:avLst>
           </a:prstGeom>
           <a:solidFill>
@@ -2854,8 +2854,8 @@
         </p:nvSpPr>
         <p:spPr>
           <a:xfrm>
-            <a:off x="6910121" y="4169664"/>
-            <a:ext cx="2331720" cy="585216"/>
+            <a:off x="6910121" y="5047488"/>
+            <a:ext cx="2331720" cy="859536"/>
           </a:xfrm>
           <a:prstGeom prst="rect">
             <a:avLst/>
@@ -2874,7 +2874,7 @@
               <a:buNone/>
             </a:pPr>
             <a:r>
-              <a:rPr lang="en-US" sz="1400" b="1" dirty="0">
+              <a:rPr lang="en-US" sz="1600" b="1" dirty="0">
                 <a:solidFill>
                   <a:srgbClr val="2B3242"/>
                 </a:solidFill>
@@ -2884,7 +2884,7 @@
               </a:rPr>
               <a:t>Consultation</a:t>
             </a:r>
-            <a:endParaRPr lang="en-US" sz="1400" dirty="0"/>
+            <a:endParaRPr lang="en-US" sz="1600" dirty="0"/>
           </a:p>
           <a:p>
             <a:pPr algn="ctr" indent="0" marL="0">
@@ -2904,7 +2904,7 @@
               </a:rPr>
               <a:t>C-20260501-003</a:t>
             </a:r>
-            <a:endParaRPr lang="en-US" sz="1400" dirty="0"/>
+            <a:endParaRPr lang="en-US" sz="1600" dirty="0"/>
           </a:p>
         </p:txBody>
       </p:sp>
@@ -2916,7 +2916,7 @@
         </p:nvSpPr>
         <p:spPr>
           <a:xfrm>
-            <a:off x="9269273" y="4462272"/>
+            <a:off x="9269273" y="5477256"/>
             <a:ext cx="82296" cy="0"/>
           </a:xfrm>
           <a:prstGeom prst="line">
@@ -2940,8 +2940,8 @@
         </p:nvSpPr>
         <p:spPr>
           <a:xfrm>
-            <a:off x="9379001" y="4279392"/>
-            <a:ext cx="1874520" cy="365760"/>
+            <a:off x="9379001" y="5285232"/>
+            <a:ext cx="1874520" cy="384048"/>
           </a:xfrm>
           <a:prstGeom prst="roundRect">
             <a:avLst>
@@ -2967,8 +2967,8 @@
         </p:nvSpPr>
         <p:spPr>
           <a:xfrm>
-            <a:off x="9379001" y="4279392"/>
-            <a:ext cx="1874520" cy="365760"/>
+            <a:off x="9379001" y="5285232"/>
+            <a:ext cx="1874520" cy="384048"/>
           </a:xfrm>
           <a:prstGeom prst="rect">
             <a:avLst/>
@@ -3006,7 +3006,7 @@
         </p:nvSpPr>
         <p:spPr>
           <a:xfrm>
-            <a:off x="11271809" y="4462272"/>
+            <a:off x="11271809" y="5477256"/>
             <a:ext cx="91440" cy="0"/>
           </a:xfrm>
           <a:prstGeom prst="line">
@@ -3030,12 +3030,12 @@
         </p:nvSpPr>
         <p:spPr>
           <a:xfrm>
-            <a:off x="11390681" y="4169664"/>
-            <a:ext cx="2743200" cy="585216"/>
+            <a:off x="11390681" y="5047488"/>
+            <a:ext cx="2743200" cy="859536"/>
           </a:xfrm>
           <a:prstGeom prst="roundRect">
             <a:avLst>
-              <a:gd name="adj" fmla="val 12500"/>
+              <a:gd name="adj" fmla="val 8511"/>
             </a:avLst>
           </a:prstGeom>
           <a:solidFill>
@@ -3057,8 +3057,8 @@
         </p:nvSpPr>
         <p:spPr>
           <a:xfrm>
-            <a:off x="11390681" y="4169664"/>
-            <a:ext cx="2743200" cy="585216"/>
+            <a:off x="11390681" y="5047488"/>
+            <a:ext cx="2743200" cy="859536"/>
           </a:xfrm>
           <a:prstGeom prst="rect">
             <a:avLst/>
@@ -3077,7 +3077,7 @@
               <a:buNone/>
             </a:pPr>
             <a:r>
-              <a:rPr lang="en-US" sz="1400" b="1" dirty="0">
+              <a:rPr lang="en-US" sz="1600" b="1" dirty="0">
                 <a:solidFill>
                   <a:srgbClr val="1E2A5C"/>
                 </a:solidFill>
@@ -3087,7 +3087,7 @@
               </a:rPr>
               <a:t>Consultation</a:t>
             </a:r>
-            <a:endParaRPr lang="en-US" sz="1400" dirty="0"/>
+            <a:endParaRPr lang="en-US" sz="1600" dirty="0"/>
           </a:p>
           <a:p>
             <a:pPr algn="ctr" indent="0" marL="0">
@@ -3107,7 +3107,7 @@
               </a:rPr>
               <a:t>C-20260302-002 (앞 상담)</a:t>
             </a:r>
-            <a:endParaRPr lang="en-US" sz="1400" dirty="0"/>
+            <a:endParaRPr lang="en-US" sz="1600" dirty="0"/>
           </a:p>
         </p:txBody>
       </p:sp>
@@ -3119,12 +3119,12 @@
         </p:nvSpPr>
         <p:spPr>
           <a:xfrm>
-            <a:off x="509321" y="4937760"/>
-            <a:ext cx="3268980" cy="1097280"/>
+            <a:off x="509321" y="6089904"/>
+            <a:ext cx="3268980" cy="1179576"/>
           </a:xfrm>
           <a:prstGeom prst="roundRect">
             <a:avLst>
-              <a:gd name="adj" fmla="val 6667"/>
+              <a:gd name="adj" fmla="val 6202"/>
             </a:avLst>
           </a:prstGeom>
           <a:solidFill>
@@ -3146,7 +3146,7 @@
         </p:nvSpPr>
         <p:spPr>
           <a:xfrm>
-            <a:off x="619049" y="5047488"/>
+            <a:off x="619049" y="6245352"/>
             <a:ext cx="329184" cy="329184"/>
           </a:xfrm>
           <a:prstGeom prst="roundRect">
@@ -3168,7 +3168,7 @@
         </p:nvSpPr>
         <p:spPr>
           <a:xfrm>
-            <a:off x="619049" y="5047488"/>
+            <a:off x="619049" y="6245352"/>
             <a:ext cx="329184" cy="329184"/>
           </a:xfrm>
           <a:prstGeom prst="rect">
@@ -3207,8 +3207,8 @@
         </p:nvSpPr>
         <p:spPr>
           <a:xfrm>
-            <a:off x="1012241" y="5010912"/>
-            <a:ext cx="2674620" cy="402336"/>
+            <a:off x="1012241" y="6144768"/>
+            <a:ext cx="2674620" cy="548640"/>
           </a:xfrm>
           <a:prstGeom prst="rect">
             <a:avLst/>
@@ -3246,8 +3246,8 @@
         </p:nvSpPr>
         <p:spPr>
           <a:xfrm>
-            <a:off x="646481" y="5431536"/>
-            <a:ext cx="2994660" cy="548640"/>
+            <a:off x="646481" y="6711696"/>
+            <a:ext cx="2994660" cy="502920"/>
           </a:xfrm>
           <a:prstGeom prst="rect">
             <a:avLst/>
@@ -3285,12 +3285,12 @@
         </p:nvSpPr>
         <p:spPr>
           <a:xfrm>
-            <a:off x="3961181" y="4937760"/>
-            <a:ext cx="3268980" cy="1097280"/>
+            <a:off x="3961181" y="6089904"/>
+            <a:ext cx="3268980" cy="1179576"/>
           </a:xfrm>
           <a:prstGeom prst="roundRect">
             <a:avLst>
-              <a:gd name="adj" fmla="val 6667"/>
+              <a:gd name="adj" fmla="val 6202"/>
             </a:avLst>
           </a:prstGeom>
           <a:solidFill>
@@ -3312,7 +3312,7 @@
         </p:nvSpPr>
         <p:spPr>
           <a:xfrm>
-            <a:off x="4070909" y="5047488"/>
+            <a:off x="4070909" y="6245352"/>
             <a:ext cx="329184" cy="329184"/>
           </a:xfrm>
           <a:prstGeom prst="roundRect">
@@ -3334,7 +3334,7 @@
         </p:nvSpPr>
         <p:spPr>
           <a:xfrm>
-            <a:off x="4070909" y="5047488"/>
+            <a:off x="4070909" y="6245352"/>
             <a:ext cx="329184" cy="329184"/>
           </a:xfrm>
           <a:prstGeom prst="rect">
@@ -3373,8 +3373,8 @@
         </p:nvSpPr>
         <p:spPr>
           <a:xfrm>
-            <a:off x="4464101" y="5010912"/>
-            <a:ext cx="2674620" cy="402336"/>
+            <a:off x="4464101" y="6144768"/>
+            <a:ext cx="2674620" cy="548640"/>
           </a:xfrm>
           <a:prstGeom prst="rect">
             <a:avLst/>
@@ -3412,8 +3412,8 @@
         </p:nvSpPr>
         <p:spPr>
           <a:xfrm>
-            <a:off x="4098341" y="5431536"/>
-            <a:ext cx="2994660" cy="548640"/>
+            <a:off x="4098341" y="6711696"/>
+            <a:ext cx="2994660" cy="502920"/>
           </a:xfrm>
           <a:prstGeom prst="rect">
             <a:avLst/>
@@ -3451,12 +3451,12 @@
         </p:nvSpPr>
         <p:spPr>
           <a:xfrm>
-            <a:off x="7413041" y="4937760"/>
-            <a:ext cx="3268980" cy="1097280"/>
+            <a:off x="7413041" y="6089904"/>
+            <a:ext cx="3268980" cy="1179576"/>
           </a:xfrm>
           <a:prstGeom prst="roundRect">
             <a:avLst>
-              <a:gd name="adj" fmla="val 6667"/>
+              <a:gd name="adj" fmla="val 6202"/>
             </a:avLst>
           </a:prstGeom>
           <a:solidFill>
@@ -3478,7 +3478,7 @@
         </p:nvSpPr>
         <p:spPr>
           <a:xfrm>
-            <a:off x="7522769" y="5047488"/>
+            <a:off x="7522769" y="6245352"/>
             <a:ext cx="329184" cy="329184"/>
           </a:xfrm>
           <a:prstGeom prst="roundRect">
@@ -3500,7 +3500,7 @@
         </p:nvSpPr>
         <p:spPr>
           <a:xfrm>
-            <a:off x="7522769" y="5047488"/>
+            <a:off x="7522769" y="6245352"/>
             <a:ext cx="329184" cy="329184"/>
           </a:xfrm>
           <a:prstGeom prst="rect">
@@ -3539,8 +3539,8 @@
         </p:nvSpPr>
         <p:spPr>
           <a:xfrm>
-            <a:off x="7915961" y="5010912"/>
-            <a:ext cx="2674620" cy="402336"/>
+            <a:off x="7915961" y="6144768"/>
+            <a:ext cx="2674620" cy="548640"/>
           </a:xfrm>
           <a:prstGeom prst="rect">
             <a:avLst/>
@@ -3578,8 +3578,8 @@
         </p:nvSpPr>
         <p:spPr>
           <a:xfrm>
-            <a:off x="7550201" y="5431536"/>
-            <a:ext cx="2994660" cy="548640"/>
+            <a:off x="7550201" y="6711696"/>
+            <a:ext cx="2994660" cy="502920"/>
           </a:xfrm>
           <a:prstGeom prst="rect">
             <a:avLst/>
@@ -3617,12 +3617,12 @@
         </p:nvSpPr>
         <p:spPr>
           <a:xfrm>
-            <a:off x="10864901" y="4937760"/>
-            <a:ext cx="3268980" cy="1097280"/>
+            <a:off x="10864901" y="6089904"/>
+            <a:ext cx="3268980" cy="1179576"/>
           </a:xfrm>
           <a:prstGeom prst="roundRect">
             <a:avLst>
-              <a:gd name="adj" fmla="val 6667"/>
+              <a:gd name="adj" fmla="val 6202"/>
             </a:avLst>
           </a:prstGeom>
           <a:solidFill>
@@ -3644,7 +3644,7 @@
         </p:nvSpPr>
         <p:spPr>
           <a:xfrm>
-            <a:off x="10974629" y="5047488"/>
+            <a:off x="10974629" y="6245352"/>
             <a:ext cx="329184" cy="329184"/>
           </a:xfrm>
           <a:prstGeom prst="roundRect">
@@ -3666,7 +3666,7 @@
         </p:nvSpPr>
         <p:spPr>
           <a:xfrm>
-            <a:off x="10974629" y="5047488"/>
+            <a:off x="10974629" y="6245352"/>
             <a:ext cx="329184" cy="329184"/>
           </a:xfrm>
           <a:prstGeom prst="rect">
@@ -3705,8 +3705,8 @@
         </p:nvSpPr>
         <p:spPr>
           <a:xfrm>
-            <a:off x="11367821" y="5010912"/>
-            <a:ext cx="2674620" cy="402336"/>
+            <a:off x="11367821" y="6144768"/>
+            <a:ext cx="2674620" cy="548640"/>
           </a:xfrm>
           <a:prstGeom prst="rect">
             <a:avLst/>
@@ -3730,7 +3730,7 @@
                 <a:ea typeface="Pretendard" pitchFamily="34" charset="-122"/>
                 <a:cs typeface="Pretendard" pitchFamily="34" charset="-120"/>
               </a:rPr>
-              <a:t>노드 ID 앞 단위 ID는 임시</a:t>
+              <a:t>스키마 밖은 K3(가지치기)단계에서 지움</a:t>
             </a:r>
             <a:endParaRPr lang="en-US" sz="1500" dirty="0"/>
           </a:p>
@@ -3744,8 +3744,8 @@
         </p:nvSpPr>
         <p:spPr>
           <a:xfrm>
-            <a:off x="11002061" y="5431536"/>
-            <a:ext cx="2994660" cy="548640"/>
+            <a:off x="11002061" y="6711696"/>
+            <a:ext cx="2994660" cy="502920"/>
           </a:xfrm>
           <a:prstGeom prst="rect">
             <a:avLst/>
@@ -3769,93 +3769,9 @@
                 <a:ea typeface="Pretendard" pitchFamily="34" charset="-122"/>
                 <a:cs typeface="Pretendard" pitchFamily="34" charset="-120"/>
               </a:rPr>
-              <a:t>단위끼리 ID가 겹치지 않게 함. K4 적재 중에만 씀</a:t>
+              <a:t>스키마에 없는 노드, 관계, 속성은 바로 가지치기</a:t>
             </a:r>
             <a:endParaRPr lang="en-US" sz="1400" dirty="0"/>
-          </a:p>
-        </p:txBody>
-      </p:sp>
-      <p:sp>
-        <p:nvSpPr>
-          <p:cNvPr id="73" name="Shape 70"/>
-          <p:cNvSpPr/>
-          <p:nvPr/>
-        </p:nvSpPr>
-        <p:spPr>
-          <a:xfrm>
-            <a:off x="509321" y="6172200"/>
-            <a:ext cx="13624560" cy="868680"/>
-          </a:xfrm>
-          <a:prstGeom prst="roundRect">
-            <a:avLst>
-              <a:gd name="adj" fmla="val 8421"/>
-            </a:avLst>
-          </a:prstGeom>
-          <a:solidFill>
-            <a:srgbClr val="1E2A5C"/>
-          </a:solidFill>
-          <a:ln/>
-        </p:spPr>
-      </p:sp>
-      <p:sp>
-        <p:nvSpPr>
-          <p:cNvPr id="74" name="Text 71"/>
-          <p:cNvSpPr txBox="1"/>
-          <p:nvPr/>
-        </p:nvSpPr>
-        <p:spPr>
-          <a:xfrm>
-            <a:off x="509321" y="6172200"/>
-            <a:ext cx="13624560" cy="868680"/>
-          </a:xfrm>
-          <a:prstGeom prst="rect">
-            <a:avLst/>
-          </a:prstGeom>
-          <a:noFill/>
-          <a:ln/>
-        </p:spPr>
-        <p:txBody>
-          <a:bodyPr wrap="square" lIns="635" tIns="635" rIns="635" bIns="635" rtlCol="0" anchor="ctr"/>
-          <a:lstStyle/>
-          <a:p>
-            <a:pPr algn="ctr" indent="0" marL="0">
-              <a:spcAft>
-                <a:spcPts val="100"/>
-              </a:spcAft>
-              <a:buNone/>
-            </a:pPr>
-            <a:r>
-              <a:rPr lang="en-US" sz="1600" b="1" dirty="0">
-                <a:solidFill>
-                  <a:srgbClr val="FFFFFF"/>
-                </a:solidFill>
-                <a:latin typeface="Pretendard" pitchFamily="34" charset="0"/>
-                <a:ea typeface="Pretendard" pitchFamily="34" charset="-122"/>
-                <a:cs typeface="Pretendard" pitchFamily="34" charset="-120"/>
-              </a:rPr>
-              <a:t>v0 표본: 전체 재색인 단위 24개, LLM 24번, 실패 0, 토큰 76,401 / 증분 색인 LLM 1번, 3개 재사용</a:t>
-            </a:r>
-            <a:endParaRPr lang="en-US" sz="1600" dirty="0"/>
-          </a:p>
-          <a:p>
-            <a:pPr algn="ctr" indent="0" marL="0">
-              <a:spcAft>
-                <a:spcPts val="100"/>
-              </a:spcAft>
-              <a:buNone/>
-            </a:pPr>
-            <a:r>
-              <a:rPr lang="en-US" sz="1500" dirty="0">
-                <a:solidFill>
-                  <a:srgbClr val="FFFFFF"/>
-                </a:solidFill>
-                <a:latin typeface="Pretendard" pitchFamily="34" charset="0"/>
-                <a:ea typeface="Pretendard" pitchFamily="34" charset="-122"/>
-                <a:cs typeface="Pretendard" pitchFamily="34" charset="-120"/>
-              </a:rPr>
-              <a:t>결과는 K3까지 마친 뒤 kg_prepared.json에 보관만 함. Neo4j에는 K4 반영 때 씀</a:t>
-            </a:r>
-            <a:endParaRPr lang="en-US" sz="1600" dirty="0"/>
           </a:p>
         </p:txBody>
       </p:sp>
@@ -4006,7 +3922,7 @@
                 <a:ea typeface="Pretendard SemiBold" pitchFamily="34" charset="-122"/>
                 <a:cs typeface="Pretendard SemiBold" pitchFamily="34" charset="-120"/>
               </a:rPr>
-              <a:t>추출기는 한 번 만들고, 단위마다 머리줄을 붙여 부르며, K3 가지치기까지 마친 결과를 파일로 보관함</a:t>
+              <a:t>추출기는 한 번 만들고, 단위마다 머리줄을 붙여 부르며, 한 함수 안에서 K2 추출과 K3 가지치기를 함께 수행함</a:t>
             </a:r>
             <a:endParaRPr lang="en-US" sz="1800" dirty="0"/>
           </a:p>
@@ -4146,7 +4062,7 @@
               <a:buNone/>
             </a:pPr>
             <a:r>
-              <a:rPr lang="en-US" sz="1400" dirty="0">
+              <a:rPr lang="en-US" sz="1400" b="1" dirty="0">
                 <a:solidFill>
                   <a:srgbClr val="2B3242"/>
                 </a:solidFill>
@@ -4154,11 +4070,8 @@
                 <a:ea typeface="Pretendard" pitchFamily="34" charset="-122"/>
                 <a:cs typeface="Pretendard" pitchFamily="34" charset="-120"/>
               </a:rPr>
-              <a:t>extractor = LLMEntityRelationExtractor(llm=llm,</a:t>
-            </a:r>
-            <a:endParaRPr lang="en-US" sz="1400" dirty="0"/>
-          </a:p>
-          <a:p>
+              <a:t>extractor = LLMEntityRelationExtractor</a:t>
+            </a:r>
             <a:pPr indent="0" marL="0">
               <a:lnSpc>
                 <a:spcPct val="105000"/>
@@ -4174,7 +4087,7 @@
                 <a:ea typeface="Pretendard" pitchFamily="34" charset="-122"/>
                 <a:cs typeface="Pretendard" pitchFamily="34" charset="-120"/>
               </a:rPr>
-              <a:t>    create_lexical_graph=False, on_error=OnError.RAISE)</a:t>
+              <a:t>(llm=llm,</a:t>
             </a:r>
             <a:endParaRPr lang="en-US" sz="1400" dirty="0"/>
           </a:p>
@@ -4194,7 +4107,7 @@
                 <a:ea typeface="Pretendard" pitchFamily="34" charset="-122"/>
                 <a:cs typeface="Pretendard" pitchFamily="34" charset="-120"/>
               </a:rPr>
-              <a:t>pruner, sem = GraphPruning(), asyncio.Semaphore(config.LLM_CONCURRENCY)</a:t>
+              <a:t>    create_lexical_graph=False, on_error=OnError.RAISE)</a:t>
             </a:r>
             <a:endParaRPr lang="en-US" sz="1400" dirty="0"/>
           </a:p>
@@ -4205,26 +4118,23 @@
               </a:lnSpc>
               <a:buNone/>
             </a:pPr>
-            <a:endParaRPr lang="en-US" sz="1400" dirty="0"/>
-          </a:p>
-          <a:p>
+            <a:r>
+              <a:rPr lang="en-US" sz="1400" b="1" dirty="0">
+                <a:solidFill>
+                  <a:srgbClr val="2B3242"/>
+                </a:solidFill>
+                <a:latin typeface="Pretendard" pitchFamily="34" charset="0"/>
+                <a:ea typeface="Pretendard" pitchFamily="34" charset="-122"/>
+                <a:cs typeface="Pretendard" pitchFamily="34" charset="-120"/>
+              </a:rPr>
+              <a:t>pruner, sem = GraphPruning(), asyncio.Semaphore(config.LLM_CONCURRENCY)</a:t>
+            </a:r>
             <a:pPr indent="0" marL="0">
               <a:lnSpc>
                 <a:spcPct val="105000"/>
               </a:lnSpc>
               <a:buNone/>
             </a:pPr>
-            <a:r>
-              <a:rPr lang="en-US" sz="1400" dirty="0">
-                <a:solidFill>
-                  <a:srgbClr val="2B3242"/>
-                </a:solidFill>
-                <a:latin typeface="Pretendard" pitchFamily="34" charset="0"/>
-                <a:ea typeface="Pretendard" pitchFamily="34" charset="-122"/>
-                <a:cs typeface="Pretendard" pitchFamily="34" charset="-120"/>
-              </a:rPr>
-              <a:t>async def _k2_k3_one(sem, extractor, pruner, unit, spec):</a:t>
-            </a:r>
             <a:endParaRPr lang="en-US" sz="1400" dirty="0"/>
           </a:p>
           <a:p>
@@ -4234,17 +4144,6 @@
               </a:lnSpc>
               <a:buNone/>
             </a:pPr>
-            <a:r>
-              <a:rPr lang="en-US" sz="1400" dirty="0">
-                <a:solidFill>
-                  <a:srgbClr val="2B3242"/>
-                </a:solidFill>
-                <a:latin typeface="Pretendard" pitchFamily="34" charset="0"/>
-                <a:ea typeface="Pretendard" pitchFamily="34" charset="-122"/>
-                <a:cs typeface="Pretendard" pitchFamily="34" charset="-120"/>
-              </a:rPr>
-              <a:t>    async with sem:                               # 동시 4건</a:t>
-            </a:r>
             <a:endParaRPr lang="en-US" sz="1400" dirty="0"/>
           </a:p>
           <a:p>
@@ -4263,7 +4162,7 @@
                 <a:ea typeface="Pretendard" pitchFamily="34" charset="-122"/>
                 <a:cs typeface="Pretendard" pitchFamily="34" charset="-120"/>
               </a:rPr>
-              <a:t>        text = _head_line(unit["metadata"], spec["header"]) + unit["text"]</a:t>
+              <a:t>async def _k2_k3_one(sem, extractor, pruner, unit, spec):   # K2와 K3를 함께</a:t>
             </a:r>
             <a:endParaRPr lang="en-US" sz="1400" dirty="0"/>
           </a:p>
@@ -4283,7 +4182,7 @@
                 <a:ea typeface="Pretendard" pitchFamily="34" charset="-122"/>
                 <a:cs typeface="Pretendard" pitchFamily="34" charset="-120"/>
               </a:rPr>
-              <a:t>        for attempt in range(config.LLM_RETRIES + 1):    # 2번까지 다시</a:t>
+              <a:t>    async with sem:                               # 동시 4건</a:t>
             </a:r>
             <a:endParaRPr lang="en-US" sz="1400" dirty="0"/>
           </a:p>
@@ -4303,7 +4202,7 @@
                 <a:ea typeface="Pretendard" pitchFamily="34" charset="-122"/>
                 <a:cs typeface="Pretendard" pitchFamily="34" charset="-120"/>
               </a:rPr>
-              <a:t>            try:</a:t>
+              <a:t>        text = _head_line(unit["metadata"], spec["header"]) + unit["text"]</a:t>
             </a:r>
             <a:endParaRPr lang="en-US" sz="1400" dirty="0"/>
           </a:p>
@@ -4323,7 +4222,7 @@
                 <a:ea typeface="Pretendard" pitchFamily="34" charset="-122"/>
                 <a:cs typeface="Pretendard" pitchFamily="34" charset="-120"/>
               </a:rPr>
-              <a:t>                graph = await extractor.run(chunks=TextChunks(chunks=[</a:t>
+              <a:t>        for attempt in range(config.LLM_RETRIES + 1):    # 2번까지 다시</a:t>
             </a:r>
             <a:endParaRPr lang="en-US" sz="1400" dirty="0"/>
           </a:p>
@@ -4343,7 +4242,7 @@
                 <a:ea typeface="Pretendard" pitchFamily="34" charset="-122"/>
                 <a:cs typeface="Pretendard" pitchFamily="34" charset="-120"/>
               </a:rPr>
-              <a:t>                    TextChunk(text=text, index=0, uid=unit["unit_id"])]),</a:t>
+              <a:t>            try:</a:t>
             </a:r>
             <a:endParaRPr lang="en-US" sz="1400" dirty="0"/>
           </a:p>
@@ -4363,11 +4262,8 @@
                 <a:ea typeface="Pretendard" pitchFamily="34" charset="-122"/>
                 <a:cs typeface="Pretendard" pitchFamily="34" charset="-120"/>
               </a:rPr>
-              <a:t>                    schema=spec["schema"])</a:t>
-            </a:r>
-            <a:endParaRPr lang="en-US" sz="1400" dirty="0"/>
-          </a:p>
-          <a:p>
+              <a:t>                </a:t>
+            </a:r>
             <a:pPr indent="0" marL="0">
               <a:lnSpc>
                 <a:spcPct val="105000"/>
@@ -4375,7 +4271,7 @@
               <a:buNone/>
             </a:pPr>
             <a:r>
-              <a:rPr lang="en-US" sz="1400" dirty="0">
+              <a:rPr lang="en-US" sz="1400" b="1" dirty="0">
                 <a:solidFill>
                   <a:srgbClr val="2B3242"/>
                 </a:solidFill>
@@ -4383,11 +4279,8 @@
                 <a:ea typeface="Pretendard" pitchFamily="34" charset="-122"/>
                 <a:cs typeface="Pretendard" pitchFamily="34" charset="-120"/>
               </a:rPr>
-              <a:t>                break</a:t>
-            </a:r>
-            <a:endParaRPr lang="en-US" sz="1400" dirty="0"/>
-          </a:p>
-          <a:p>
+              <a:t>graph = await extractor.run</a:t>
+            </a:r>
             <a:pPr indent="0" marL="0">
               <a:lnSpc>
                 <a:spcPct val="105000"/>
@@ -4403,7 +4296,7 @@
                 <a:ea typeface="Pretendard" pitchFamily="34" charset="-122"/>
                 <a:cs typeface="Pretendard" pitchFamily="34" charset="-120"/>
               </a:rPr>
-              <a:t>            except Exception as e:</a:t>
+              <a:t>(chunks=TextChunks(chunks=[</a:t>
             </a:r>
             <a:endParaRPr lang="en-US" sz="1400" dirty="0"/>
           </a:p>
@@ -4423,7 +4316,7 @@
                 <a:ea typeface="Pretendard" pitchFamily="34" charset="-122"/>
                 <a:cs typeface="Pretendard" pitchFamily="34" charset="-120"/>
               </a:rPr>
-              <a:t>                if attempt == config.LLM_RETRIES:   # 실패는 기록용으로 돌려줌</a:t>
+              <a:t>                    TextChunk(text=text, index=0, uid=unit["unit_id"])]),</a:t>
             </a:r>
             <a:endParaRPr lang="en-US" sz="1400" dirty="0"/>
           </a:p>
@@ -4443,7 +4336,7 @@
                 <a:ea typeface="Pretendard" pitchFamily="34" charset="-122"/>
                 <a:cs typeface="Pretendard" pitchFamily="34" charset="-120"/>
               </a:rPr>
-              <a:t>                    return {"error": f"{type(e).__name__}: {str(e)[:200]}"}</a:t>
+              <a:t>                    schema=spec["schema"])</a:t>
             </a:r>
             <a:endParaRPr lang="en-US" sz="1400" dirty="0"/>
           </a:p>
@@ -4463,7 +4356,7 @@
                 <a:ea typeface="Pretendard" pitchFamily="34" charset="-122"/>
                 <a:cs typeface="Pretendard" pitchFamily="34" charset="-120"/>
               </a:rPr>
-              <a:t>        pruned = (await pruner.run(graph, spec["schema"])).graph   # K3</a:t>
+              <a:t>                break</a:t>
             </a:r>
             <a:endParaRPr lang="en-US" sz="1400" dirty="0"/>
           </a:p>
@@ -4483,6 +4376,109 @@
                 <a:ea typeface="Pretendard" pitchFamily="34" charset="-122"/>
                 <a:cs typeface="Pretendard" pitchFamily="34" charset="-120"/>
               </a:rPr>
+              <a:t>            except Exception as e:</a:t>
+            </a:r>
+            <a:endParaRPr lang="en-US" sz="1400" dirty="0"/>
+          </a:p>
+          <a:p>
+            <a:pPr indent="0" marL="0">
+              <a:lnSpc>
+                <a:spcPct val="105000"/>
+              </a:lnSpc>
+              <a:buNone/>
+            </a:pPr>
+            <a:r>
+              <a:rPr lang="en-US" sz="1400" dirty="0">
+                <a:solidFill>
+                  <a:srgbClr val="2B3242"/>
+                </a:solidFill>
+                <a:latin typeface="Pretendard" pitchFamily="34" charset="0"/>
+                <a:ea typeface="Pretendard" pitchFamily="34" charset="-122"/>
+                <a:cs typeface="Pretendard" pitchFamily="34" charset="-120"/>
+              </a:rPr>
+              <a:t>                if attempt == config.LLM_RETRIES:   # 실패는 기록용으로 돌려줌</a:t>
+            </a:r>
+            <a:endParaRPr lang="en-US" sz="1400" dirty="0"/>
+          </a:p>
+          <a:p>
+            <a:pPr indent="0" marL="0">
+              <a:lnSpc>
+                <a:spcPct val="105000"/>
+              </a:lnSpc>
+              <a:buNone/>
+            </a:pPr>
+            <a:r>
+              <a:rPr lang="en-US" sz="1400" dirty="0">
+                <a:solidFill>
+                  <a:srgbClr val="2B3242"/>
+                </a:solidFill>
+                <a:latin typeface="Pretendard" pitchFamily="34" charset="0"/>
+                <a:ea typeface="Pretendard" pitchFamily="34" charset="-122"/>
+                <a:cs typeface="Pretendard" pitchFamily="34" charset="-120"/>
+              </a:rPr>
+              <a:t>                    return {"error": f"{type(e).__name__}: {str(e)[:200]}"}</a:t>
+            </a:r>
+            <a:endParaRPr lang="en-US" sz="1400" dirty="0"/>
+          </a:p>
+          <a:p>
+            <a:pPr indent="0" marL="0">
+              <a:lnSpc>
+                <a:spcPct val="105000"/>
+              </a:lnSpc>
+              <a:buNone/>
+            </a:pPr>
+            <a:r>
+              <a:rPr lang="en-US" sz="1400" dirty="0">
+                <a:solidFill>
+                  <a:srgbClr val="2B3242"/>
+                </a:solidFill>
+                <a:latin typeface="Pretendard" pitchFamily="34" charset="0"/>
+                <a:ea typeface="Pretendard" pitchFamily="34" charset="-122"/>
+                <a:cs typeface="Pretendard" pitchFamily="34" charset="-120"/>
+              </a:rPr>
+              <a:t>        </a:t>
+            </a:r>
+            <a:pPr indent="0" marL="0">
+              <a:lnSpc>
+                <a:spcPct val="105000"/>
+              </a:lnSpc>
+              <a:buNone/>
+            </a:pPr>
+            <a:r>
+              <a:rPr lang="en-US" sz="1400" b="1" dirty="0">
+                <a:solidFill>
+                  <a:srgbClr val="2B3242"/>
+                </a:solidFill>
+                <a:latin typeface="Pretendard" pitchFamily="34" charset="0"/>
+                <a:ea typeface="Pretendard" pitchFamily="34" charset="-122"/>
+                <a:cs typeface="Pretendard" pitchFamily="34" charset="-120"/>
+              </a:rPr>
+              <a:t>pruned = (await pruner.run(graph, spec["schema"])).graph   # K3: 추출 직후 바로</a:t>
+            </a:r>
+            <a:pPr indent="0" marL="0">
+              <a:lnSpc>
+                <a:spcPct val="105000"/>
+              </a:lnSpc>
+              <a:buNone/>
+            </a:pPr>
+            <a:endParaRPr lang="en-US" sz="1400" dirty="0"/>
+          </a:p>
+          <a:p>
+            <a:pPr indent="0" marL="0">
+              <a:lnSpc>
+                <a:spcPct val="105000"/>
+              </a:lnSpc>
+              <a:buNone/>
+            </a:pPr>
+            <a:r>
+              <a:rPr lang="en-US" sz="1400" dirty="0">
+                <a:solidFill>
+                  <a:srgbClr val="2B3242"/>
+                </a:solidFill>
+                <a:latin typeface="Pretendard" pitchFamily="34" charset="0"/>
+                <a:ea typeface="Pretendard" pitchFamily="34" charset="-122"/>
+                <a:cs typeface="Pretendard" pitchFamily="34" charset="-120"/>
+              </a:rPr>
               <a:t>        return {"graph": pruned.model_dump(), …}</a:t>
             </a:r>
             <a:endParaRPr lang="en-US" sz="1400" dirty="0"/>
@@ -4498,11 +4494,11 @@
         <p:spPr>
           <a:xfrm>
             <a:off x="8144561" y="1737360"/>
-            <a:ext cx="5989320" cy="2880360"/>
+            <a:ext cx="5989320" cy="3017520"/>
           </a:xfrm>
           <a:prstGeom prst="roundRect">
             <a:avLst>
-              <a:gd name="adj" fmla="val 1905"/>
+              <a:gd name="adj" fmla="val 1818"/>
             </a:avLst>
           </a:prstGeom>
           <a:solidFill>
@@ -4549,7 +4545,7 @@
                 <a:ea typeface="Pretendard" pitchFamily="34" charset="-122"/>
                 <a:cs typeface="Pretendard" pitchFamily="34" charset="-120"/>
               </a:rPr>
-              <a:t>kg_prepared.json에 보관한 결과 (일부)</a:t>
+              <a:t>LLM이 돌려준 그래프 (예시 상담, 일부)</a:t>
             </a:r>
             <a:endParaRPr lang="en-US" sz="1400" dirty="0"/>
           </a:p>
@@ -4564,7 +4560,7 @@
         <p:spPr>
           <a:xfrm>
             <a:off x="8254289" y="2139696"/>
-            <a:ext cx="5769864" cy="2423160"/>
+            <a:ext cx="5769864" cy="2560320"/>
           </a:xfrm>
           <a:prstGeom prst="rect">
             <a:avLst/>
@@ -4591,7 +4587,7 @@
                 <a:ea typeface="Pretendard" pitchFamily="34" charset="-122"/>
                 <a:cs typeface="Pretendard" pitchFamily="34" charset="-120"/>
               </a:rPr>
-              <a:t>{"unit_id": "D3_C-20260501-003_c797…_0000",</a:t>
+              <a:t>{"nodes": [</a:t>
             </a:r>
             <a:endParaRPr lang="en-US" sz="1400" dirty="0"/>
           </a:p>
@@ -4611,7 +4607,7 @@
                 <a:ea typeface="Pretendard" pitchFamily="34" charset="-122"/>
                 <a:cs typeface="Pretendard" pitchFamily="34" charset="-120"/>
               </a:rPr>
-              <a:t> "text_hash": "…", "schema_signature": "…",</a:t>
+              <a:t>  {"id": "c0", "label": "Consultation", …},</a:t>
             </a:r>
             <a:endParaRPr lang="en-US" sz="1400" dirty="0"/>
           </a:p>
@@ -4631,7 +4627,7 @@
                 <a:ea typeface="Pretendard" pitchFamily="34" charset="-122"/>
                 <a:cs typeface="Pretendard" pitchFamily="34" charset="-120"/>
               </a:rPr>
-              <a:t> "graph": {"nodes": [ …,</a:t>
+              <a:t>  {"id": "p1", "label": "Proposal",</a:t>
             </a:r>
             <a:endParaRPr lang="en-US" sz="1400" dirty="0"/>
           </a:p>
@@ -4651,7 +4647,7 @@
                 <a:ea typeface="Pretendard" pitchFamily="34" charset="-122"/>
                 <a:cs typeface="Pretendard" pitchFamily="34" charset="-120"/>
               </a:rPr>
-              <a:t>   {"id": "D3_C-20260501-003_c797…_0000:p1",</a:t>
+              <a:t>   "properties": {"content": "그러면 주문 내역 화면으로 …",</a:t>
             </a:r>
             <a:endParaRPr lang="en-US" sz="1400" dirty="0"/>
           </a:p>
@@ -4671,7 +4667,7 @@
                 <a:ea typeface="Pretendard" pitchFamily="34" charset="-122"/>
                 <a:cs typeface="Pretendard" pitchFamily="34" charset="-120"/>
               </a:rPr>
-              <a:t>    "label": "Proposal",</a:t>
+              <a:t>                  "decision": "수용"}},</a:t>
             </a:r>
             <a:endParaRPr lang="en-US" sz="1400" dirty="0"/>
           </a:p>
@@ -4691,7 +4687,7 @@
                 <a:ea typeface="Pretendard" pitchFamily="34" charset="-122"/>
                 <a:cs typeface="Pretendard" pitchFamily="34" charset="-120"/>
               </a:rPr>
-              <a:t>    "properties": {"content": "그러면 주문 내역 화면으로 …",</a:t>
+              <a:t>  {"id": "r0", "label": "ReconsiderCondition", …}, … ],</a:t>
             </a:r>
             <a:endParaRPr lang="en-US" sz="1400" dirty="0"/>
           </a:p>
@@ -4711,7 +4707,7 @@
                 <a:ea typeface="Pretendard" pitchFamily="34" charset="-122"/>
                 <a:cs typeface="Pretendard" pitchFamily="34" charset="-120"/>
               </a:rPr>
-              <a:t>                   "decision": "수용"}}, … ],</a:t>
+              <a:t> "relationships": [</a:t>
             </a:r>
             <a:endParaRPr lang="en-US" sz="1400" dirty="0"/>
           </a:p>
@@ -4731,7 +4727,7 @@
                 <a:ea typeface="Pretendard" pitchFamily="34" charset="-122"/>
                 <a:cs typeface="Pretendard" pitchFamily="34" charset="-120"/>
               </a:rPr>
-              <a:t>  "relationships": [ …,</a:t>
+              <a:t>  {"type": "HAS_PROPOSAL",</a:t>
             </a:r>
             <a:endParaRPr lang="en-US" sz="1400" dirty="0"/>
           </a:p>
@@ -4751,7 +4747,7 @@
                 <a:ea typeface="Pretendard" pitchFamily="34" charset="-122"/>
                 <a:cs typeface="Pretendard" pitchFamily="34" charset="-120"/>
               </a:rPr>
-              <a:t>   {"type": "RECONSIDER_WHEN",</a:t>
+              <a:t>   "start_node_id": "c0", "end_node_id": "p1"},</a:t>
             </a:r>
             <a:endParaRPr lang="en-US" sz="1400" dirty="0"/>
           </a:p>
@@ -4771,7 +4767,27 @@
                 <a:ea typeface="Pretendard" pitchFamily="34" charset="-122"/>
                 <a:cs typeface="Pretendard" pitchFamily="34" charset="-120"/>
               </a:rPr>
-              <a:t>    "start_node_id": "…_0000:p1", "end_node_id": "…_0000:r0"}]}}</a:t>
+              <a:t>  {"type": "RECONSIDER_WHEN",</a:t>
+            </a:r>
+            <a:endParaRPr lang="en-US" sz="1400" dirty="0"/>
+          </a:p>
+          <a:p>
+            <a:pPr indent="0" marL="0">
+              <a:lnSpc>
+                <a:spcPct val="105000"/>
+              </a:lnSpc>
+              <a:buNone/>
+            </a:pPr>
+            <a:r>
+              <a:rPr lang="en-US" sz="1400" dirty="0">
+                <a:solidFill>
+                  <a:srgbClr val="2B3242"/>
+                </a:solidFill>
+                <a:latin typeface="Pretendard" pitchFamily="34" charset="0"/>
+                <a:ea typeface="Pretendard" pitchFamily="34" charset="-122"/>
+                <a:cs typeface="Pretendard" pitchFamily="34" charset="-120"/>
+              </a:rPr>
+              <a:t>   "start_node_id": "p1", "end_node_id": "r0"}, … ]}</a:t>
             </a:r>
             <a:endParaRPr lang="en-US" sz="1400" dirty="0"/>
           </a:p>
@@ -4785,12 +4801,12 @@
         </p:nvSpPr>
         <p:spPr>
           <a:xfrm>
-            <a:off x="8144561" y="4709160"/>
-            <a:ext cx="5989320" cy="1691640"/>
+            <a:off x="8144561" y="4846320"/>
+            <a:ext cx="5989320" cy="1600200"/>
           </a:xfrm>
           <a:prstGeom prst="roundRect">
             <a:avLst>
-              <a:gd name="adj" fmla="val 3243"/>
+              <a:gd name="adj" fmla="val 3429"/>
             </a:avLst>
           </a:prstGeom>
           <a:solidFill>
@@ -4812,7 +4828,7 @@
         </p:nvSpPr>
         <p:spPr>
           <a:xfrm>
-            <a:off x="8254289" y="4782312"/>
+            <a:off x="8254289" y="4919472"/>
             <a:ext cx="5769864" cy="310896"/>
           </a:xfrm>
           <a:prstGeom prst="rect">
@@ -4851,8 +4867,8 @@
         </p:nvSpPr>
         <p:spPr>
           <a:xfrm>
-            <a:off x="8254289" y="5111496"/>
-            <a:ext cx="5769864" cy="1234440"/>
+            <a:off x="8254289" y="5248656"/>
+            <a:ext cx="5769864" cy="1143000"/>
           </a:xfrm>
           <a:prstGeom prst="rect">
             <a:avLst/>
@@ -4973,23 +4989,18 @@
         </p:nvSpPr>
         <p:spPr>
           <a:xfrm>
-            <a:off x="8144561" y="6492240"/>
-            <a:ext cx="5989320" cy="777240"/>
+            <a:off x="8144561" y="6537960"/>
+            <a:ext cx="5989320" cy="731520"/>
           </a:xfrm>
           <a:prstGeom prst="roundRect">
             <a:avLst>
-              <a:gd name="adj" fmla="val 9412"/>
+              <a:gd name="adj" fmla="val 10000"/>
             </a:avLst>
           </a:prstGeom>
           <a:solidFill>
-            <a:srgbClr val="F5F8FC"/>
+            <a:srgbClr val="2E74C6"/>
           </a:solidFill>
-          <a:ln w="12700">
-            <a:solidFill>
-              <a:srgbClr val="D9E0EC"/>
-            </a:solidFill>
-            <a:prstDash val="solid"/>
-          </a:ln>
+          <a:ln/>
         </p:spPr>
       </p:sp>
       <p:sp>
@@ -5000,8 +5011,8 @@
         </p:nvSpPr>
         <p:spPr>
           <a:xfrm>
-            <a:off x="8144561" y="6492240"/>
-            <a:ext cx="5989320" cy="777240"/>
+            <a:off x="8144561" y="6537960"/>
+            <a:ext cx="5989320" cy="731520"/>
           </a:xfrm>
           <a:prstGeom prst="rect">
             <a:avLst/>
@@ -5022,13 +5033,13 @@
             <a:r>
               <a:rPr lang="en-US" sz="1500" b="1" dirty="0">
                 <a:solidFill>
-                  <a:srgbClr val="2B3242"/>
-                </a:solidFill>
-                <a:latin typeface="Pretendard" pitchFamily="34" charset="0"/>
-                <a:ea typeface="Pretendard" pitchFamily="34" charset="-122"/>
-                <a:cs typeface="Pretendard" pitchFamily="34" charset="-120"/>
-              </a:rPr>
-              <a:t>응답 다듬기 (GroqLLM._clean)</a:t>
+                  <a:srgbClr val="FFFFFF"/>
+                </a:solidFill>
+                <a:latin typeface="Pretendard" pitchFamily="34" charset="0"/>
+                <a:ea typeface="Pretendard" pitchFamily="34" charset="-122"/>
+                <a:cs typeface="Pretendard" pitchFamily="34" charset="-120"/>
+              </a:rPr>
+              <a:t>K2와 K3는 함께 수행 (_k2_k3_one 한 함수)</a:t>
             </a:r>
             <a:endParaRPr lang="en-US" sz="1500" dirty="0"/>
           </a:p>
@@ -5042,13 +5053,13 @@
             <a:r>
               <a:rPr lang="en-US" sz="1400" dirty="0">
                 <a:solidFill>
-                  <a:srgbClr val="2B3242"/>
-                </a:solidFill>
-                <a:latin typeface="Pretendard" pitchFamily="34" charset="0"/>
-                <a:ea typeface="Pretendard" pitchFamily="34" charset="-122"/>
-                <a:cs typeface="Pretendard" pitchFamily="34" charset="-120"/>
-              </a:rPr>
-              <a:t>정해진 칸 밖 키 제거, id는 글자로, 빈 속성 제거</a:t>
+                  <a:srgbClr val="FFFFFF"/>
+                </a:solidFill>
+                <a:latin typeface="Pretendard" pitchFamily="34" charset="0"/>
+                <a:ea typeface="Pretendard" pitchFamily="34" charset="-122"/>
+                <a:cs typeface="Pretendard" pitchFamily="34" charset="-120"/>
+              </a:rPr>
+              <a:t>추출 직후 바로 가지치기한 뒤 kg_prepared.json에 보관</a:t>
             </a:r>
             <a:endParaRPr lang="en-US" sz="1500" dirty="0"/>
           </a:p>
